--- a/docs/game_manual_GUI.pptx
+++ b/docs/game_manual_GUI.pptx
@@ -14,9 +14,11 @@
     <p:sldId id="265" r:id="rId8"/>
     <p:sldId id="267" r:id="rId9"/>
     <p:sldId id="266" r:id="rId10"/>
-    <p:sldId id="258" r:id="rId11"/>
-    <p:sldId id="268" r:id="rId12"/>
-    <p:sldId id="257" r:id="rId13"/>
+    <p:sldId id="268" r:id="rId11"/>
+    <p:sldId id="269" r:id="rId12"/>
+    <p:sldId id="270" r:id="rId13"/>
+    <p:sldId id="257" r:id="rId14"/>
+    <p:sldId id="258" r:id="rId15"/>
   </p:sldIdLst>
   <p:sldSz cx="13158788" cy="9869488"/>
   <p:notesSz cx="6858000" cy="9144000"/>
@@ -137,7 +139,7 @@
 <file path=ppt/revisionInfo.xml><?xml version="1.0" encoding="utf-8"?>
 <p1510:revInfo xmlns:a="http://schemas.openxmlformats.org/drawingml/2006/main" xmlns:r="http://schemas.openxmlformats.org/officeDocument/2006/relationships" xmlns:p1510="http://schemas.microsoft.com/office/powerpoint/2015/10/main">
   <p1510:revLst>
-    <p1510:client id="{D4F96490-7A8F-452A-9534-CFA9EC1E9C04}" v="2" dt="2026-08-05T21:54:24.087"/>
+    <p1510:client id="{FCEA7D6F-012F-496E-99D3-89C91A14E677}" v="3" dt="2026-08-13T17:01:56.341"/>
   </p1510:revLst>
 </p1510:revInfo>
 </file>
@@ -146,41 +148,918 @@
 <pc:chgInfo xmlns:a="http://schemas.openxmlformats.org/drawingml/2006/main" xmlns:r="http://schemas.openxmlformats.org/officeDocument/2006/relationships" xmlns:ac="http://schemas.microsoft.com/office/drawing/2013/main/command" xmlns:pc="http://schemas.microsoft.com/office/powerpoint/2013/main/command">
   <pc:docChgLst>
     <pc:chgData name="Patrick Chromy" userId="f75110142f2032e8" providerId="LiveId" clId="{A60AB22C-9B23-4A50-A013-0F4752E49A98}"/>
-    <pc:docChg chg="undo custSel modSld">
-      <pc:chgData name="Patrick Chromy" userId="f75110142f2032e8" providerId="LiveId" clId="{A60AB22C-9B23-4A50-A013-0F4752E49A98}" dt="2026-08-05T21:56:57.983" v="20" actId="478"/>
+    <pc:docChg chg="undo redo custSel addSld modSld sldOrd">
+      <pc:chgData name="Patrick Chromy" userId="f75110142f2032e8" providerId="LiveId" clId="{A60AB22C-9B23-4A50-A013-0F4752E49A98}" dt="2026-08-13T22:13:28.926" v="3062" actId="14826"/>
       <pc:docMkLst>
         <pc:docMk/>
       </pc:docMkLst>
+      <pc:sldChg chg="ord">
+        <pc:chgData name="Patrick Chromy" userId="f75110142f2032e8" providerId="LiveId" clId="{A60AB22C-9B23-4A50-A013-0F4752E49A98}" dt="2026-08-13T21:40:20.166" v="2004"/>
+        <pc:sldMkLst>
+          <pc:docMk/>
+          <pc:sldMk cId="0" sldId="258"/>
+        </pc:sldMkLst>
+      </pc:sldChg>
+      <pc:sldChg chg="modSp mod">
+        <pc:chgData name="Patrick Chromy" userId="f75110142f2032e8" providerId="LiveId" clId="{A60AB22C-9B23-4A50-A013-0F4752E49A98}" dt="2026-08-13T21:24:09.427" v="1599" actId="12"/>
+        <pc:sldMkLst>
+          <pc:docMk/>
+          <pc:sldMk cId="374477595" sldId="260"/>
+        </pc:sldMkLst>
+        <pc:spChg chg="mod">
+          <ac:chgData name="Patrick Chromy" userId="f75110142f2032e8" providerId="LiveId" clId="{A60AB22C-9B23-4A50-A013-0F4752E49A98}" dt="2026-08-13T17:00:25.609" v="1017" actId="20577"/>
+          <ac:spMkLst>
+            <pc:docMk/>
+            <pc:sldMk cId="374477595" sldId="260"/>
+            <ac:spMk id="5" creationId="{31BFF457-000F-10E1-9F61-8771550759B9}"/>
+          </ac:spMkLst>
+        </pc:spChg>
+        <pc:spChg chg="mod">
+          <ac:chgData name="Patrick Chromy" userId="f75110142f2032e8" providerId="LiveId" clId="{A60AB22C-9B23-4A50-A013-0F4752E49A98}" dt="2026-08-13T17:00:29.049" v="1018" actId="20577"/>
+          <ac:spMkLst>
+            <pc:docMk/>
+            <pc:sldMk cId="374477595" sldId="260"/>
+            <ac:spMk id="7" creationId="{DC51DC7A-5F69-E1F1-AAC8-F300B9EF59B0}"/>
+          </ac:spMkLst>
+        </pc:spChg>
+        <pc:spChg chg="mod">
+          <ac:chgData name="Patrick Chromy" userId="f75110142f2032e8" providerId="LiveId" clId="{A60AB22C-9B23-4A50-A013-0F4752E49A98}" dt="2026-08-13T16:59:28.021" v="1005" actId="14100"/>
+          <ac:spMkLst>
+            <pc:docMk/>
+            <pc:sldMk cId="374477595" sldId="260"/>
+            <ac:spMk id="9" creationId="{08C4786D-FDAC-92B8-D7D3-602A3062C7DA}"/>
+          </ac:spMkLst>
+        </pc:spChg>
+        <pc:spChg chg="mod">
+          <ac:chgData name="Patrick Chromy" userId="f75110142f2032e8" providerId="LiveId" clId="{A60AB22C-9B23-4A50-A013-0F4752E49A98}" dt="2026-08-13T16:59:37.929" v="1006" actId="14100"/>
+          <ac:spMkLst>
+            <pc:docMk/>
+            <pc:sldMk cId="374477595" sldId="260"/>
+            <ac:spMk id="11" creationId="{F3ABE274-34EC-B202-168B-119E98350FA0}"/>
+          </ac:spMkLst>
+        </pc:spChg>
+        <pc:spChg chg="mod">
+          <ac:chgData name="Patrick Chromy" userId="f75110142f2032e8" providerId="LiveId" clId="{A60AB22C-9B23-4A50-A013-0F4752E49A98}" dt="2026-08-13T21:24:09.427" v="1599" actId="12"/>
+          <ac:spMkLst>
+            <pc:docMk/>
+            <pc:sldMk cId="374477595" sldId="260"/>
+            <ac:spMk id="15" creationId="{FE9AE574-55E3-063B-020F-CB135101A0A0}"/>
+          </ac:spMkLst>
+        </pc:spChg>
+      </pc:sldChg>
+      <pc:sldChg chg="modSp mod">
+        <pc:chgData name="Patrick Chromy" userId="f75110142f2032e8" providerId="LiveId" clId="{A60AB22C-9B23-4A50-A013-0F4752E49A98}" dt="2026-08-13T21:23:50.420" v="1582" actId="12"/>
+        <pc:sldMkLst>
+          <pc:docMk/>
+          <pc:sldMk cId="4259238244" sldId="261"/>
+        </pc:sldMkLst>
+        <pc:spChg chg="mod">
+          <ac:chgData name="Patrick Chromy" userId="f75110142f2032e8" providerId="LiveId" clId="{A60AB22C-9B23-4A50-A013-0F4752E49A98}" dt="2026-08-13T21:23:50.420" v="1582" actId="12"/>
+          <ac:spMkLst>
+            <pc:docMk/>
+            <pc:sldMk cId="4259238244" sldId="261"/>
+            <ac:spMk id="23" creationId="{1675073B-9309-0A2B-B3FA-13BFA778D617}"/>
+          </ac:spMkLst>
+        </pc:spChg>
+      </pc:sldChg>
       <pc:sldChg chg="addSp delSp modSp mod">
-        <pc:chgData name="Patrick Chromy" userId="f75110142f2032e8" providerId="LiveId" clId="{A60AB22C-9B23-4A50-A013-0F4752E49A98}" dt="2026-08-05T21:56:57.983" v="20" actId="478"/>
+        <pc:chgData name="Patrick Chromy" userId="f75110142f2032e8" providerId="LiveId" clId="{A60AB22C-9B23-4A50-A013-0F4752E49A98}" dt="2026-08-13T21:24:58.866" v="1622" actId="12"/>
+        <pc:sldMkLst>
+          <pc:docMk/>
+          <pc:sldMk cId="1134031056" sldId="262"/>
+        </pc:sldMkLst>
+        <pc:spChg chg="mod ord">
+          <ac:chgData name="Patrick Chromy" userId="f75110142f2032e8" providerId="LiveId" clId="{A60AB22C-9B23-4A50-A013-0F4752E49A98}" dt="2026-08-13T17:01:06.465" v="1050" actId="170"/>
+          <ac:spMkLst>
+            <pc:docMk/>
+            <pc:sldMk cId="1134031056" sldId="262"/>
+            <ac:spMk id="7" creationId="{8D1E6D27-6EB7-CAE1-4D33-1DE28E42C4B6}"/>
+          </ac:spMkLst>
+        </pc:spChg>
+        <pc:spChg chg="mod">
+          <ac:chgData name="Patrick Chromy" userId="f75110142f2032e8" providerId="LiveId" clId="{A60AB22C-9B23-4A50-A013-0F4752E49A98}" dt="2026-08-13T16:32:25.303" v="99" actId="1076"/>
+          <ac:spMkLst>
+            <pc:docMk/>
+            <pc:sldMk cId="1134031056" sldId="262"/>
+            <ac:spMk id="9" creationId="{6FB85184-3CF7-2381-365A-31EBB1CC4DCF}"/>
+          </ac:spMkLst>
+        </pc:spChg>
+        <pc:spChg chg="mod">
+          <ac:chgData name="Patrick Chromy" userId="f75110142f2032e8" providerId="LiveId" clId="{A60AB22C-9B23-4A50-A013-0F4752E49A98}" dt="2026-08-13T16:32:25.303" v="99" actId="1076"/>
+          <ac:spMkLst>
+            <pc:docMk/>
+            <pc:sldMk cId="1134031056" sldId="262"/>
+            <ac:spMk id="11" creationId="{D883B92B-6FD8-D1CF-BA4E-7DE15157FADB}"/>
+          </ac:spMkLst>
+        </pc:spChg>
+        <pc:spChg chg="mod">
+          <ac:chgData name="Patrick Chromy" userId="f75110142f2032e8" providerId="LiveId" clId="{A60AB22C-9B23-4A50-A013-0F4752E49A98}" dt="2026-08-13T17:01:11.863" v="1052" actId="20577"/>
+          <ac:spMkLst>
+            <pc:docMk/>
+            <pc:sldMk cId="1134031056" sldId="262"/>
+            <ac:spMk id="13" creationId="{3E3D407B-C757-4CE4-C175-3BB01A9974AF}"/>
+          </ac:spMkLst>
+        </pc:spChg>
+        <pc:spChg chg="mod">
+          <ac:chgData name="Patrick Chromy" userId="f75110142f2032e8" providerId="LiveId" clId="{A60AB22C-9B23-4A50-A013-0F4752E49A98}" dt="2026-08-13T21:24:58.866" v="1622" actId="12"/>
+          <ac:spMkLst>
+            <pc:docMk/>
+            <pc:sldMk cId="1134031056" sldId="262"/>
+            <ac:spMk id="15" creationId="{5BA5A410-20E3-545A-C1F9-74F9053ACB1B}"/>
+          </ac:spMkLst>
+        </pc:spChg>
+        <pc:spChg chg="mod">
+          <ac:chgData name="Patrick Chromy" userId="f75110142f2032e8" providerId="LiveId" clId="{A60AB22C-9B23-4A50-A013-0F4752E49A98}" dt="2026-08-13T16:32:25.303" v="99" actId="1076"/>
+          <ac:spMkLst>
+            <pc:docMk/>
+            <pc:sldMk cId="1134031056" sldId="262"/>
+            <ac:spMk id="19" creationId="{958E327C-38CC-EDA3-02E0-814032F7B874}"/>
+          </ac:spMkLst>
+        </pc:spChg>
+        <pc:spChg chg="mod">
+          <ac:chgData name="Patrick Chromy" userId="f75110142f2032e8" providerId="LiveId" clId="{A60AB22C-9B23-4A50-A013-0F4752E49A98}" dt="2026-08-13T17:01:23.800" v="1054" actId="20577"/>
+          <ac:spMkLst>
+            <pc:docMk/>
+            <pc:sldMk cId="1134031056" sldId="262"/>
+            <ac:spMk id="21" creationId="{9FB792BA-250F-341C-6E57-284E4A8552E6}"/>
+          </ac:spMkLst>
+        </pc:spChg>
+        <pc:spChg chg="mod">
+          <ac:chgData name="Patrick Chromy" userId="f75110142f2032e8" providerId="LiveId" clId="{A60AB22C-9B23-4A50-A013-0F4752E49A98}" dt="2026-08-13T17:01:27.736" v="1056" actId="20577"/>
+          <ac:spMkLst>
+            <pc:docMk/>
+            <pc:sldMk cId="1134031056" sldId="262"/>
+            <ac:spMk id="23" creationId="{F8D2D499-A986-9F70-E259-2DD260985EC7}"/>
+          </ac:spMkLst>
+        </pc:spChg>
+        <pc:spChg chg="mod">
+          <ac:chgData name="Patrick Chromy" userId="f75110142f2032e8" providerId="LiveId" clId="{A60AB22C-9B23-4A50-A013-0F4752E49A98}" dt="2026-08-13T17:01:31.905" v="1058" actId="20577"/>
+          <ac:spMkLst>
+            <pc:docMk/>
+            <pc:sldMk cId="1134031056" sldId="262"/>
+            <ac:spMk id="25" creationId="{9E40D862-576E-8C68-8DE0-A5A41B6D6EF4}"/>
+          </ac:spMkLst>
+        </pc:spChg>
+        <pc:spChg chg="mod">
+          <ac:chgData name="Patrick Chromy" userId="f75110142f2032e8" providerId="LiveId" clId="{A60AB22C-9B23-4A50-A013-0F4752E49A98}" dt="2026-08-13T17:01:41.040" v="1060" actId="20577"/>
+          <ac:spMkLst>
+            <pc:docMk/>
+            <pc:sldMk cId="1134031056" sldId="262"/>
+            <ac:spMk id="27" creationId="{51C842F0-C98E-C6E8-96BD-DAD0F3847E32}"/>
+          </ac:spMkLst>
+        </pc:spChg>
+        <pc:picChg chg="del">
+          <ac:chgData name="Patrick Chromy" userId="f75110142f2032e8" providerId="LiveId" clId="{A60AB22C-9B23-4A50-A013-0F4752E49A98}" dt="2026-08-13T16:30:29.676" v="23" actId="478"/>
+          <ac:picMkLst>
+            <pc:docMk/>
+            <pc:sldMk cId="1134031056" sldId="262"/>
+            <ac:picMk id="3" creationId="{8265A1A3-73C7-F1CB-B560-DB153859E258}"/>
+          </ac:picMkLst>
+        </pc:picChg>
+        <pc:picChg chg="add mod ord">
+          <ac:chgData name="Patrick Chromy" userId="f75110142f2032e8" providerId="LiveId" clId="{A60AB22C-9B23-4A50-A013-0F4752E49A98}" dt="2026-08-13T16:32:25.303" v="99" actId="1076"/>
+          <ac:picMkLst>
+            <pc:docMk/>
+            <pc:sldMk cId="1134031056" sldId="262"/>
+            <ac:picMk id="4" creationId="{26F44A74-A60F-D298-A8BA-F3ADA4D2091F}"/>
+          </ac:picMkLst>
+        </pc:picChg>
+        <pc:picChg chg="mod">
+          <ac:chgData name="Patrick Chromy" userId="f75110142f2032e8" providerId="LiveId" clId="{A60AB22C-9B23-4A50-A013-0F4752E49A98}" dt="2026-08-13T16:32:08.577" v="97" actId="14826"/>
+          <ac:picMkLst>
+            <pc:docMk/>
+            <pc:sldMk cId="1134031056" sldId="262"/>
+            <ac:picMk id="17" creationId="{1BCD6508-82AC-2ACE-B0E7-918CEF98C2EB}"/>
+          </ac:picMkLst>
+        </pc:picChg>
+      </pc:sldChg>
+      <pc:sldChg chg="delSp modSp mod">
+        <pc:chgData name="Patrick Chromy" userId="f75110142f2032e8" providerId="LiveId" clId="{A60AB22C-9B23-4A50-A013-0F4752E49A98}" dt="2026-08-13T21:26:38.792" v="1632" actId="20577"/>
+        <pc:sldMkLst>
+          <pc:docMk/>
+          <pc:sldMk cId="1526620823" sldId="263"/>
+        </pc:sldMkLst>
+        <pc:spChg chg="mod ord">
+          <ac:chgData name="Patrick Chromy" userId="f75110142f2032e8" providerId="LiveId" clId="{A60AB22C-9B23-4A50-A013-0F4752E49A98}" dt="2026-08-13T21:00:49.759" v="1122" actId="20577"/>
+          <ac:spMkLst>
+            <pc:docMk/>
+            <pc:sldMk cId="1526620823" sldId="263"/>
+            <ac:spMk id="7" creationId="{59B27428-4C66-B279-D71E-D6F2F94209D3}"/>
+          </ac:spMkLst>
+        </pc:spChg>
+        <pc:spChg chg="del">
+          <ac:chgData name="Patrick Chromy" userId="f75110142f2032e8" providerId="LiveId" clId="{A60AB22C-9B23-4A50-A013-0F4752E49A98}" dt="2026-08-13T17:03:41.933" v="1087" actId="478"/>
+          <ac:spMkLst>
+            <pc:docMk/>
+            <pc:sldMk cId="1526620823" sldId="263"/>
+            <ac:spMk id="11" creationId="{917ED253-C5BE-8FC0-DB82-630300C2CAC9}"/>
+          </ac:spMkLst>
+        </pc:spChg>
+        <pc:spChg chg="del">
+          <ac:chgData name="Patrick Chromy" userId="f75110142f2032e8" providerId="LiveId" clId="{A60AB22C-9B23-4A50-A013-0F4752E49A98}" dt="2026-08-13T17:03:43.126" v="1088" actId="478"/>
+          <ac:spMkLst>
+            <pc:docMk/>
+            <pc:sldMk cId="1526620823" sldId="263"/>
+            <ac:spMk id="13" creationId="{C5889B22-FAA2-5C62-2871-A0F6DAD87810}"/>
+          </ac:spMkLst>
+        </pc:spChg>
+        <pc:spChg chg="mod">
+          <ac:chgData name="Patrick Chromy" userId="f75110142f2032e8" providerId="LiveId" clId="{A60AB22C-9B23-4A50-A013-0F4752E49A98}" dt="2026-08-13T21:26:38.792" v="1632" actId="20577"/>
+          <ac:spMkLst>
+            <pc:docMk/>
+            <pc:sldMk cId="1526620823" sldId="263"/>
+            <ac:spMk id="15" creationId="{2B29DA71-9CAA-F806-2A63-A9EAC4001C30}"/>
+          </ac:spMkLst>
+        </pc:spChg>
+        <pc:spChg chg="mod">
+          <ac:chgData name="Patrick Chromy" userId="f75110142f2032e8" providerId="LiveId" clId="{A60AB22C-9B23-4A50-A013-0F4752E49A98}" dt="2026-08-13T17:03:14.453" v="1081" actId="1076"/>
+          <ac:spMkLst>
+            <pc:docMk/>
+            <pc:sldMk cId="1526620823" sldId="263"/>
+            <ac:spMk id="17" creationId="{050BBA4A-6660-E6D9-390B-9CE80A3D1646}"/>
+          </ac:spMkLst>
+        </pc:spChg>
+        <pc:spChg chg="mod">
+          <ac:chgData name="Patrick Chromy" userId="f75110142f2032e8" providerId="LiveId" clId="{A60AB22C-9B23-4A50-A013-0F4752E49A98}" dt="2026-08-13T21:20:46.894" v="1448" actId="14100"/>
+          <ac:spMkLst>
+            <pc:docMk/>
+            <pc:sldMk cId="1526620823" sldId="263"/>
+            <ac:spMk id="19" creationId="{A5613CFE-59C3-C58A-40C7-6D894007FA64}"/>
+          </ac:spMkLst>
+        </pc:spChg>
+        <pc:picChg chg="mod ord">
+          <ac:chgData name="Patrick Chromy" userId="f75110142f2032e8" providerId="LiveId" clId="{A60AB22C-9B23-4A50-A013-0F4752E49A98}" dt="2026-08-13T16:34:18.300" v="112" actId="167"/>
+          <ac:picMkLst>
+            <pc:docMk/>
+            <pc:sldMk cId="1526620823" sldId="263"/>
+            <ac:picMk id="3" creationId="{DF630E33-BDDD-BE64-2E3B-00A2C6603CF1}"/>
+          </ac:picMkLst>
+        </pc:picChg>
+        <pc:picChg chg="mod modCrop">
+          <ac:chgData name="Patrick Chromy" userId="f75110142f2032e8" providerId="LiveId" clId="{A60AB22C-9B23-4A50-A013-0F4752E49A98}" dt="2026-08-13T16:35:00.025" v="114" actId="732"/>
+          <ac:picMkLst>
+            <pc:docMk/>
+            <pc:sldMk cId="1526620823" sldId="263"/>
+            <ac:picMk id="5" creationId="{D12FC5AE-6A67-0A0D-EA42-72F2F63BD31F}"/>
+          </ac:picMkLst>
+        </pc:picChg>
+      </pc:sldChg>
+      <pc:sldChg chg="addSp delSp modSp mod">
+        <pc:chgData name="Patrick Chromy" userId="f75110142f2032e8" providerId="LiveId" clId="{A60AB22C-9B23-4A50-A013-0F4752E49A98}" dt="2026-08-13T21:30:26.479" v="1785" actId="20577"/>
+        <pc:sldMkLst>
+          <pc:docMk/>
+          <pc:sldMk cId="822267285" sldId="264"/>
+        </pc:sldMkLst>
+        <pc:spChg chg="add mod">
+          <ac:chgData name="Patrick Chromy" userId="f75110142f2032e8" providerId="LiveId" clId="{A60AB22C-9B23-4A50-A013-0F4752E49A98}" dt="2026-08-13T21:02:17.520" v="1140" actId="20577"/>
+          <ac:spMkLst>
+            <pc:docMk/>
+            <pc:sldMk cId="822267285" sldId="264"/>
+            <ac:spMk id="3" creationId="{B99B07EB-AE0E-B489-6AA7-3EDD3053D47E}"/>
+          </ac:spMkLst>
+        </pc:spChg>
+        <pc:spChg chg="add mod">
+          <ac:chgData name="Patrick Chromy" userId="f75110142f2032e8" providerId="LiveId" clId="{A60AB22C-9B23-4A50-A013-0F4752E49A98}" dt="2026-08-13T21:04:51.313" v="1200" actId="20577"/>
+          <ac:spMkLst>
+            <pc:docMk/>
+            <pc:sldMk cId="822267285" sldId="264"/>
+            <ac:spMk id="6" creationId="{3948504B-4B65-2EC6-FEEC-704A4FF98CC7}"/>
+          </ac:spMkLst>
+        </pc:spChg>
+        <pc:spChg chg="mod">
+          <ac:chgData name="Patrick Chromy" userId="f75110142f2032e8" providerId="LiveId" clId="{A60AB22C-9B23-4A50-A013-0F4752E49A98}" dt="2026-08-13T21:02:11.396" v="1136" actId="20577"/>
+          <ac:spMkLst>
+            <pc:docMk/>
+            <pc:sldMk cId="822267285" sldId="264"/>
+            <ac:spMk id="7" creationId="{2182A48B-1C0C-35A1-CBE3-522A5DBB28A7}"/>
+          </ac:spMkLst>
+        </pc:spChg>
+        <pc:spChg chg="mod">
+          <ac:chgData name="Patrick Chromy" userId="f75110142f2032e8" providerId="LiveId" clId="{A60AB22C-9B23-4A50-A013-0F4752E49A98}" dt="2026-08-13T17:05:08.669" v="1111" actId="20577"/>
+          <ac:spMkLst>
+            <pc:docMk/>
+            <pc:sldMk cId="822267285" sldId="264"/>
+            <ac:spMk id="9" creationId="{76561B1C-DCCB-418A-3FD0-F168B24391E5}"/>
+          </ac:spMkLst>
+        </pc:spChg>
+        <pc:spChg chg="add mod">
+          <ac:chgData name="Patrick Chromy" userId="f75110142f2032e8" providerId="LiveId" clId="{A60AB22C-9B23-4A50-A013-0F4752E49A98}" dt="2026-08-13T21:30:26.479" v="1785" actId="20577"/>
+          <ac:spMkLst>
+            <pc:docMk/>
+            <pc:sldMk cId="822267285" sldId="264"/>
+            <ac:spMk id="10" creationId="{DBA0CDB2-2895-6461-4B66-3187FB2A42B0}"/>
+          </ac:spMkLst>
+        </pc:spChg>
+        <pc:spChg chg="mod">
+          <ac:chgData name="Patrick Chromy" userId="f75110142f2032e8" providerId="LiveId" clId="{A60AB22C-9B23-4A50-A013-0F4752E49A98}" dt="2026-08-13T16:43:41.794" v="261" actId="14100"/>
+          <ac:spMkLst>
+            <pc:docMk/>
+            <pc:sldMk cId="822267285" sldId="264"/>
+            <ac:spMk id="13" creationId="{64E3C814-D26A-14CD-B20C-56E37121C835}"/>
+          </ac:spMkLst>
+        </pc:spChg>
+        <pc:spChg chg="add mod">
+          <ac:chgData name="Patrick Chromy" userId="f75110142f2032e8" providerId="LiveId" clId="{A60AB22C-9B23-4A50-A013-0F4752E49A98}" dt="2026-08-13T16:58:12.653" v="993" actId="14100"/>
+          <ac:spMkLst>
+            <pc:docMk/>
+            <pc:sldMk cId="822267285" sldId="264"/>
+            <ac:spMk id="14" creationId="{879B7662-8AA0-EB17-9863-5151E99E2BAA}"/>
+          </ac:spMkLst>
+        </pc:spChg>
+        <pc:spChg chg="mod">
+          <ac:chgData name="Patrick Chromy" userId="f75110142f2032e8" providerId="LiveId" clId="{A60AB22C-9B23-4A50-A013-0F4752E49A98}" dt="2026-08-13T16:37:46.971" v="137" actId="1076"/>
+          <ac:spMkLst>
+            <pc:docMk/>
+            <pc:sldMk cId="822267285" sldId="264"/>
+            <ac:spMk id="15" creationId="{A8A740C8-9B4B-6EA4-3CC7-3D5EFB208B11}"/>
+          </ac:spMkLst>
+        </pc:spChg>
+        <pc:spChg chg="mod">
+          <ac:chgData name="Patrick Chromy" userId="f75110142f2032e8" providerId="LiveId" clId="{A60AB22C-9B23-4A50-A013-0F4752E49A98}" dt="2026-08-13T16:38:14.136" v="142" actId="14100"/>
+          <ac:spMkLst>
+            <pc:docMk/>
+            <pc:sldMk cId="822267285" sldId="264"/>
+            <ac:spMk id="17" creationId="{E973ECF4-135B-7124-08D4-69A9636D5B2F}"/>
+          </ac:spMkLst>
+        </pc:spChg>
+        <pc:spChg chg="add del mod">
+          <ac:chgData name="Patrick Chromy" userId="f75110142f2032e8" providerId="LiveId" clId="{A60AB22C-9B23-4A50-A013-0F4752E49A98}" dt="2026-08-13T21:02:26.741" v="1142" actId="20577"/>
+          <ac:spMkLst>
+            <pc:docMk/>
+            <pc:sldMk cId="822267285" sldId="264"/>
+            <ac:spMk id="18" creationId="{4DDFF91F-A342-8DB0-B316-10A0E51909E0}"/>
+          </ac:spMkLst>
+        </pc:spChg>
+        <pc:spChg chg="mod">
+          <ac:chgData name="Patrick Chromy" userId="f75110142f2032e8" providerId="LiveId" clId="{A60AB22C-9B23-4A50-A013-0F4752E49A98}" dt="2026-08-13T21:03:46.566" v="1180" actId="20577"/>
+          <ac:spMkLst>
+            <pc:docMk/>
+            <pc:sldMk cId="822267285" sldId="264"/>
+            <ac:spMk id="19" creationId="{F3314BF4-AC4A-BF0F-EE01-959575B422EB}"/>
+          </ac:spMkLst>
+        </pc:spChg>
+        <pc:spChg chg="add mod">
+          <ac:chgData name="Patrick Chromy" userId="f75110142f2032e8" providerId="LiveId" clId="{A60AB22C-9B23-4A50-A013-0F4752E49A98}" dt="2026-08-13T16:58:15.995" v="994" actId="14100"/>
+          <ac:spMkLst>
+            <pc:docMk/>
+            <pc:sldMk cId="822267285" sldId="264"/>
+            <ac:spMk id="21" creationId="{F27DB887-F34C-D873-2B3D-24E26F5D19A8}"/>
+          </ac:spMkLst>
+        </pc:spChg>
+        <pc:spChg chg="add mod">
+          <ac:chgData name="Patrick Chromy" userId="f75110142f2032e8" providerId="LiveId" clId="{A60AB22C-9B23-4A50-A013-0F4752E49A98}" dt="2026-08-13T21:08:44.342" v="1230" actId="20577"/>
+          <ac:spMkLst>
+            <pc:docMk/>
+            <pc:sldMk cId="822267285" sldId="264"/>
+            <ac:spMk id="23" creationId="{9A37879B-09AE-D43D-A4CC-7E39D2F99344}"/>
+          </ac:spMkLst>
+        </pc:spChg>
+        <pc:spChg chg="mod">
+          <ac:chgData name="Patrick Chromy" userId="f75110142f2032e8" providerId="LiveId" clId="{A60AB22C-9B23-4A50-A013-0F4752E49A98}" dt="2026-08-13T21:29:05.970" v="1752" actId="1076"/>
+          <ac:spMkLst>
+            <pc:docMk/>
+            <pc:sldMk cId="822267285" sldId="264"/>
+            <ac:spMk id="25" creationId="{A4538DA6-2BFD-A337-4E0E-F7F7EC3C90C4}"/>
+          </ac:spMkLst>
+        </pc:spChg>
+        <pc:spChg chg="add del mod">
+          <ac:chgData name="Patrick Chromy" userId="f75110142f2032e8" providerId="LiveId" clId="{A60AB22C-9B23-4A50-A013-0F4752E49A98}" dt="2026-08-13T17:04:19.250" v="1099" actId="478"/>
+          <ac:spMkLst>
+            <pc:docMk/>
+            <pc:sldMk cId="822267285" sldId="264"/>
+            <ac:spMk id="26" creationId="{4E5CD470-EF94-AD1E-DE45-E45A04B5F60C}"/>
+          </ac:spMkLst>
+        </pc:spChg>
+        <pc:spChg chg="mod">
+          <ac:chgData name="Patrick Chromy" userId="f75110142f2032e8" providerId="LiveId" clId="{A60AB22C-9B23-4A50-A013-0F4752E49A98}" dt="2026-08-13T17:05:12.215" v="1112" actId="20577"/>
+          <ac:spMkLst>
+            <pc:docMk/>
+            <pc:sldMk cId="822267285" sldId="264"/>
+            <ac:spMk id="27" creationId="{5311FC6C-3A63-D8B1-DFFC-25539473EB17}"/>
+          </ac:spMkLst>
+        </pc:spChg>
+        <pc:spChg chg="add del mod">
+          <ac:chgData name="Patrick Chromy" userId="f75110142f2032e8" providerId="LiveId" clId="{A60AB22C-9B23-4A50-A013-0F4752E49A98}" dt="2026-08-13T17:04:22.473" v="1100" actId="478"/>
+          <ac:spMkLst>
+            <pc:docMk/>
+            <pc:sldMk cId="822267285" sldId="264"/>
+            <ac:spMk id="29" creationId="{251974D6-F568-DD41-133F-018EA1C02CFC}"/>
+          </ac:spMkLst>
+        </pc:spChg>
+        <pc:spChg chg="add mod">
+          <ac:chgData name="Patrick Chromy" userId="f75110142f2032e8" providerId="LiveId" clId="{A60AB22C-9B23-4A50-A013-0F4752E49A98}" dt="2026-08-13T21:03:48.009" v="1181" actId="20577"/>
+          <ac:spMkLst>
+            <pc:docMk/>
+            <pc:sldMk cId="822267285" sldId="264"/>
+            <ac:spMk id="31" creationId="{38921BE3-4A2A-C7C6-EE66-31A3C41EBF06}"/>
+          </ac:spMkLst>
+        </pc:spChg>
+        <pc:spChg chg="add mod">
+          <ac:chgData name="Patrick Chromy" userId="f75110142f2032e8" providerId="LiveId" clId="{A60AB22C-9B23-4A50-A013-0F4752E49A98}" dt="2026-08-13T21:03:49.329" v="1182" actId="20577"/>
+          <ac:spMkLst>
+            <pc:docMk/>
+            <pc:sldMk cId="822267285" sldId="264"/>
+            <ac:spMk id="34" creationId="{2566BD52-4623-3A73-0D71-423072A09347}"/>
+          </ac:spMkLst>
+        </pc:spChg>
+        <pc:spChg chg="mod">
+          <ac:chgData name="Patrick Chromy" userId="f75110142f2032e8" providerId="LiveId" clId="{A60AB22C-9B23-4A50-A013-0F4752E49A98}" dt="2026-08-13T21:02:03.781" v="1134" actId="20577"/>
+          <ac:spMkLst>
+            <pc:docMk/>
+            <pc:sldMk cId="822267285" sldId="264"/>
+            <ac:spMk id="35" creationId="{8B74E3BF-8810-C0DB-CE6F-4164BA947EF8}"/>
+          </ac:spMkLst>
+        </pc:spChg>
+        <pc:spChg chg="mod">
+          <ac:chgData name="Patrick Chromy" userId="f75110142f2032e8" providerId="LiveId" clId="{A60AB22C-9B23-4A50-A013-0F4752E49A98}" dt="2026-08-13T21:00:54.114" v="1123" actId="20577"/>
+          <ac:spMkLst>
+            <pc:docMk/>
+            <pc:sldMk cId="822267285" sldId="264"/>
+            <ac:spMk id="39" creationId="{8B8EAAD5-4950-2DA0-B3E4-4E39D6BD7F53}"/>
+          </ac:spMkLst>
+        </pc:spChg>
+        <pc:spChg chg="mod">
+          <ac:chgData name="Patrick Chromy" userId="f75110142f2032e8" providerId="LiveId" clId="{A60AB22C-9B23-4A50-A013-0F4752E49A98}" dt="2026-08-13T21:04:43.151" v="1199" actId="20577"/>
+          <ac:spMkLst>
+            <pc:docMk/>
+            <pc:sldMk cId="822267285" sldId="264"/>
+            <ac:spMk id="45" creationId="{1CCEB01E-CBD1-0549-6AE8-AC43AD9AB677}"/>
+          </ac:spMkLst>
+        </pc:spChg>
+        <pc:picChg chg="mod">
+          <ac:chgData name="Patrick Chromy" userId="f75110142f2032e8" providerId="LiveId" clId="{A60AB22C-9B23-4A50-A013-0F4752E49A98}" dt="2026-08-13T16:58:32.857" v="996" actId="1076"/>
+          <ac:picMkLst>
+            <pc:docMk/>
+            <pc:sldMk cId="822267285" sldId="264"/>
+            <ac:picMk id="11" creationId="{BC1BEA66-C6FD-2919-D940-CA44438B9FFD}"/>
+          </ac:picMkLst>
+        </pc:picChg>
+        <pc:picChg chg="del mod">
+          <ac:chgData name="Patrick Chromy" userId="f75110142f2032e8" providerId="LiveId" clId="{A60AB22C-9B23-4A50-A013-0F4752E49A98}" dt="2026-08-13T16:36:28.914" v="117" actId="478"/>
+          <ac:picMkLst>
+            <pc:docMk/>
+            <pc:sldMk cId="822267285" sldId="264"/>
+            <ac:picMk id="47" creationId="{C5B418AF-CDD9-6B62-F1EF-B90F14C2F93A}"/>
+          </ac:picMkLst>
+        </pc:picChg>
+      </pc:sldChg>
+      <pc:sldChg chg="modSp mod">
+        <pc:chgData name="Patrick Chromy" userId="f75110142f2032e8" providerId="LiveId" clId="{A60AB22C-9B23-4A50-A013-0F4752E49A98}" dt="2026-08-13T21:31:27.046" v="1818" actId="20577"/>
+        <pc:sldMkLst>
+          <pc:docMk/>
+          <pc:sldMk cId="2931549313" sldId="265"/>
+        </pc:sldMkLst>
+        <pc:spChg chg="mod">
+          <ac:chgData name="Patrick Chromy" userId="f75110142f2032e8" providerId="LiveId" clId="{A60AB22C-9B23-4A50-A013-0F4752E49A98}" dt="2026-08-13T21:11:44.391" v="1250" actId="20577"/>
+          <ac:spMkLst>
+            <pc:docMk/>
+            <pc:sldMk cId="2931549313" sldId="265"/>
+            <ac:spMk id="7" creationId="{2090BC27-F475-4BDE-100E-B8C71069E552}"/>
+          </ac:spMkLst>
+        </pc:spChg>
+        <pc:spChg chg="mod">
+          <ac:chgData name="Patrick Chromy" userId="f75110142f2032e8" providerId="LiveId" clId="{A60AB22C-9B23-4A50-A013-0F4752E49A98}" dt="2026-08-13T21:31:27.046" v="1818" actId="20577"/>
+          <ac:spMkLst>
+            <pc:docMk/>
+            <pc:sldMk cId="2931549313" sldId="265"/>
+            <ac:spMk id="13" creationId="{3CA01429-1381-E763-DBB8-DEA269A78BDC}"/>
+          </ac:spMkLst>
+        </pc:spChg>
+        <pc:spChg chg="mod">
+          <ac:chgData name="Patrick Chromy" userId="f75110142f2032e8" providerId="LiveId" clId="{A60AB22C-9B23-4A50-A013-0F4752E49A98}" dt="2026-08-13T21:13:01.743" v="1270" actId="20577"/>
+          <ac:spMkLst>
+            <pc:docMk/>
+            <pc:sldMk cId="2931549313" sldId="265"/>
+            <ac:spMk id="25" creationId="{FBD95EB3-0476-3F52-587C-A94FB29EB2E5}"/>
+          </ac:spMkLst>
+        </pc:spChg>
+        <pc:spChg chg="mod">
+          <ac:chgData name="Patrick Chromy" userId="f75110142f2032e8" providerId="LiveId" clId="{A60AB22C-9B23-4A50-A013-0F4752E49A98}" dt="2026-08-13T21:13:07.342" v="1272" actId="20577"/>
+          <ac:spMkLst>
+            <pc:docMk/>
+            <pc:sldMk cId="2931549313" sldId="265"/>
+            <ac:spMk id="31" creationId="{6463C5F5-985F-C1A3-D73F-608FF610CF4E}"/>
+          </ac:spMkLst>
+        </pc:spChg>
+        <pc:spChg chg="mod">
+          <ac:chgData name="Patrick Chromy" userId="f75110142f2032e8" providerId="LiveId" clId="{A60AB22C-9B23-4A50-A013-0F4752E49A98}" dt="2026-08-13T21:13:12.032" v="1274" actId="20577"/>
+          <ac:spMkLst>
+            <pc:docMk/>
+            <pc:sldMk cId="2931549313" sldId="265"/>
+            <ac:spMk id="33" creationId="{2DBB575E-40C5-C985-3487-4ED81C34C1AD}"/>
+          </ac:spMkLst>
+        </pc:spChg>
+        <pc:spChg chg="mod">
+          <ac:chgData name="Patrick Chromy" userId="f75110142f2032e8" providerId="LiveId" clId="{A60AB22C-9B23-4A50-A013-0F4752E49A98}" dt="2026-08-13T21:17:09.074" v="1322" actId="20577"/>
+          <ac:spMkLst>
+            <pc:docMk/>
+            <pc:sldMk cId="2931549313" sldId="265"/>
+            <ac:spMk id="37" creationId="{BBEBB5BE-A3F7-7286-7C91-A747CD4B927E}"/>
+          </ac:spMkLst>
+        </pc:spChg>
+        <pc:spChg chg="mod">
+          <ac:chgData name="Patrick Chromy" userId="f75110142f2032e8" providerId="LiveId" clId="{A60AB22C-9B23-4A50-A013-0F4752E49A98}" dt="2026-08-13T21:17:12.706" v="1323" actId="20577"/>
+          <ac:spMkLst>
+            <pc:docMk/>
+            <pc:sldMk cId="2931549313" sldId="265"/>
+            <ac:spMk id="41" creationId="{ED05CB3A-0A2A-C07B-1054-0236FE9E52F9}"/>
+          </ac:spMkLst>
+        </pc:spChg>
+        <pc:spChg chg="mod">
+          <ac:chgData name="Patrick Chromy" userId="f75110142f2032e8" providerId="LiveId" clId="{A60AB22C-9B23-4A50-A013-0F4752E49A98}" dt="2026-08-13T21:16:52.966" v="1319" actId="20577"/>
+          <ac:spMkLst>
+            <pc:docMk/>
+            <pc:sldMk cId="2931549313" sldId="265"/>
+            <ac:spMk id="49" creationId="{08F07ED9-59AA-E018-1D3B-A667E44DD4AF}"/>
+          </ac:spMkLst>
+        </pc:spChg>
+        <pc:spChg chg="mod">
+          <ac:chgData name="Patrick Chromy" userId="f75110142f2032e8" providerId="LiveId" clId="{A60AB22C-9B23-4A50-A013-0F4752E49A98}" dt="2026-08-13T21:17:16.515" v="1324" actId="20577"/>
+          <ac:spMkLst>
+            <pc:docMk/>
+            <pc:sldMk cId="2931549313" sldId="265"/>
+            <ac:spMk id="51" creationId="{B0329732-B19D-68C8-E872-7FBF682D5E53}"/>
+          </ac:spMkLst>
+        </pc:spChg>
+        <pc:spChg chg="mod">
+          <ac:chgData name="Patrick Chromy" userId="f75110142f2032e8" providerId="LiveId" clId="{A60AB22C-9B23-4A50-A013-0F4752E49A98}" dt="2026-08-13T21:18:20.470" v="1384" actId="20577"/>
+          <ac:spMkLst>
+            <pc:docMk/>
+            <pc:sldMk cId="2931549313" sldId="265"/>
+            <ac:spMk id="53" creationId="{D2D66634-0C18-CFFF-5F5F-01EDE94ECE09}"/>
+          </ac:spMkLst>
+        </pc:spChg>
+        <pc:spChg chg="mod">
+          <ac:chgData name="Patrick Chromy" userId="f75110142f2032e8" providerId="LiveId" clId="{A60AB22C-9B23-4A50-A013-0F4752E49A98}" dt="2026-08-13T21:16:57.544" v="1321" actId="20577"/>
+          <ac:spMkLst>
+            <pc:docMk/>
+            <pc:sldMk cId="2931549313" sldId="265"/>
+            <ac:spMk id="61" creationId="{52515903-AF8B-A543-3467-6807F770C4F6}"/>
+          </ac:spMkLst>
+        </pc:spChg>
+      </pc:sldChg>
+      <pc:sldChg chg="addSp delSp modSp mod">
+        <pc:chgData name="Patrick Chromy" userId="f75110142f2032e8" providerId="LiveId" clId="{A60AB22C-9B23-4A50-A013-0F4752E49A98}" dt="2026-08-13T21:39:37.283" v="2002" actId="1076"/>
+        <pc:sldMkLst>
+          <pc:docMk/>
+          <pc:sldMk cId="1508286457" sldId="266"/>
+        </pc:sldMkLst>
+        <pc:spChg chg="mod">
+          <ac:chgData name="Patrick Chromy" userId="f75110142f2032e8" providerId="LiveId" clId="{A60AB22C-9B23-4A50-A013-0F4752E49A98}" dt="2026-08-13T21:36:10.447" v="1893" actId="1076"/>
+          <ac:spMkLst>
+            <pc:docMk/>
+            <pc:sldMk cId="1508286457" sldId="266"/>
+            <ac:spMk id="7" creationId="{AD2976CA-ADF9-6D66-AFA3-E13727AC1C2D}"/>
+          </ac:spMkLst>
+        </pc:spChg>
+        <pc:spChg chg="add mod">
+          <ac:chgData name="Patrick Chromy" userId="f75110142f2032e8" providerId="LiveId" clId="{A60AB22C-9B23-4A50-A013-0F4752E49A98}" dt="2026-08-13T21:39:37.283" v="2002" actId="1076"/>
+          <ac:spMkLst>
+            <pc:docMk/>
+            <pc:sldMk cId="1508286457" sldId="266"/>
+            <ac:spMk id="8" creationId="{0EAF1E04-E24C-19AD-E0BD-5569644941E2}"/>
+          </ac:spMkLst>
+        </pc:spChg>
+        <pc:spChg chg="mod">
+          <ac:chgData name="Patrick Chromy" userId="f75110142f2032e8" providerId="LiveId" clId="{A60AB22C-9B23-4A50-A013-0F4752E49A98}" dt="2026-08-13T21:37:13.702" v="1904" actId="20577"/>
+          <ac:spMkLst>
+            <pc:docMk/>
+            <pc:sldMk cId="1508286457" sldId="266"/>
+            <ac:spMk id="9" creationId="{B1C9B148-F9FB-7B86-5A70-4ADA2AE19C9A}"/>
+          </ac:spMkLst>
+        </pc:spChg>
+        <pc:spChg chg="add mod">
+          <ac:chgData name="Patrick Chromy" userId="f75110142f2032e8" providerId="LiveId" clId="{A60AB22C-9B23-4A50-A013-0F4752E49A98}" dt="2026-08-13T21:36:32.872" v="1899" actId="1076"/>
+          <ac:spMkLst>
+            <pc:docMk/>
+            <pc:sldMk cId="1508286457" sldId="266"/>
+            <ac:spMk id="10" creationId="{D56432B6-B5A2-CE67-CB08-F5C0C37746A5}"/>
+          </ac:spMkLst>
+        </pc:spChg>
+        <pc:spChg chg="mod">
+          <ac:chgData name="Patrick Chromy" userId="f75110142f2032e8" providerId="LiveId" clId="{A60AB22C-9B23-4A50-A013-0F4752E49A98}" dt="2026-08-13T21:37:18.664" v="1906" actId="20577"/>
+          <ac:spMkLst>
+            <pc:docMk/>
+            <pc:sldMk cId="1508286457" sldId="266"/>
+            <ac:spMk id="11" creationId="{FD7D64C4-F16F-493A-E02C-C566F4403ADF}"/>
+          </ac:spMkLst>
+        </pc:spChg>
+        <pc:spChg chg="mod">
+          <ac:chgData name="Patrick Chromy" userId="f75110142f2032e8" providerId="LiveId" clId="{A60AB22C-9B23-4A50-A013-0F4752E49A98}" dt="2026-08-13T21:37:22.383" v="1908" actId="20577"/>
+          <ac:spMkLst>
+            <pc:docMk/>
+            <pc:sldMk cId="1508286457" sldId="266"/>
+            <ac:spMk id="13" creationId="{4CA1FBEA-6140-F696-0B6C-F91B9B361984}"/>
+          </ac:spMkLst>
+        </pc:spChg>
+        <pc:spChg chg="add del mod">
+          <ac:chgData name="Patrick Chromy" userId="f75110142f2032e8" providerId="LiveId" clId="{A60AB22C-9B23-4A50-A013-0F4752E49A98}" dt="2026-08-13T21:36:57.655" v="1902" actId="478"/>
+          <ac:spMkLst>
+            <pc:docMk/>
+            <pc:sldMk cId="1508286457" sldId="266"/>
+            <ac:spMk id="14" creationId="{073D613D-9416-2CD7-35D7-F00A2CB28AAC}"/>
+          </ac:spMkLst>
+        </pc:spChg>
+        <pc:spChg chg="mod">
+          <ac:chgData name="Patrick Chromy" userId="f75110142f2032e8" providerId="LiveId" clId="{A60AB22C-9B23-4A50-A013-0F4752E49A98}" dt="2026-08-13T21:37:26.295" v="1910" actId="20577"/>
+          <ac:spMkLst>
+            <pc:docMk/>
+            <pc:sldMk cId="1508286457" sldId="266"/>
+            <ac:spMk id="15" creationId="{CC72BF3C-63E8-3CAA-A156-7D9175FE4A51}"/>
+          </ac:spMkLst>
+        </pc:spChg>
+        <pc:spChg chg="mod">
+          <ac:chgData name="Patrick Chromy" userId="f75110142f2032e8" providerId="LiveId" clId="{A60AB22C-9B23-4A50-A013-0F4752E49A98}" dt="2026-08-13T21:38:39.544" v="2001" actId="12"/>
+          <ac:spMkLst>
+            <pc:docMk/>
+            <pc:sldMk cId="1508286457" sldId="266"/>
+            <ac:spMk id="17" creationId="{F30DCF10-A3C2-C09B-04D9-030740560B60}"/>
+          </ac:spMkLst>
+        </pc:spChg>
+        <pc:picChg chg="add mod">
+          <ac:chgData name="Patrick Chromy" userId="f75110142f2032e8" providerId="LiveId" clId="{A60AB22C-9B23-4A50-A013-0F4752E49A98}" dt="2026-08-13T21:39:37.283" v="2002" actId="1076"/>
+          <ac:picMkLst>
+            <pc:docMk/>
+            <pc:sldMk cId="1508286457" sldId="266"/>
+            <ac:picMk id="4" creationId="{822861A1-4D5C-58D7-306A-80DC4986C6E4}"/>
+          </ac:picMkLst>
+        </pc:picChg>
+        <pc:picChg chg="mod">
+          <ac:chgData name="Patrick Chromy" userId="f75110142f2032e8" providerId="LiveId" clId="{A60AB22C-9B23-4A50-A013-0F4752E49A98}" dt="2026-08-13T21:36:10.447" v="1893" actId="1076"/>
+          <ac:picMkLst>
+            <pc:docMk/>
+            <pc:sldMk cId="1508286457" sldId="266"/>
+            <ac:picMk id="5" creationId="{BB1FA472-6F0F-2292-6B9C-B6725368B817}"/>
+          </ac:picMkLst>
+        </pc:picChg>
+      </pc:sldChg>
+      <pc:sldChg chg="modSp mod">
+        <pc:chgData name="Patrick Chromy" userId="f75110142f2032e8" providerId="LiveId" clId="{A60AB22C-9B23-4A50-A013-0F4752E49A98}" dt="2026-08-13T21:43:42.414" v="2012" actId="12"/>
+        <pc:sldMkLst>
+          <pc:docMk/>
+          <pc:sldMk cId="4024799647" sldId="267"/>
+        </pc:sldMkLst>
+        <pc:spChg chg="mod">
+          <ac:chgData name="Patrick Chromy" userId="f75110142f2032e8" providerId="LiveId" clId="{A60AB22C-9B23-4A50-A013-0F4752E49A98}" dt="2026-08-13T21:43:42.414" v="2012" actId="12"/>
+          <ac:spMkLst>
+            <pc:docMk/>
+            <pc:sldMk cId="4024799647" sldId="267"/>
+            <ac:spMk id="7" creationId="{4AA31611-1CC2-5C70-9192-1EC32A3EFB29}"/>
+          </ac:spMkLst>
+        </pc:spChg>
+        <pc:spChg chg="mod">
+          <ac:chgData name="Patrick Chromy" userId="f75110142f2032e8" providerId="LiveId" clId="{A60AB22C-9B23-4A50-A013-0F4752E49A98}" dt="2026-08-13T21:34:17.982" v="1879" actId="20577"/>
+          <ac:spMkLst>
+            <pc:docMk/>
+            <pc:sldMk cId="4024799647" sldId="267"/>
+            <ac:spMk id="9" creationId="{6E1E8761-3CEE-0678-0318-DEC9C40CD06C}"/>
+          </ac:spMkLst>
+        </pc:spChg>
+        <pc:spChg chg="mod">
+          <ac:chgData name="Patrick Chromy" userId="f75110142f2032e8" providerId="LiveId" clId="{A60AB22C-9B23-4A50-A013-0F4752E49A98}" dt="2026-08-13T21:34:31.076" v="1881" actId="20577"/>
+          <ac:spMkLst>
+            <pc:docMk/>
+            <pc:sldMk cId="4024799647" sldId="267"/>
+            <ac:spMk id="11" creationId="{13DEDC8D-F3D6-CB08-968B-7B7C8E5706C5}"/>
+          </ac:spMkLst>
+        </pc:spChg>
+        <pc:spChg chg="mod">
+          <ac:chgData name="Patrick Chromy" userId="f75110142f2032e8" providerId="LiveId" clId="{A60AB22C-9B23-4A50-A013-0F4752E49A98}" dt="2026-08-13T21:34:48.551" v="1882" actId="20577"/>
+          <ac:spMkLst>
+            <pc:docMk/>
+            <pc:sldMk cId="4024799647" sldId="267"/>
+            <ac:spMk id="13" creationId="{453B871B-F4DA-3731-9464-EDDB91D6499A}"/>
+          </ac:spMkLst>
+        </pc:spChg>
+        <pc:spChg chg="mod">
+          <ac:chgData name="Patrick Chromy" userId="f75110142f2032e8" providerId="LiveId" clId="{A60AB22C-9B23-4A50-A013-0F4752E49A98}" dt="2026-08-13T21:34:51.295" v="1883" actId="20577"/>
+          <ac:spMkLst>
+            <pc:docMk/>
+            <pc:sldMk cId="4024799647" sldId="267"/>
+            <ac:spMk id="15" creationId="{04906BA7-0EC5-59CD-0247-11F3762AC16C}"/>
+          </ac:spMkLst>
+        </pc:spChg>
+        <pc:spChg chg="mod">
+          <ac:chgData name="Patrick Chromy" userId="f75110142f2032e8" providerId="LiveId" clId="{A60AB22C-9B23-4A50-A013-0F4752E49A98}" dt="2026-08-13T21:34:54.969" v="1884" actId="20577"/>
+          <ac:spMkLst>
+            <pc:docMk/>
+            <pc:sldMk cId="4024799647" sldId="267"/>
+            <ac:spMk id="17" creationId="{1F010F69-680A-5C62-E1EF-1E69B95A155B}"/>
+          </ac:spMkLst>
+        </pc:spChg>
+        <pc:spChg chg="mod">
+          <ac:chgData name="Patrick Chromy" userId="f75110142f2032e8" providerId="LiveId" clId="{A60AB22C-9B23-4A50-A013-0F4752E49A98}" dt="2026-08-13T21:34:58.454" v="1885" actId="20577"/>
+          <ac:spMkLst>
+            <pc:docMk/>
+            <pc:sldMk cId="4024799647" sldId="267"/>
+            <ac:spMk id="19" creationId="{9F7A3C52-BCE1-1899-46BA-E956F932561B}"/>
+          </ac:spMkLst>
+        </pc:spChg>
+      </pc:sldChg>
+      <pc:sldChg chg="addSp delSp modSp mod">
+        <pc:chgData name="Patrick Chromy" userId="f75110142f2032e8" providerId="LiveId" clId="{A60AB22C-9B23-4A50-A013-0F4752E49A98}" dt="2026-08-13T21:58:36.175" v="2511" actId="1076"/>
         <pc:sldMkLst>
           <pc:docMk/>
           <pc:sldMk cId="2399453089" sldId="268"/>
         </pc:sldMkLst>
-        <pc:spChg chg="add del">
-          <ac:chgData name="Patrick Chromy" userId="f75110142f2032e8" providerId="LiveId" clId="{A60AB22C-9B23-4A50-A013-0F4752E49A98}" dt="2026-08-05T21:53:12.195" v="1" actId="22"/>
+        <pc:spChg chg="del">
+          <ac:chgData name="Patrick Chromy" userId="f75110142f2032e8" providerId="LiveId" clId="{A60AB22C-9B23-4A50-A013-0F4752E49A98}" dt="2026-08-13T21:43:06.379" v="2006" actId="478"/>
           <ac:spMkLst>
             <pc:docMk/>
             <pc:sldMk cId="2399453089" sldId="268"/>
-            <ac:spMk id="4" creationId="{3CED7D41-6095-E98F-2366-123AE0D96366}"/>
+            <ac:spMk id="7" creationId="{521CDA08-1F8C-1555-01F0-521634112340}"/>
           </ac:spMkLst>
         </pc:spChg>
-        <pc:spChg chg="add del mod">
-          <ac:chgData name="Patrick Chromy" userId="f75110142f2032e8" providerId="LiveId" clId="{A60AB22C-9B23-4A50-A013-0F4752E49A98}" dt="2026-08-05T21:56:57.983" v="20" actId="478"/>
+        <pc:spChg chg="add mod">
+          <ac:chgData name="Patrick Chromy" userId="f75110142f2032e8" providerId="LiveId" clId="{A60AB22C-9B23-4A50-A013-0F4752E49A98}" dt="2026-08-13T21:43:33.417" v="2011" actId="1076"/>
           <ac:spMkLst>
             <pc:docMk/>
             <pc:sldMk cId="2399453089" sldId="268"/>
-            <ac:spMk id="6" creationId="{9E360D32-38DA-70E4-FEC7-6FB463E64A78}"/>
+            <ac:spMk id="8" creationId="{DA0DBE75-D4E4-9009-8145-CA524CF16E0F}"/>
           </ac:spMkLst>
         </pc:spChg>
-        <pc:spChg chg="add del mod">
-          <ac:chgData name="Patrick Chromy" userId="f75110142f2032e8" providerId="LiveId" clId="{A60AB22C-9B23-4A50-A013-0F4752E49A98}" dt="2026-08-05T21:56:57.983" v="20" actId="478"/>
+        <pc:spChg chg="add mod">
+          <ac:chgData name="Patrick Chromy" userId="f75110142f2032e8" providerId="LiveId" clId="{A60AB22C-9B23-4A50-A013-0F4752E49A98}" dt="2026-08-13T21:58:36.175" v="2511" actId="1076"/>
           <ac:spMkLst>
             <pc:docMk/>
             <pc:sldMk cId="2399453089" sldId="268"/>
-            <ac:spMk id="9" creationId="{65BA6633-CFC6-66D3-BD4A-FA81BA962ECD}"/>
+            <ac:spMk id="10" creationId="{4A18779B-2D12-6108-A1D8-06AD00BEBD5F}"/>
           </ac:spMkLst>
         </pc:spChg>
+        <pc:spChg chg="add mod">
+          <ac:chgData name="Patrick Chromy" userId="f75110142f2032e8" providerId="LiveId" clId="{A60AB22C-9B23-4A50-A013-0F4752E49A98}" dt="2026-08-13T21:49:17.484" v="2340" actId="20577"/>
+          <ac:spMkLst>
+            <pc:docMk/>
+            <pc:sldMk cId="2399453089" sldId="268"/>
+            <ac:spMk id="12" creationId="{D090C9BF-0497-0C30-A028-46321CB8DF40}"/>
+          </ac:spMkLst>
+        </pc:spChg>
+        <pc:spChg chg="add mod">
+          <ac:chgData name="Patrick Chromy" userId="f75110142f2032e8" providerId="LiveId" clId="{A60AB22C-9B23-4A50-A013-0F4752E49A98}" dt="2026-08-13T21:55:19.716" v="2357" actId="20577"/>
+          <ac:spMkLst>
+            <pc:docMk/>
+            <pc:sldMk cId="2399453089" sldId="268"/>
+            <ac:spMk id="14" creationId="{1E953922-3CD5-95E0-6078-BDBF0D5B30DF}"/>
+          </ac:spMkLst>
+        </pc:spChg>
+        <pc:spChg chg="add mod">
+          <ac:chgData name="Patrick Chromy" userId="f75110142f2032e8" providerId="LiveId" clId="{A60AB22C-9B23-4A50-A013-0F4752E49A98}" dt="2026-08-13T21:58:14.209" v="2503" actId="1076"/>
+          <ac:spMkLst>
+            <pc:docMk/>
+            <pc:sldMk cId="2399453089" sldId="268"/>
+            <ac:spMk id="18" creationId="{D7F766F2-8ABA-3EBC-070E-35AD29A4E25B}"/>
+          </ac:spMkLst>
+        </pc:spChg>
+        <pc:spChg chg="add mod">
+          <ac:chgData name="Patrick Chromy" userId="f75110142f2032e8" providerId="LiveId" clId="{A60AB22C-9B23-4A50-A013-0F4752E49A98}" dt="2026-08-13T21:58:30.348" v="2510" actId="20577"/>
+          <ac:spMkLst>
+            <pc:docMk/>
+            <pc:sldMk cId="2399453089" sldId="268"/>
+            <ac:spMk id="20" creationId="{CF3D2567-5B64-3518-0F4F-E13DA646A129}"/>
+          </ac:spMkLst>
+        </pc:spChg>
+        <pc:picChg chg="del">
+          <ac:chgData name="Patrick Chromy" userId="f75110142f2032e8" providerId="LiveId" clId="{A60AB22C-9B23-4A50-A013-0F4752E49A98}" dt="2026-08-13T21:43:04.717" v="2005" actId="478"/>
+          <ac:picMkLst>
+            <pc:docMk/>
+            <pc:sldMk cId="2399453089" sldId="268"/>
+            <ac:picMk id="3" creationId="{9AA11E69-DEF3-A033-BC7A-E816EE8ADE85}"/>
+          </ac:picMkLst>
+        </pc:picChg>
+        <pc:picChg chg="add mod">
+          <ac:chgData name="Patrick Chromy" userId="f75110142f2032e8" providerId="LiveId" clId="{A60AB22C-9B23-4A50-A013-0F4752E49A98}" dt="2026-08-13T21:43:11.591" v="2009" actId="1076"/>
+          <ac:picMkLst>
+            <pc:docMk/>
+            <pc:sldMk cId="2399453089" sldId="268"/>
+            <ac:picMk id="4" creationId="{DAE0BB37-AEC4-88AB-75AB-26553DCE0F67}"/>
+          </ac:picMkLst>
+        </pc:picChg>
+        <pc:picChg chg="add mod">
+          <ac:chgData name="Patrick Chromy" userId="f75110142f2032e8" providerId="LiveId" clId="{A60AB22C-9B23-4A50-A013-0F4752E49A98}" dt="2026-08-13T21:57:05.932" v="2364" actId="1582"/>
+          <ac:picMkLst>
+            <pc:docMk/>
+            <pc:sldMk cId="2399453089" sldId="268"/>
+            <ac:picMk id="16" creationId="{54655349-2B85-F05B-50CE-3728CB8C2C98}"/>
+          </ac:picMkLst>
+        </pc:picChg>
+      </pc:sldChg>
+      <pc:sldChg chg="addSp modSp new mod">
+        <pc:chgData name="Patrick Chromy" userId="f75110142f2032e8" providerId="LiveId" clId="{A60AB22C-9B23-4A50-A013-0F4752E49A98}" dt="2026-08-13T22:09:21.604" v="2791" actId="20577"/>
+        <pc:sldMkLst>
+          <pc:docMk/>
+          <pc:sldMk cId="3879578014" sldId="269"/>
+        </pc:sldMkLst>
+        <pc:spChg chg="add mod">
+          <ac:chgData name="Patrick Chromy" userId="f75110142f2032e8" providerId="LiveId" clId="{A60AB22C-9B23-4A50-A013-0F4752E49A98}" dt="2026-08-13T22:01:38.449" v="2532" actId="20577"/>
+          <ac:spMkLst>
+            <pc:docMk/>
+            <pc:sldMk cId="3879578014" sldId="269"/>
+            <ac:spMk id="5" creationId="{7C35F62E-6C1B-AC89-2936-81BAF9694279}"/>
+          </ac:spMkLst>
+        </pc:spChg>
+        <pc:spChg chg="add mod">
+          <ac:chgData name="Patrick Chromy" userId="f75110142f2032e8" providerId="LiveId" clId="{A60AB22C-9B23-4A50-A013-0F4752E49A98}" dt="2026-08-13T22:09:21.604" v="2791" actId="20577"/>
+          <ac:spMkLst>
+            <pc:docMk/>
+            <pc:sldMk cId="3879578014" sldId="269"/>
+            <ac:spMk id="7" creationId="{93E01707-8124-68B6-2E3D-623AF5582A22}"/>
+          </ac:spMkLst>
+        </pc:spChg>
+        <pc:spChg chg="add mod">
+          <ac:chgData name="Patrick Chromy" userId="f75110142f2032e8" providerId="LiveId" clId="{A60AB22C-9B23-4A50-A013-0F4752E49A98}" dt="2026-08-13T22:02:23.961" v="2541" actId="1076"/>
+          <ac:spMkLst>
+            <pc:docMk/>
+            <pc:sldMk cId="3879578014" sldId="269"/>
+            <ac:spMk id="9" creationId="{F548CB97-6201-917D-0CAC-0559EED2BD2E}"/>
+          </ac:spMkLst>
+        </pc:spChg>
+        <pc:spChg chg="add mod">
+          <ac:chgData name="Patrick Chromy" userId="f75110142f2032e8" providerId="LiveId" clId="{A60AB22C-9B23-4A50-A013-0F4752E49A98}" dt="2026-08-13T22:08:56.544" v="2709" actId="20577"/>
+          <ac:spMkLst>
+            <pc:docMk/>
+            <pc:sldMk cId="3879578014" sldId="269"/>
+            <ac:spMk id="11" creationId="{37D3848C-0E0D-F117-6789-30E7657A1D4A}"/>
+          </ac:spMkLst>
+        </pc:spChg>
+        <pc:picChg chg="add mod">
+          <ac:chgData name="Patrick Chromy" userId="f75110142f2032e8" providerId="LiveId" clId="{A60AB22C-9B23-4A50-A013-0F4752E49A98}" dt="2026-08-13T22:01:59.240" v="2536" actId="1076"/>
+          <ac:picMkLst>
+            <pc:docMk/>
+            <pc:sldMk cId="3879578014" sldId="269"/>
+            <ac:picMk id="3" creationId="{CFDD0DDD-EC01-0CA5-C926-9B661FCF1CBA}"/>
+          </ac:picMkLst>
+        </pc:picChg>
+      </pc:sldChg>
+      <pc:sldChg chg="addSp modSp new mod">
+        <pc:chgData name="Patrick Chromy" userId="f75110142f2032e8" providerId="LiveId" clId="{A60AB22C-9B23-4A50-A013-0F4752E49A98}" dt="2026-08-13T22:13:28.926" v="3062" actId="14826"/>
+        <pc:sldMkLst>
+          <pc:docMk/>
+          <pc:sldMk cId="179565023" sldId="270"/>
+        </pc:sldMkLst>
+        <pc:spChg chg="add mod">
+          <ac:chgData name="Patrick Chromy" userId="f75110142f2032e8" providerId="LiveId" clId="{A60AB22C-9B23-4A50-A013-0F4752E49A98}" dt="2026-08-13T22:10:12.912" v="2798" actId="20577"/>
+          <ac:spMkLst>
+            <pc:docMk/>
+            <pc:sldMk cId="179565023" sldId="270"/>
+            <ac:spMk id="5" creationId="{789E5C9E-F44A-BDD1-66D6-AC5340F32C31}"/>
+          </ac:spMkLst>
+        </pc:spChg>
+        <pc:spChg chg="add mod">
+          <ac:chgData name="Patrick Chromy" userId="f75110142f2032e8" providerId="LiveId" clId="{A60AB22C-9B23-4A50-A013-0F4752E49A98}" dt="2026-08-13T22:10:27.410" v="2801" actId="20577"/>
+          <ac:spMkLst>
+            <pc:docMk/>
+            <pc:sldMk cId="179565023" sldId="270"/>
+            <ac:spMk id="7" creationId="{37DEF1A7-D870-BE88-F4EB-68A9AB6BF19D}"/>
+          </ac:spMkLst>
+        </pc:spChg>
+        <pc:spChg chg="add mod">
+          <ac:chgData name="Patrick Chromy" userId="f75110142f2032e8" providerId="LiveId" clId="{A60AB22C-9B23-4A50-A013-0F4752E49A98}" dt="2026-08-13T22:10:34.052" v="2804" actId="20577"/>
+          <ac:spMkLst>
+            <pc:docMk/>
+            <pc:sldMk cId="179565023" sldId="270"/>
+            <ac:spMk id="9" creationId="{2919ED9B-ED2E-B249-0631-96895A6DDC39}"/>
+          </ac:spMkLst>
+        </pc:spChg>
+        <pc:spChg chg="add mod">
+          <ac:chgData name="Patrick Chromy" userId="f75110142f2032e8" providerId="LiveId" clId="{A60AB22C-9B23-4A50-A013-0F4752E49A98}" dt="2026-08-13T22:10:58.269" v="2809" actId="20577"/>
+          <ac:spMkLst>
+            <pc:docMk/>
+            <pc:sldMk cId="179565023" sldId="270"/>
+            <ac:spMk id="11" creationId="{B647C745-C66D-9951-95A4-603E075BA0BA}"/>
+          </ac:spMkLst>
+        </pc:spChg>
+        <pc:spChg chg="add mod">
+          <ac:chgData name="Patrick Chromy" userId="f75110142f2032e8" providerId="LiveId" clId="{A60AB22C-9B23-4A50-A013-0F4752E49A98}" dt="2026-08-13T22:13:01.184" v="3061" actId="2085"/>
+          <ac:spMkLst>
+            <pc:docMk/>
+            <pc:sldMk cId="179565023" sldId="270"/>
+            <ac:spMk id="13" creationId="{B900FEBC-EFF3-5D20-D6DE-69314FEB60D0}"/>
+          </ac:spMkLst>
+        </pc:spChg>
+        <pc:spChg chg="add mod">
+          <ac:chgData name="Patrick Chromy" userId="f75110142f2032e8" providerId="LiveId" clId="{A60AB22C-9B23-4A50-A013-0F4752E49A98}" dt="2026-08-13T22:12:38.477" v="3053" actId="20577"/>
+          <ac:spMkLst>
+            <pc:docMk/>
+            <pc:sldMk cId="179565023" sldId="270"/>
+            <ac:spMk id="15" creationId="{5D76DD9A-4496-B071-25B8-ED496C6A046B}"/>
+          </ac:spMkLst>
+        </pc:spChg>
+        <pc:spChg chg="add mod">
+          <ac:chgData name="Patrick Chromy" userId="f75110142f2032e8" providerId="LiveId" clId="{A60AB22C-9B23-4A50-A013-0F4752E49A98}" dt="2026-08-13T22:12:44.266" v="3056" actId="20577"/>
+          <ac:spMkLst>
+            <pc:docMk/>
+            <pc:sldMk cId="179565023" sldId="270"/>
+            <ac:spMk id="17" creationId="{5985DD78-573D-1439-730C-29B6FEF78538}"/>
+          </ac:spMkLst>
+        </pc:spChg>
+        <pc:picChg chg="add mod">
+          <ac:chgData name="Patrick Chromy" userId="f75110142f2032e8" providerId="LiveId" clId="{A60AB22C-9B23-4A50-A013-0F4752E49A98}" dt="2026-08-13T22:13:28.926" v="3062" actId="14826"/>
+          <ac:picMkLst>
+            <pc:docMk/>
+            <pc:sldMk cId="179565023" sldId="270"/>
+            <ac:picMk id="3" creationId="{E0FB8E04-7CA3-E536-7851-4E69F4E85939}"/>
+          </ac:picMkLst>
+        </pc:picChg>
       </pc:sldChg>
     </pc:docChg>
   </pc:docChgLst>
@@ -6834,7 +7713,7 @@
           <a:p>
             <a:fld id="{5BCAD085-E8A6-8845-BD4E-CB4CCA059FC4}" type="datetimeFigureOut">
               <a:rPr lang="en-US" smtClean="0"/>
-              <a:t>8/5/2026</a:t>
+              <a:t>8/13/2026</a:t>
             </a:fld>
             <a:endParaRPr lang="en-US"/>
           </a:p>
@@ -7041,7 +7920,7 @@
           <a:p>
             <a:fld id="{5BCAD085-E8A6-8845-BD4E-CB4CCA059FC4}" type="datetimeFigureOut">
               <a:rPr lang="en-US" smtClean="0"/>
-              <a:t>8/5/2026</a:t>
+              <a:t>8/13/2026</a:t>
             </a:fld>
             <a:endParaRPr lang="en-US"/>
           </a:p>
@@ -7221,7 +8100,7 @@
           <a:p>
             <a:fld id="{5BCAD085-E8A6-8845-BD4E-CB4CCA059FC4}" type="datetimeFigureOut">
               <a:rPr lang="en-US" smtClean="0"/>
-              <a:t>8/5/2026</a:t>
+              <a:t>8/13/2026</a:t>
             </a:fld>
             <a:endParaRPr lang="en-US"/>
           </a:p>
@@ -7426,7 +8305,7 @@
           <a:p>
             <a:fld id="{5BCAD085-E8A6-8845-BD4E-CB4CCA059FC4}" type="datetimeFigureOut">
               <a:rPr lang="en-US" smtClean="0"/>
-              <a:t>8/5/2026</a:t>
+              <a:t>8/13/2026</a:t>
             </a:fld>
             <a:endParaRPr lang="en-US"/>
           </a:p>
@@ -14164,7 +15043,7 @@
           <a:p>
             <a:fld id="{5BCAD085-E8A6-8845-BD4E-CB4CCA059FC4}" type="datetimeFigureOut">
               <a:rPr lang="en-US" smtClean="0"/>
-              <a:t>8/5/2026</a:t>
+              <a:t>8/13/2026</a:t>
             </a:fld>
             <a:endParaRPr lang="en-US"/>
           </a:p>
@@ -14438,7 +15317,7 @@
           <a:p>
             <a:fld id="{5BCAD085-E8A6-8845-BD4E-CB4CCA059FC4}" type="datetimeFigureOut">
               <a:rPr lang="en-US" smtClean="0"/>
-              <a:t>8/5/2026</a:t>
+              <a:t>8/13/2026</a:t>
             </a:fld>
             <a:endParaRPr lang="en-US"/>
           </a:p>
@@ -14841,7 +15720,7 @@
           <a:p>
             <a:fld id="{5BCAD085-E8A6-8845-BD4E-CB4CCA059FC4}" type="datetimeFigureOut">
               <a:rPr lang="en-US" smtClean="0"/>
-              <a:t>8/5/2026</a:t>
+              <a:t>8/13/2026</a:t>
             </a:fld>
             <a:endParaRPr lang="en-US"/>
           </a:p>
@@ -14959,7 +15838,7 @@
           <a:p>
             <a:fld id="{5BCAD085-E8A6-8845-BD4E-CB4CCA059FC4}" type="datetimeFigureOut">
               <a:rPr lang="en-US" smtClean="0"/>
-              <a:t>8/5/2026</a:t>
+              <a:t>8/13/2026</a:t>
             </a:fld>
             <a:endParaRPr lang="en-US"/>
           </a:p>
@@ -15054,7 +15933,7 @@
           <a:p>
             <a:fld id="{5BCAD085-E8A6-8845-BD4E-CB4CCA059FC4}" type="datetimeFigureOut">
               <a:rPr lang="en-US" smtClean="0"/>
-              <a:t>8/5/2026</a:t>
+              <a:t>8/13/2026</a:t>
             </a:fld>
             <a:endParaRPr lang="en-US"/>
           </a:p>
@@ -15346,7 +16225,7 @@
           <a:p>
             <a:fld id="{5BCAD085-E8A6-8845-BD4E-CB4CCA059FC4}" type="datetimeFigureOut">
               <a:rPr lang="en-US" smtClean="0"/>
-              <a:t>8/5/2026</a:t>
+              <a:t>8/13/2026</a:t>
             </a:fld>
             <a:endParaRPr lang="en-US"/>
           </a:p>
@@ -15626,7 +16505,7 @@
           <a:p>
             <a:fld id="{5BCAD085-E8A6-8845-BD4E-CB4CCA059FC4}" type="datetimeFigureOut">
               <a:rPr lang="en-US" smtClean="0"/>
-              <a:t>8/5/2026</a:t>
+              <a:t>8/13/2026</a:t>
             </a:fld>
             <a:endParaRPr lang="en-US"/>
           </a:p>
@@ -15876,7 +16755,7 @@
           <a:p>
             <a:fld id="{5BCAD085-E8A6-8845-BD4E-CB4CCA059FC4}" type="datetimeFigureOut">
               <a:rPr lang="en-US" smtClean="0"/>
-              <a:t>8/5/2026</a:t>
+              <a:t>8/13/2026</a:t>
             </a:fld>
             <a:endParaRPr lang="en-US"/>
           </a:p>
@@ -16466,9 +17345,59 @@
           <a:chExt cx="0" cy="0"/>
         </a:xfrm>
       </p:grpSpPr>
+      <p:sp>
+        <p:nvSpPr>
+          <p:cNvPr id="5" name="TextBox 19">
+            <a:extLst>
+              <a:ext uri="{FF2B5EF4-FFF2-40B4-BE49-F238E27FC236}">
+                <a16:creationId xmlns:a16="http://schemas.microsoft.com/office/drawing/2014/main" id="{B8765937-5DA7-AE19-0BEF-9C2D921DD529}"/>
+              </a:ext>
+            </a:extLst>
+          </p:cNvPr>
+          <p:cNvSpPr txBox="1"/>
+          <p:nvPr/>
+        </p:nvSpPr>
+        <p:spPr>
+          <a:xfrm>
+            <a:off x="512894" y="907594"/>
+            <a:ext cx="8229600" cy="400110"/>
+          </a:xfrm>
+          <a:prstGeom prst="rect">
+            <a:avLst/>
+          </a:prstGeom>
+          <a:noFill/>
+        </p:spPr>
+        <p:txBody>
+          <a:bodyPr wrap="square">
+            <a:spAutoFit/>
+          </a:bodyPr>
+          <a:lstStyle/>
+          <a:p>
+            <a:r>
+              <a:rPr lang="de-AT" sz="2000" b="1" dirty="0">
+                <a:solidFill>
+                  <a:srgbClr val="1A1A1A"/>
+                </a:solidFill>
+              </a:rPr>
+              <a:t>Phase 2: Runde abrechnen</a:t>
+            </a:r>
+            <a:endParaRPr sz="2000" b="1" dirty="0">
+              <a:solidFill>
+                <a:srgbClr val="1A1A1A"/>
+              </a:solidFill>
+            </a:endParaRPr>
+          </a:p>
+        </p:txBody>
+      </p:sp>
       <p:pic>
         <p:nvPicPr>
-          <p:cNvPr id="2" name="Picture 1" descr="02_tiling_bonuschips.png"/>
+          <p:cNvPr id="4" name="Grafik 3">
+            <a:extLst>
+              <a:ext uri="{FF2B5EF4-FFF2-40B4-BE49-F238E27FC236}">
+                <a16:creationId xmlns:a16="http://schemas.microsoft.com/office/drawing/2014/main" id="{DAE0BB37-AEC4-88AB-75AB-26553DCE0F67}"/>
+              </a:ext>
+            </a:extLst>
+          </p:cNvPr>
           <p:cNvPicPr>
             <a:picLocks noChangeAspect="1"/>
           </p:cNvPicPr>
@@ -16482,8 +17411,8 @@
         </p:blipFill>
         <p:spPr>
           <a:xfrm>
-            <a:off x="483395" y="0"/>
-            <a:ext cx="12191695" cy="7721406"/>
+            <a:off x="372737" y="1476374"/>
+            <a:ext cx="11614475" cy="5538629"/>
           </a:xfrm>
           <a:prstGeom prst="rect">
             <a:avLst/>
@@ -16492,14 +17421,20 @@
       </p:pic>
       <p:sp>
         <p:nvSpPr>
-          <p:cNvPr id="3" name="Marker 1"/>
+          <p:cNvPr id="8" name="Marker 7">
+            <a:extLst>
+              <a:ext uri="{FF2B5EF4-FFF2-40B4-BE49-F238E27FC236}">
+                <a16:creationId xmlns:a16="http://schemas.microsoft.com/office/drawing/2014/main" id="{DA0DBE75-D4E4-9009-8145-CA524CF16E0F}"/>
+              </a:ext>
+            </a:extLst>
+          </p:cNvPr>
           <p:cNvSpPr/>
           <p:nvPr/>
         </p:nvSpPr>
         <p:spPr>
           <a:xfrm>
-            <a:off x="6701160" y="1609305"/>
-            <a:ext cx="243833" cy="243833"/>
+            <a:off x="3941359" y="2637532"/>
+            <a:ext cx="276345" cy="276345"/>
           </a:xfrm>
           <a:prstGeom prst="ellipse">
             <a:avLst/>
@@ -16534,26 +17469,250 @@
           <a:p>
             <a:pPr algn="ctr"/>
             <a:r>
-              <a:rPr sz="1400" b="1">
+              <a:rPr lang="de-AT" sz="1400" b="1" dirty="0">
                 <a:solidFill>
                   <a:srgbClr val="FFFFFF"/>
                 </a:solidFill>
               </a:rPr>
-              <a:t>1</a:t>
-            </a:r>
+              <a:t>21</a:t>
+            </a:r>
+            <a:endParaRPr sz="1400" b="1" dirty="0">
+              <a:solidFill>
+                <a:srgbClr val="FFFFFF"/>
+              </a:solidFill>
+            </a:endParaRPr>
           </a:p>
         </p:txBody>
       </p:sp>
       <p:sp>
         <p:nvSpPr>
-          <p:cNvPr id="4" name="Marker 2"/>
+          <p:cNvPr id="10" name="Textfeld 9">
+            <a:extLst>
+              <a:ext uri="{FF2B5EF4-FFF2-40B4-BE49-F238E27FC236}">
+                <a16:creationId xmlns:a16="http://schemas.microsoft.com/office/drawing/2014/main" id="{4A18779B-2D12-6108-A1D8-06AD00BEBD5F}"/>
+              </a:ext>
+            </a:extLst>
+          </p:cNvPr>
+          <p:cNvSpPr txBox="1"/>
+          <p:nvPr/>
+        </p:nvSpPr>
+        <p:spPr>
+          <a:xfrm>
+            <a:off x="2886696" y="4009052"/>
+            <a:ext cx="4455208" cy="3005951"/>
+          </a:xfrm>
+          <a:custGeom>
+            <a:avLst/>
+            <a:gdLst>
+              <a:gd name="csX0" fmla="*/ 0 w 4455208"/>
+              <a:gd name="csY0" fmla="*/ 0 h 3005951"/>
+              <a:gd name="csX1" fmla="*/ 4455208 w 4455208"/>
+              <a:gd name="csY1" fmla="*/ 0 h 3005951"/>
+              <a:gd name="csX2" fmla="*/ 4455208 w 4455208"/>
+              <a:gd name="csY2" fmla="*/ 3005951 h 3005951"/>
+              <a:gd name="csX3" fmla="*/ 0 w 4455208"/>
+              <a:gd name="csY3" fmla="*/ 3005951 h 3005951"/>
+              <a:gd name="csX4" fmla="*/ 0 w 4455208"/>
+              <a:gd name="csY4" fmla="*/ 0 h 3005951"/>
+            </a:gdLst>
+            <a:ahLst/>
+            <a:cxnLst>
+              <a:cxn ang="0">
+                <a:pos x="csX0" y="csY0"/>
+              </a:cxn>
+              <a:cxn ang="0">
+                <a:pos x="csX1" y="csY1"/>
+              </a:cxn>
+              <a:cxn ang="0">
+                <a:pos x="csX2" y="csY2"/>
+              </a:cxn>
+              <a:cxn ang="0">
+                <a:pos x="csX3" y="csY3"/>
+              </a:cxn>
+              <a:cxn ang="0">
+                <a:pos x="csX4" y="csY4"/>
+              </a:cxn>
+            </a:cxnLst>
+            <a:rect l="l" t="t" r="r" b="b"/>
+            <a:pathLst>
+              <a:path w="4455208" h="3005951" fill="none" extrusionOk="0">
+                <a:moveTo>
+                  <a:pt x="0" y="0"/>
+                </a:moveTo>
+                <a:cubicBezTo>
+                  <a:pt x="1249259" y="-143182"/>
+                  <a:pt x="3504344" y="-123185"/>
+                  <a:pt x="4455208" y="0"/>
+                </a:cubicBezTo>
+                <a:cubicBezTo>
+                  <a:pt x="4621038" y="1422769"/>
+                  <a:pt x="4358757" y="2590737"/>
+                  <a:pt x="4455208" y="3005951"/>
+                </a:cubicBezTo>
+                <a:cubicBezTo>
+                  <a:pt x="2482747" y="2964894"/>
+                  <a:pt x="1471973" y="2905565"/>
+                  <a:pt x="0" y="3005951"/>
+                </a:cubicBezTo>
+                <a:cubicBezTo>
+                  <a:pt x="-150974" y="2394449"/>
+                  <a:pt x="12648" y="1401673"/>
+                  <a:pt x="0" y="0"/>
+                </a:cubicBezTo>
+                <a:close/>
+              </a:path>
+              <a:path w="4455208" h="3005951" stroke="0" extrusionOk="0">
+                <a:moveTo>
+                  <a:pt x="0" y="0"/>
+                </a:moveTo>
+                <a:cubicBezTo>
+                  <a:pt x="635919" y="-118874"/>
+                  <a:pt x="2238219" y="84730"/>
+                  <a:pt x="4455208" y="0"/>
+                </a:cubicBezTo>
+                <a:cubicBezTo>
+                  <a:pt x="4522974" y="955335"/>
+                  <a:pt x="4568344" y="2244446"/>
+                  <a:pt x="4455208" y="3005951"/>
+                </a:cubicBezTo>
+                <a:cubicBezTo>
+                  <a:pt x="2705387" y="2840213"/>
+                  <a:pt x="551885" y="3140383"/>
+                  <a:pt x="0" y="3005951"/>
+                </a:cubicBezTo>
+                <a:cubicBezTo>
+                  <a:pt x="-18077" y="2584252"/>
+                  <a:pt x="-50488" y="483492"/>
+                  <a:pt x="0" y="0"/>
+                </a:cubicBezTo>
+                <a:close/>
+              </a:path>
+            </a:pathLst>
+          </a:custGeom>
+          <a:solidFill>
+            <a:schemeClr val="bg1"/>
+          </a:solidFill>
+          <a:ln w="28575">
+            <a:solidFill>
+              <a:schemeClr val="accent1"/>
+            </a:solidFill>
+            <a:extLst>
+              <a:ext uri="{C807C97D-BFC1-408E-A445-0C87EB9F89A2}">
+                <ask:lineSketchStyleProps xmlns:ask="http://schemas.microsoft.com/office/drawing/2018/sketchyshapes" sd="2188382381">
+                  <a:prstGeom prst="rect">
+                    <a:avLst/>
+                  </a:prstGeom>
+                  <ask:type>
+                    <ask:lineSketchCurved/>
+                  </ask:type>
+                </ask:lineSketchStyleProps>
+              </a:ext>
+            </a:extLst>
+          </a:ln>
+        </p:spPr>
+        <p:txBody>
+          <a:bodyPr wrap="square">
+            <a:spAutoFit/>
+          </a:bodyPr>
+          <a:lstStyle/>
+          <a:p>
+            <a:pPr marL="285750" indent="-285750">
+              <a:spcAft>
+                <a:spcPts val="400"/>
+              </a:spcAft>
+              <a:buFont typeface="Arial" panose="020B0604020202020204" pitchFamily="34" charset="0"/>
+              <a:buChar char="•"/>
+            </a:pPr>
+            <a:r>
+              <a:rPr lang="de-DE" sz="1600" dirty="0">
+                <a:solidFill>
+                  <a:srgbClr val="1A1A1A"/>
+                </a:solidFill>
+              </a:rPr>
+              <a:t>Reihen werden nacheinander abgerechnet, immer mit Reihe 1 beginnend. Aktuelle Reihe wird hervorgehoben #21</a:t>
+            </a:r>
+          </a:p>
+          <a:p>
+            <a:pPr marL="285750" indent="-285750">
+              <a:spcAft>
+                <a:spcPts val="400"/>
+              </a:spcAft>
+              <a:buFont typeface="Arial" panose="020B0604020202020204" pitchFamily="34" charset="0"/>
+              <a:buChar char="•"/>
+            </a:pPr>
+            <a:r>
+              <a:rPr lang="de-DE" sz="1600" dirty="0">
+                <a:solidFill>
+                  <a:srgbClr val="1A1A1A"/>
+                </a:solidFill>
+              </a:rPr>
+              <a:t>Hinweisfenster #13 zeigt ebenfalls an in welcher Reihe wir uns gerade befinden und was zu tun ist.</a:t>
+            </a:r>
+          </a:p>
+          <a:p>
+            <a:pPr marL="285750" indent="-285750">
+              <a:spcAft>
+                <a:spcPts val="400"/>
+              </a:spcAft>
+              <a:buFont typeface="Arial" panose="020B0604020202020204" pitchFamily="34" charset="0"/>
+              <a:buChar char="•"/>
+            </a:pPr>
+            <a:r>
+              <a:rPr lang="de-DE" sz="1600" dirty="0">
+                <a:solidFill>
+                  <a:srgbClr val="1A1A1A"/>
+                </a:solidFill>
+              </a:rPr>
+              <a:t>Reihe anklicken und dann valide Position auf der Kuppelplatte #35 wählen</a:t>
+            </a:r>
+          </a:p>
+          <a:p>
+            <a:pPr marL="285750" indent="-285750">
+              <a:spcAft>
+                <a:spcPts val="400"/>
+              </a:spcAft>
+              <a:buFont typeface="Arial" panose="020B0604020202020204" pitchFamily="34" charset="0"/>
+              <a:buChar char="•"/>
+            </a:pPr>
+            <a:r>
+              <a:rPr lang="de-DE" sz="1600" dirty="0">
+                <a:solidFill>
+                  <a:srgbClr val="1A1A1A"/>
+                </a:solidFill>
+              </a:rPr>
+              <a:t>Wenn alle Reihen abgeschlossen sind erscheint #H2 im Bereich von #13. Gibt das OK #36 für die KI fortzufahren.  </a:t>
+            </a:r>
+          </a:p>
+          <a:p>
+            <a:pPr>
+              <a:spcAft>
+                <a:spcPts val="400"/>
+              </a:spcAft>
+            </a:pPr>
+            <a:endParaRPr lang="de-DE" sz="1600" dirty="0">
+              <a:solidFill>
+                <a:srgbClr val="1A1A1A"/>
+              </a:solidFill>
+            </a:endParaRPr>
+          </a:p>
+        </p:txBody>
+      </p:sp>
+      <p:sp>
+        <p:nvSpPr>
+          <p:cNvPr id="12" name="Marker 7">
+            <a:extLst>
+              <a:ext uri="{FF2B5EF4-FFF2-40B4-BE49-F238E27FC236}">
+                <a16:creationId xmlns:a16="http://schemas.microsoft.com/office/drawing/2014/main" id="{D090C9BF-0497-0C30-A028-46321CB8DF40}"/>
+              </a:ext>
+            </a:extLst>
+          </p:cNvPr>
           <p:cNvSpPr/>
           <p:nvPr/>
         </p:nvSpPr>
         <p:spPr>
           <a:xfrm>
-            <a:off x="4441632" y="1397982"/>
-            <a:ext cx="243833" cy="243833"/>
+            <a:off x="11237509" y="2513587"/>
+            <a:ext cx="276345" cy="276345"/>
           </a:xfrm>
           <a:prstGeom prst="ellipse">
             <a:avLst/>
@@ -16588,26 +17747,37 @@
           <a:p>
             <a:pPr algn="ctr"/>
             <a:r>
-              <a:rPr sz="1400" b="1">
+              <a:rPr lang="de-AT" sz="1400" b="1" dirty="0">
                 <a:solidFill>
                   <a:srgbClr val="FFFFFF"/>
                 </a:solidFill>
               </a:rPr>
-              <a:t>2</a:t>
-            </a:r>
+              <a:t>13</a:t>
+            </a:r>
+            <a:endParaRPr sz="1400" b="1" dirty="0">
+              <a:solidFill>
+                <a:srgbClr val="FFFFFF"/>
+              </a:solidFill>
+            </a:endParaRPr>
           </a:p>
         </p:txBody>
       </p:sp>
       <p:sp>
         <p:nvSpPr>
-          <p:cNvPr id="5" name="Marker 3"/>
+          <p:cNvPr id="14" name="Marker 7">
+            <a:extLst>
+              <a:ext uri="{FF2B5EF4-FFF2-40B4-BE49-F238E27FC236}">
+                <a16:creationId xmlns:a16="http://schemas.microsoft.com/office/drawing/2014/main" id="{1E953922-3CD5-95E0-6078-BDBF0D5B30DF}"/>
+              </a:ext>
+            </a:extLst>
+          </p:cNvPr>
           <p:cNvSpPr/>
           <p:nvPr/>
         </p:nvSpPr>
         <p:spPr>
           <a:xfrm>
-            <a:off x="4441632" y="1796245"/>
-            <a:ext cx="243833" cy="243833"/>
+            <a:off x="5903629" y="2237242"/>
+            <a:ext cx="276345" cy="276345"/>
           </a:xfrm>
           <a:prstGeom prst="ellipse">
             <a:avLst/>
@@ -16642,26 +17812,146 @@
           <a:p>
             <a:pPr algn="ctr"/>
             <a:r>
-              <a:rPr sz="1400" b="1">
+              <a:rPr lang="de-AT" sz="1400" b="1" dirty="0">
                 <a:solidFill>
                   <a:srgbClr val="FFFFFF"/>
                 </a:solidFill>
               </a:rPr>
-              <a:t>3</a:t>
-            </a:r>
+              <a:t>35</a:t>
+            </a:r>
+            <a:endParaRPr sz="1400" b="1" dirty="0">
+              <a:solidFill>
+                <a:srgbClr val="FFFFFF"/>
+              </a:solidFill>
+            </a:endParaRPr>
+          </a:p>
+        </p:txBody>
+      </p:sp>
+      <p:pic>
+        <p:nvPicPr>
+          <p:cNvPr id="16" name="Grafik 15">
+            <a:extLst>
+              <a:ext uri="{FF2B5EF4-FFF2-40B4-BE49-F238E27FC236}">
+                <a16:creationId xmlns:a16="http://schemas.microsoft.com/office/drawing/2014/main" id="{54655349-2B85-F05B-50CE-3728CB8C2C98}"/>
+              </a:ext>
+            </a:extLst>
+          </p:cNvPr>
+          <p:cNvPicPr>
+            <a:picLocks noChangeAspect="1"/>
+          </p:cNvPicPr>
+          <p:nvPr/>
+        </p:nvPicPr>
+        <p:blipFill>
+          <a:blip r:embed="rId3"/>
+          <a:stretch>
+            <a:fillRect/>
+          </a:stretch>
+        </p:blipFill>
+        <p:spPr>
+          <a:xfrm>
+            <a:off x="10327826" y="3291586"/>
+            <a:ext cx="2372056" cy="1362265"/>
+          </a:xfrm>
+          <a:prstGeom prst="rect">
+            <a:avLst/>
+          </a:prstGeom>
+          <a:ln w="28575">
+            <a:solidFill>
+              <a:schemeClr val="accent1"/>
+            </a:solidFill>
+            <a:extLst>
+              <a:ext uri="{C807C97D-BFC1-408E-A445-0C87EB9F89A2}">
+                <ask:lineSketchStyleProps xmlns:ask="http://schemas.microsoft.com/office/drawing/2018/sketchyshapes">
+                  <ask:type>
+                    <ask:lineSketchNone/>
+                  </ask:type>
+                </ask:lineSketchStyleProps>
+              </a:ext>
+            </a:extLst>
+          </a:ln>
+        </p:spPr>
+      </p:pic>
+      <p:sp>
+        <p:nvSpPr>
+          <p:cNvPr id="18" name="Marker 7">
+            <a:extLst>
+              <a:ext uri="{FF2B5EF4-FFF2-40B4-BE49-F238E27FC236}">
+                <a16:creationId xmlns:a16="http://schemas.microsoft.com/office/drawing/2014/main" id="{D7F766F2-8ABA-3EBC-070E-35AD29A4E25B}"/>
+              </a:ext>
+            </a:extLst>
+          </p:cNvPr>
+          <p:cNvSpPr/>
+          <p:nvPr/>
+        </p:nvSpPr>
+        <p:spPr>
+          <a:xfrm>
+            <a:off x="12483882" y="3380576"/>
+            <a:ext cx="432000" cy="432000"/>
+          </a:xfrm>
+          <a:prstGeom prst="ellipse">
+            <a:avLst/>
+          </a:prstGeom>
+          <a:solidFill>
+            <a:schemeClr val="accent1"/>
+          </a:solidFill>
+          <a:ln w="22225">
+            <a:solidFill>
+              <a:srgbClr val="FFFFFF"/>
+            </a:solidFill>
+          </a:ln>
+          <a:effectLst/>
+        </p:spPr>
+        <p:style>
+          <a:lnRef idx="1">
+            <a:schemeClr val="accent1"/>
+          </a:lnRef>
+          <a:fillRef idx="3">
+            <a:schemeClr val="accent1"/>
+          </a:fillRef>
+          <a:effectRef idx="2">
+            <a:schemeClr val="accent1"/>
+          </a:effectRef>
+          <a:fontRef idx="minor">
+            <a:schemeClr val="lt1"/>
+          </a:fontRef>
+        </p:style>
+        <p:txBody>
+          <a:bodyPr wrap="none" lIns="0" tIns="0" rIns="0" bIns="0" rtlCol="0" anchor="ctr"/>
+          <a:lstStyle/>
+          <a:p>
+            <a:pPr algn="ctr"/>
+            <a:r>
+              <a:rPr lang="de-AT" sz="1400" b="1" dirty="0">
+                <a:solidFill>
+                  <a:srgbClr val="FFFFFF"/>
+                </a:solidFill>
+              </a:rPr>
+              <a:t>H2</a:t>
+            </a:r>
+            <a:endParaRPr sz="1400" b="1" dirty="0">
+              <a:solidFill>
+                <a:srgbClr val="FFFFFF"/>
+              </a:solidFill>
+            </a:endParaRPr>
           </a:p>
         </p:txBody>
       </p:sp>
       <p:sp>
         <p:nvSpPr>
-          <p:cNvPr id="6" name="Marker 4"/>
+          <p:cNvPr id="20" name="Marker 7">
+            <a:extLst>
+              <a:ext uri="{FF2B5EF4-FFF2-40B4-BE49-F238E27FC236}">
+                <a16:creationId xmlns:a16="http://schemas.microsoft.com/office/drawing/2014/main" id="{CF3D2567-5B64-3518-0F4F-E13DA646A129}"/>
+              </a:ext>
+            </a:extLst>
+          </p:cNvPr>
           <p:cNvSpPr/>
           <p:nvPr/>
         </p:nvSpPr>
         <p:spPr>
           <a:xfrm>
-            <a:off x="5929019" y="1601177"/>
-            <a:ext cx="243833" cy="243833"/>
+            <a:off x="12509706" y="4299677"/>
+            <a:ext cx="276345" cy="276345"/>
           </a:xfrm>
           <a:prstGeom prst="ellipse">
             <a:avLst/>
@@ -16696,26 +17986,320 @@
           <a:p>
             <a:pPr algn="ctr"/>
             <a:r>
-              <a:rPr sz="1400" b="1">
+              <a:rPr lang="de-AT" sz="1400" b="1" dirty="0">
                 <a:solidFill>
                   <a:srgbClr val="FFFFFF"/>
                 </a:solidFill>
               </a:rPr>
-              <a:t>4</a:t>
-            </a:r>
+              <a:t>36</a:t>
+            </a:r>
+            <a:endParaRPr sz="1400" b="1" dirty="0">
+              <a:solidFill>
+                <a:srgbClr val="FFFFFF"/>
+              </a:solidFill>
+            </a:endParaRPr>
+          </a:p>
+        </p:txBody>
+      </p:sp>
+    </p:spTree>
+    <p:extLst>
+      <p:ext uri="{BB962C8B-B14F-4D97-AF65-F5344CB8AC3E}">
+        <p14:creationId xmlns:p14="http://schemas.microsoft.com/office/powerpoint/2010/main" val="2399453089"/>
+      </p:ext>
+    </p:extLst>
+  </p:cSld>
+  <p:clrMapOvr>
+    <a:masterClrMapping/>
+  </p:clrMapOvr>
+</p:sld>
+</file>
+
+<file path=ppt/slides/slide11.xml><?xml version="1.0" encoding="utf-8"?>
+<p:sld xmlns:a="http://schemas.openxmlformats.org/drawingml/2006/main" xmlns:r="http://schemas.openxmlformats.org/officeDocument/2006/relationships" xmlns:p="http://schemas.openxmlformats.org/presentationml/2006/main">
+  <p:cSld>
+    <p:spTree>
+      <p:nvGrpSpPr>
+        <p:cNvPr id="1" name=""/>
+        <p:cNvGrpSpPr/>
+        <p:nvPr/>
+      </p:nvGrpSpPr>
+      <p:grpSpPr>
+        <a:xfrm>
+          <a:off x="0" y="0"/>
+          <a:ext cx="0" cy="0"/>
+          <a:chOff x="0" y="0"/>
+          <a:chExt cx="0" cy="0"/>
+        </a:xfrm>
+      </p:grpSpPr>
+      <p:pic>
+        <p:nvPicPr>
+          <p:cNvPr id="3" name="Grafik 2">
+            <a:extLst>
+              <a:ext uri="{FF2B5EF4-FFF2-40B4-BE49-F238E27FC236}">
+                <a16:creationId xmlns:a16="http://schemas.microsoft.com/office/drawing/2014/main" id="{CFDD0DDD-EC01-0CA5-C926-9B661FCF1CBA}"/>
+              </a:ext>
+            </a:extLst>
+          </p:cNvPr>
+          <p:cNvPicPr>
+            <a:picLocks noChangeAspect="1"/>
+          </p:cNvPicPr>
+          <p:nvPr/>
+        </p:nvPicPr>
+        <p:blipFill>
+          <a:blip r:embed="rId2"/>
+          <a:stretch>
+            <a:fillRect/>
+          </a:stretch>
+        </p:blipFill>
+        <p:spPr>
+          <a:xfrm>
+            <a:off x="3411206" y="2194312"/>
+            <a:ext cx="8849960" cy="3591426"/>
+          </a:xfrm>
+          <a:prstGeom prst="rect">
+            <a:avLst/>
+          </a:prstGeom>
+        </p:spPr>
+      </p:pic>
+      <p:sp>
+        <p:nvSpPr>
+          <p:cNvPr id="5" name="TextBox 19">
+            <a:extLst>
+              <a:ext uri="{FF2B5EF4-FFF2-40B4-BE49-F238E27FC236}">
+                <a16:creationId xmlns:a16="http://schemas.microsoft.com/office/drawing/2014/main" id="{7C35F62E-6C1B-AC89-2936-81BAF9694279}"/>
+              </a:ext>
+            </a:extLst>
+          </p:cNvPr>
+          <p:cNvSpPr txBox="1"/>
+          <p:nvPr/>
+        </p:nvSpPr>
+        <p:spPr>
+          <a:xfrm>
+            <a:off x="512894" y="907594"/>
+            <a:ext cx="8229600" cy="400110"/>
+          </a:xfrm>
+          <a:prstGeom prst="rect">
+            <a:avLst/>
+          </a:prstGeom>
+          <a:noFill/>
+        </p:spPr>
+        <p:txBody>
+          <a:bodyPr wrap="square">
+            <a:spAutoFit/>
+          </a:bodyPr>
+          <a:lstStyle/>
+          <a:p>
+            <a:r>
+              <a:rPr lang="de-AT" sz="2000" b="1" dirty="0">
+                <a:solidFill>
+                  <a:srgbClr val="1A1A1A"/>
+                </a:solidFill>
+              </a:rPr>
+              <a:t>Phase 2 – Detail: Bonusplättchen</a:t>
+            </a:r>
+            <a:endParaRPr sz="2000" b="1" dirty="0">
+              <a:solidFill>
+                <a:srgbClr val="1A1A1A"/>
+              </a:solidFill>
+            </a:endParaRPr>
           </a:p>
         </p:txBody>
       </p:sp>
       <p:sp>
         <p:nvSpPr>
-          <p:cNvPr id="7" name="Marker 6"/>
+          <p:cNvPr id="7" name="Textfeld 6">
+            <a:extLst>
+              <a:ext uri="{FF2B5EF4-FFF2-40B4-BE49-F238E27FC236}">
+                <a16:creationId xmlns:a16="http://schemas.microsoft.com/office/drawing/2014/main" id="{93E01707-8124-68B6-2E3D-623AF5582A22}"/>
+              </a:ext>
+            </a:extLst>
+          </p:cNvPr>
+          <p:cNvSpPr txBox="1"/>
+          <p:nvPr/>
+        </p:nvSpPr>
+        <p:spPr>
+          <a:xfrm>
+            <a:off x="512894" y="3666395"/>
+            <a:ext cx="4455208" cy="1918474"/>
+          </a:xfrm>
+          <a:custGeom>
+            <a:avLst/>
+            <a:gdLst>
+              <a:gd name="csX0" fmla="*/ 0 w 4455208"/>
+              <a:gd name="csY0" fmla="*/ 0 h 1918474"/>
+              <a:gd name="csX1" fmla="*/ 4455208 w 4455208"/>
+              <a:gd name="csY1" fmla="*/ 0 h 1918474"/>
+              <a:gd name="csX2" fmla="*/ 4455208 w 4455208"/>
+              <a:gd name="csY2" fmla="*/ 1918474 h 1918474"/>
+              <a:gd name="csX3" fmla="*/ 0 w 4455208"/>
+              <a:gd name="csY3" fmla="*/ 1918474 h 1918474"/>
+              <a:gd name="csX4" fmla="*/ 0 w 4455208"/>
+              <a:gd name="csY4" fmla="*/ 0 h 1918474"/>
+            </a:gdLst>
+            <a:ahLst/>
+            <a:cxnLst>
+              <a:cxn ang="0">
+                <a:pos x="csX0" y="csY0"/>
+              </a:cxn>
+              <a:cxn ang="0">
+                <a:pos x="csX1" y="csY1"/>
+              </a:cxn>
+              <a:cxn ang="0">
+                <a:pos x="csX2" y="csY2"/>
+              </a:cxn>
+              <a:cxn ang="0">
+                <a:pos x="csX3" y="csY3"/>
+              </a:cxn>
+              <a:cxn ang="0">
+                <a:pos x="csX4" y="csY4"/>
+              </a:cxn>
+            </a:cxnLst>
+            <a:rect l="l" t="t" r="r" b="b"/>
+            <a:pathLst>
+              <a:path w="4455208" h="1918474" fill="none" extrusionOk="0">
+                <a:moveTo>
+                  <a:pt x="0" y="0"/>
+                </a:moveTo>
+                <a:cubicBezTo>
+                  <a:pt x="1249259" y="-143182"/>
+                  <a:pt x="3504344" y="-123185"/>
+                  <a:pt x="4455208" y="0"/>
+                </a:cubicBezTo>
+                <a:cubicBezTo>
+                  <a:pt x="4621038" y="447380"/>
+                  <a:pt x="4358757" y="1652598"/>
+                  <a:pt x="4455208" y="1918474"/>
+                </a:cubicBezTo>
+                <a:cubicBezTo>
+                  <a:pt x="2482747" y="1877417"/>
+                  <a:pt x="1471973" y="1818088"/>
+                  <a:pt x="0" y="1918474"/>
+                </a:cubicBezTo>
+                <a:cubicBezTo>
+                  <a:pt x="-150974" y="1128614"/>
+                  <a:pt x="12648" y="367010"/>
+                  <a:pt x="0" y="0"/>
+                </a:cubicBezTo>
+                <a:close/>
+              </a:path>
+              <a:path w="4455208" h="1918474" stroke="0" extrusionOk="0">
+                <a:moveTo>
+                  <a:pt x="0" y="0"/>
+                </a:moveTo>
+                <a:cubicBezTo>
+                  <a:pt x="635919" y="-118874"/>
+                  <a:pt x="2238219" y="84730"/>
+                  <a:pt x="4455208" y="0"/>
+                </a:cubicBezTo>
+                <a:cubicBezTo>
+                  <a:pt x="4522974" y="484857"/>
+                  <a:pt x="4568344" y="1658009"/>
+                  <a:pt x="4455208" y="1918474"/>
+                </a:cubicBezTo>
+                <a:cubicBezTo>
+                  <a:pt x="2705387" y="1752736"/>
+                  <a:pt x="551885" y="2052906"/>
+                  <a:pt x="0" y="1918474"/>
+                </a:cubicBezTo>
+                <a:cubicBezTo>
+                  <a:pt x="-18077" y="1084524"/>
+                  <a:pt x="-50488" y="311387"/>
+                  <a:pt x="0" y="0"/>
+                </a:cubicBezTo>
+                <a:close/>
+              </a:path>
+            </a:pathLst>
+          </a:custGeom>
+          <a:solidFill>
+            <a:schemeClr val="bg1"/>
+          </a:solidFill>
+          <a:ln w="28575">
+            <a:solidFill>
+              <a:schemeClr val="accent1"/>
+            </a:solidFill>
+            <a:extLst>
+              <a:ext uri="{C807C97D-BFC1-408E-A445-0C87EB9F89A2}">
+                <ask:lineSketchStyleProps xmlns:ask="http://schemas.microsoft.com/office/drawing/2018/sketchyshapes" sd="2188382381">
+                  <a:prstGeom prst="rect">
+                    <a:avLst/>
+                  </a:prstGeom>
+                  <ask:type>
+                    <ask:lineSketchCurved/>
+                  </ask:type>
+                </ask:lineSketchStyleProps>
+              </a:ext>
+            </a:extLst>
+          </a:ln>
+        </p:spPr>
+        <p:txBody>
+          <a:bodyPr wrap="square">
+            <a:spAutoFit/>
+          </a:bodyPr>
+          <a:lstStyle/>
+          <a:p>
+            <a:pPr marL="285750" indent="-285750">
+              <a:spcAft>
+                <a:spcPts val="400"/>
+              </a:spcAft>
+              <a:buFont typeface="Arial" panose="020B0604020202020204" pitchFamily="34" charset="0"/>
+              <a:buChar char="•"/>
+            </a:pPr>
+            <a:r>
+              <a:rPr lang="de-DE" sz="1600" dirty="0">
+                <a:solidFill>
+                  <a:srgbClr val="1A1A1A"/>
+                </a:solidFill>
+              </a:rPr>
+              <a:t>Bereich der Bonuschips #25 wird auswählbar wenn eine Musterreihe mit Bonuschips aufgefüllt werden kann (Tauschregel: 2 von gleicher Farbe oder 3 von jeder Farbe.</a:t>
+            </a:r>
+          </a:p>
+          <a:p>
+            <a:pPr marL="285750" indent="-285750">
+              <a:spcAft>
+                <a:spcPts val="400"/>
+              </a:spcAft>
+              <a:buFont typeface="Arial" panose="020B0604020202020204" pitchFamily="34" charset="0"/>
+              <a:buChar char="•"/>
+            </a:pPr>
+            <a:r>
+              <a:rPr lang="de-DE" sz="1600" dirty="0">
+                <a:solidFill>
+                  <a:srgbClr val="1A1A1A"/>
+                </a:solidFill>
+              </a:rPr>
+              <a:t>Auffüllen mit Bonuschips lässt sich auch überspringen für die jeweilige Reihe</a:t>
+            </a:r>
+          </a:p>
+          <a:p>
+            <a:pPr>
+              <a:spcAft>
+                <a:spcPts val="400"/>
+              </a:spcAft>
+            </a:pPr>
+            <a:endParaRPr lang="de-DE" sz="1600" dirty="0">
+              <a:solidFill>
+                <a:srgbClr val="1A1A1A"/>
+              </a:solidFill>
+            </a:endParaRPr>
+          </a:p>
+        </p:txBody>
+      </p:sp>
+      <p:sp>
+        <p:nvSpPr>
+          <p:cNvPr id="9" name="Marker 7">
+            <a:extLst>
+              <a:ext uri="{FF2B5EF4-FFF2-40B4-BE49-F238E27FC236}">
+                <a16:creationId xmlns:a16="http://schemas.microsoft.com/office/drawing/2014/main" id="{F548CB97-6201-917D-0CAC-0559EED2BD2E}"/>
+              </a:ext>
+            </a:extLst>
+          </p:cNvPr>
           <p:cNvSpPr/>
           <p:nvPr/>
         </p:nvSpPr>
         <p:spPr>
           <a:xfrm>
-            <a:off x="12309340" y="430775"/>
-            <a:ext cx="243833" cy="243833"/>
+            <a:off x="5617759" y="4302467"/>
+            <a:ext cx="276345" cy="276345"/>
           </a:xfrm>
           <a:prstGeom prst="ellipse">
             <a:avLst/>
@@ -16750,26 +18334,37 @@
           <a:p>
             <a:pPr algn="ctr"/>
             <a:r>
-              <a:rPr sz="1400" b="1">
+              <a:rPr lang="de-AT" sz="1400" b="1" dirty="0">
                 <a:solidFill>
                   <a:srgbClr val="FFFFFF"/>
                 </a:solidFill>
               </a:rPr>
-              <a:t>6</a:t>
-            </a:r>
+              <a:t>21</a:t>
+            </a:r>
+            <a:endParaRPr sz="1400" b="1" dirty="0">
+              <a:solidFill>
+                <a:srgbClr val="FFFFFF"/>
+              </a:solidFill>
+            </a:endParaRPr>
           </a:p>
         </p:txBody>
       </p:sp>
       <p:sp>
         <p:nvSpPr>
-          <p:cNvPr id="8" name="Marker 7"/>
+          <p:cNvPr id="11" name="Marker 7">
+            <a:extLst>
+              <a:ext uri="{FF2B5EF4-FFF2-40B4-BE49-F238E27FC236}">
+                <a16:creationId xmlns:a16="http://schemas.microsoft.com/office/drawing/2014/main" id="{37D3848C-0E0D-F117-6789-30E7657A1D4A}"/>
+              </a:ext>
+            </a:extLst>
+          </p:cNvPr>
           <p:cNvSpPr/>
           <p:nvPr/>
         </p:nvSpPr>
         <p:spPr>
           <a:xfrm>
-            <a:off x="12309340" y="1341088"/>
-            <a:ext cx="243833" cy="243833"/>
+            <a:off x="7213806" y="5041130"/>
+            <a:ext cx="276345" cy="276345"/>
           </a:xfrm>
           <a:prstGeom prst="ellipse">
             <a:avLst/>
@@ -16804,295 +18399,27 @@
           <a:p>
             <a:pPr algn="ctr"/>
             <a:r>
-              <a:rPr sz="1400" b="1">
+              <a:rPr lang="de-AT" sz="1400" b="1" dirty="0">
                 <a:solidFill>
                   <a:srgbClr val="FFFFFF"/>
                 </a:solidFill>
               </a:rPr>
-              <a:t>7</a:t>
-            </a:r>
-          </a:p>
-        </p:txBody>
-      </p:sp>
-      <p:sp>
-        <p:nvSpPr>
-          <p:cNvPr id="9" name="TextBox 8"/>
-          <p:cNvSpPr txBox="1"/>
-          <p:nvPr/>
-        </p:nvSpPr>
-        <p:spPr>
-          <a:xfrm>
-            <a:off x="757714" y="5741126"/>
-            <a:ext cx="8229600" cy="400110"/>
-          </a:xfrm>
-          <a:prstGeom prst="rect">
-            <a:avLst/>
-          </a:prstGeom>
-          <a:noFill/>
-        </p:spPr>
-        <p:txBody>
-          <a:bodyPr wrap="square">
-            <a:spAutoFit/>
-          </a:bodyPr>
-          <a:lstStyle/>
-          <a:p>
-            <a:r>
-              <a:rPr sz="2000" b="1" dirty="0">
-                <a:solidFill>
-                  <a:srgbClr val="1A1A1A"/>
-                </a:solidFill>
-              </a:rPr>
-              <a:t>2) Tiling-Phase -- </a:t>
-            </a:r>
-            <a:r>
-              <a:rPr sz="2000" b="1" dirty="0" err="1">
-                <a:solidFill>
-                  <a:srgbClr val="1A1A1A"/>
-                </a:solidFill>
-              </a:rPr>
-              <a:t>Bonuschips</a:t>
-            </a:r>
-            <a:r>
-              <a:rPr sz="2000" b="1" dirty="0">
-                <a:solidFill>
-                  <a:srgbClr val="1A1A1A"/>
-                </a:solidFill>
-              </a:rPr>
-              <a:t> </a:t>
-            </a:r>
-            <a:r>
-              <a:rPr sz="2000" b="1" dirty="0" err="1">
-                <a:solidFill>
-                  <a:srgbClr val="1A1A1A"/>
-                </a:solidFill>
-              </a:rPr>
-              <a:t>einsetzen</a:t>
-            </a:r>
-            <a:r>
-              <a:rPr sz="2000" b="1" dirty="0">
-                <a:solidFill>
-                  <a:srgbClr val="1A1A1A"/>
-                </a:solidFill>
-              </a:rPr>
-              <a:t> </a:t>
-            </a:r>
-            <a:r>
-              <a:rPr sz="2000" b="1" dirty="0" err="1">
-                <a:solidFill>
-                  <a:srgbClr val="1A1A1A"/>
-                </a:solidFill>
-              </a:rPr>
-              <a:t>oder</a:t>
-            </a:r>
-            <a:r>
-              <a:rPr sz="2000" b="1" dirty="0">
-                <a:solidFill>
-                  <a:srgbClr val="1A1A1A"/>
-                </a:solidFill>
-              </a:rPr>
-              <a:t> Reihe </a:t>
-            </a:r>
-            <a:r>
-              <a:rPr sz="2000" b="1" dirty="0" err="1">
-                <a:solidFill>
-                  <a:srgbClr val="1A1A1A"/>
-                </a:solidFill>
-              </a:rPr>
-              <a:t>ueberspringen</a:t>
-            </a:r>
-            <a:endParaRPr sz="2000" b="1" dirty="0">
+              <a:t>37</a:t>
+            </a:r>
+            <a:endParaRPr sz="1400" b="1" dirty="0">
               <a:solidFill>
-                <a:srgbClr val="1A1A1A"/>
+                <a:srgbClr val="FFFFFF"/>
               </a:solidFill>
             </a:endParaRPr>
           </a:p>
         </p:txBody>
       </p:sp>
-      <p:sp>
-        <p:nvSpPr>
-          <p:cNvPr id="11" name="TextBox 10"/>
-          <p:cNvSpPr txBox="1"/>
-          <p:nvPr/>
-        </p:nvSpPr>
-        <p:spPr>
-          <a:xfrm>
-            <a:off x="757715" y="7831134"/>
-            <a:ext cx="5638647" cy="1210588"/>
-          </a:xfrm>
-          <a:prstGeom prst="rect">
-            <a:avLst/>
-          </a:prstGeom>
-          <a:noFill/>
-        </p:spPr>
-        <p:txBody>
-          <a:bodyPr wrap="square">
-            <a:spAutoFit/>
-          </a:bodyPr>
-          <a:lstStyle/>
-          <a:p>
-            <a:pPr>
-              <a:spcAft>
-                <a:spcPts val="400"/>
-              </a:spcAft>
-            </a:pPr>
-            <a:r>
-              <a:rPr sz="1100" b="1">
-                <a:solidFill>
-                  <a:srgbClr val="7A0D17"/>
-                </a:solidFill>
-              </a:rPr>
-              <a:t>1  </a:t>
-            </a:r>
-            <a:r>
-              <a:rPr sz="1100">
-                <a:solidFill>
-                  <a:srgbClr val="1A1A1A"/>
-                </a:solidFill>
-              </a:rPr>
-              <a:t>Blauer Punkt -- markiert die als naechstes faellige Reihe (oben-nach-unten-Regel).</a:t>
-            </a:r>
-          </a:p>
-          <a:p>
-            <a:pPr>
-              <a:spcAft>
-                <a:spcPts val="400"/>
-              </a:spcAft>
-            </a:pPr>
-            <a:r>
-              <a:rPr sz="1100" b="1">
-                <a:solidFill>
-                  <a:srgbClr val="7A0D17"/>
-                </a:solidFill>
-              </a:rPr>
-              <a:t>2  </a:t>
-            </a:r>
-            <a:r>
-              <a:rPr sz="1100">
-                <a:solidFill>
-                  <a:srgbClr val="1A1A1A"/>
-                </a:solidFill>
-              </a:rPr>
-              <a:t>Bonuschips-Kasten (jetzt farbig hervorgehoben) -- anklicken oeffnet den Dialog zum Einsetzen der Chips fuer die faellige Reihe: 2 gleichfarbige ODER 3 beliebige Chips = 1 fehlende Fliese.</a:t>
-            </a:r>
-          </a:p>
-          <a:p>
-            <a:pPr>
-              <a:spcAft>
-                <a:spcPts val="400"/>
-              </a:spcAft>
-            </a:pPr>
-            <a:r>
-              <a:rPr sz="1100" b="1">
-                <a:solidFill>
-                  <a:srgbClr val="7A0D17"/>
-                </a:solidFill>
-              </a:rPr>
-              <a:t>3  </a:t>
-            </a:r>
-            <a:r>
-              <a:rPr sz="1100">
-                <a:solidFill>
-                  <a:srgbClr val="1A1A1A"/>
-                </a:solidFill>
-              </a:rPr>
-              <a:t>„Reihe X fuer Bonuschips ignorieren“ -- ueberspringt diese nur per Chips komplettierbare Reihe bewusst, um z.B. erst eine spaetere zu bedienen. Ueber den „↺ zuruecksetzen“-Link wieder aufhebbar.</a:t>
-            </a:r>
-          </a:p>
-        </p:txBody>
-      </p:sp>
-      <p:sp>
-        <p:nvSpPr>
-          <p:cNvPr id="12" name="TextBox 11"/>
-          <p:cNvSpPr txBox="1"/>
-          <p:nvPr/>
-        </p:nvSpPr>
-        <p:spPr>
-          <a:xfrm>
-            <a:off x="6853562" y="7831135"/>
-            <a:ext cx="5638647" cy="1041311"/>
-          </a:xfrm>
-          <a:prstGeom prst="rect">
-            <a:avLst/>
-          </a:prstGeom>
-          <a:noFill/>
-        </p:spPr>
-        <p:txBody>
-          <a:bodyPr wrap="square">
-            <a:spAutoFit/>
-          </a:bodyPr>
-          <a:lstStyle/>
-          <a:p>
-            <a:pPr>
-              <a:spcAft>
-                <a:spcPts val="400"/>
-              </a:spcAft>
-            </a:pPr>
-            <a:r>
-              <a:rPr sz="1100" b="1">
-                <a:solidFill>
-                  <a:srgbClr val="7A0D17"/>
-                </a:solidFill>
-              </a:rPr>
-              <a:t>4  </a:t>
-            </a:r>
-            <a:r>
-              <a:rPr sz="1100">
-                <a:solidFill>
-                  <a:srgbClr val="1A1A1A"/>
-                </a:solidFill>
-              </a:rPr>
-              <a:t>Faellige Musterreihe -- gestrichelt umrandet, solange sie auf eine Aktion wartet.</a:t>
-            </a:r>
-          </a:p>
-          <a:p>
-            <a:pPr>
-              <a:spcAft>
-                <a:spcPts val="400"/>
-              </a:spcAft>
-            </a:pPr>
-            <a:r>
-              <a:rPr sz="1100" b="1">
-                <a:solidFill>
-                  <a:srgbClr val="7A0D17"/>
-                </a:solidFill>
-              </a:rPr>
-              <a:t>6  </a:t>
-            </a:r>
-            <a:r>
-              <a:rPr sz="1100">
-                <a:solidFill>
-                  <a:srgbClr val="1A1A1A"/>
-                </a:solidFill>
-              </a:rPr>
-              <a:t>Phasen-Anzeige „Phase 2: Reihe anklicken“ -- Hinweistext erklaert die Chip-Regel noch einmal.</a:t>
-            </a:r>
-          </a:p>
-          <a:p>
-            <a:pPr>
-              <a:spcAft>
-                <a:spcPts val="400"/>
-              </a:spcAft>
-            </a:pPr>
-            <a:r>
-              <a:rPr sz="1100" b="1">
-                <a:solidFill>
-                  <a:srgbClr val="7A0D17"/>
-                </a:solidFill>
-              </a:rPr>
-              <a:t>7  </a:t>
-            </a:r>
-            <a:r>
-              <a:rPr sz="1100">
-                <a:solidFill>
-                  <a:srgbClr val="1A1A1A"/>
-                </a:solidFill>
-              </a:rPr>
-              <a:t>„Mein Tiling abschliessen“ -- eigene Tiling-Phase beenden; danach ist die KI/der andere Spieler dran.</a:t>
-            </a:r>
-          </a:p>
-        </p:txBody>
-      </p:sp>
     </p:spTree>
+    <p:extLst>
+      <p:ext uri="{BB962C8B-B14F-4D97-AF65-F5344CB8AC3E}">
+        <p14:creationId xmlns:p14="http://schemas.microsoft.com/office/powerpoint/2010/main" val="3879578014"/>
+      </p:ext>
+    </p:extLst>
   </p:cSld>
   <p:clrMapOvr>
     <a:masterClrMapping/>
@@ -17100,7 +18427,7 @@
 </p:sld>
 </file>
 
-<file path=ppt/slides/slide11.xml><?xml version="1.0" encoding="utf-8"?>
+<file path=ppt/slides/slide12.xml><?xml version="1.0" encoding="utf-8"?>
 <p:sld xmlns:a="http://schemas.openxmlformats.org/drawingml/2006/main" xmlns:r="http://schemas.openxmlformats.org/officeDocument/2006/relationships" xmlns:p="http://schemas.openxmlformats.org/presentationml/2006/main">
   <p:cSld>
     <p:spTree>
@@ -17122,7 +18449,7 @@
           <p:cNvPr id="3" name="Grafik 2">
             <a:extLst>
               <a:ext uri="{FF2B5EF4-FFF2-40B4-BE49-F238E27FC236}">
-                <a16:creationId xmlns:a16="http://schemas.microsoft.com/office/drawing/2014/main" id="{9AA11E69-DEF3-A033-BC7A-E816EE8ADE85}"/>
+                <a16:creationId xmlns:a16="http://schemas.microsoft.com/office/drawing/2014/main" id="{E0FB8E04-7CA3-E536-7851-4E69F4E85939}"/>
               </a:ext>
             </a:extLst>
           </p:cNvPr>
@@ -17133,70 +18460,30 @@
         </p:nvPicPr>
         <p:blipFill>
           <a:blip r:embed="rId2"/>
-          <a:stretch>
-            <a:fillRect/>
-          </a:stretch>
+          <a:srcRect/>
+          <a:stretch/>
         </p:blipFill>
         <p:spPr>
           <a:xfrm>
-            <a:off x="596859" y="2981846"/>
-            <a:ext cx="11965070" cy="3905795"/>
+            <a:off x="3291537" y="1195844"/>
+            <a:ext cx="4346864" cy="4829849"/>
           </a:xfrm>
           <a:prstGeom prst="rect">
             <a:avLst/>
           </a:prstGeom>
+          <a:ln w="28575">
+            <a:solidFill>
+              <a:schemeClr val="accent1"/>
+            </a:solidFill>
+          </a:ln>
         </p:spPr>
       </p:pic>
       <p:sp>
         <p:nvSpPr>
-          <p:cNvPr id="5" name="TextBox 19">
+          <p:cNvPr id="5" name="Marker 7">
             <a:extLst>
               <a:ext uri="{FF2B5EF4-FFF2-40B4-BE49-F238E27FC236}">
-                <a16:creationId xmlns:a16="http://schemas.microsoft.com/office/drawing/2014/main" id="{B8765937-5DA7-AE19-0BEF-9C2D921DD529}"/>
-              </a:ext>
-            </a:extLst>
-          </p:cNvPr>
-          <p:cNvSpPr txBox="1"/>
-          <p:nvPr/>
-        </p:nvSpPr>
-        <p:spPr>
-          <a:xfrm>
-            <a:off x="512894" y="907594"/>
-            <a:ext cx="8229600" cy="400110"/>
-          </a:xfrm>
-          <a:prstGeom prst="rect">
-            <a:avLst/>
-          </a:prstGeom>
-          <a:noFill/>
-        </p:spPr>
-        <p:txBody>
-          <a:bodyPr wrap="square">
-            <a:spAutoFit/>
-          </a:bodyPr>
-          <a:lstStyle/>
-          <a:p>
-            <a:r>
-              <a:rPr lang="de-AT" sz="2000" b="1" dirty="0">
-                <a:solidFill>
-                  <a:srgbClr val="1A1A1A"/>
-                </a:solidFill>
-              </a:rPr>
-              <a:t>Phase 2: Runde abrechnen</a:t>
-            </a:r>
-            <a:endParaRPr sz="2000" b="1" dirty="0">
-              <a:solidFill>
-                <a:srgbClr val="1A1A1A"/>
-              </a:solidFill>
-            </a:endParaRPr>
-          </a:p>
-        </p:txBody>
-      </p:sp>
-      <p:sp>
-        <p:nvSpPr>
-          <p:cNvPr id="7" name="Marker 1">
-            <a:extLst>
-              <a:ext uri="{FF2B5EF4-FFF2-40B4-BE49-F238E27FC236}">
-                <a16:creationId xmlns:a16="http://schemas.microsoft.com/office/drawing/2014/main" id="{521CDA08-1F8C-1555-01F0-521634112340}"/>
+                <a16:creationId xmlns:a16="http://schemas.microsoft.com/office/drawing/2014/main" id="{789E5C9E-F44A-BDD1-66D6-AC5340F32C31}"/>
               </a:ext>
             </a:extLst>
           </p:cNvPr>
@@ -17205,8 +18492,73 @@
         </p:nvSpPr>
         <p:spPr>
           <a:xfrm>
-            <a:off x="4383861" y="3631288"/>
-            <a:ext cx="243833" cy="243833"/>
+            <a:off x="2855919" y="1651731"/>
+            <a:ext cx="432000" cy="432000"/>
+          </a:xfrm>
+          <a:prstGeom prst="ellipse">
+            <a:avLst/>
+          </a:prstGeom>
+          <a:solidFill>
+            <a:schemeClr val="accent1"/>
+          </a:solidFill>
+          <a:ln w="22225">
+            <a:solidFill>
+              <a:srgbClr val="FFFFFF"/>
+            </a:solidFill>
+          </a:ln>
+          <a:effectLst/>
+        </p:spPr>
+        <p:style>
+          <a:lnRef idx="1">
+            <a:schemeClr val="accent1"/>
+          </a:lnRef>
+          <a:fillRef idx="3">
+            <a:schemeClr val="accent1"/>
+          </a:fillRef>
+          <a:effectRef idx="2">
+            <a:schemeClr val="accent1"/>
+          </a:effectRef>
+          <a:fontRef idx="minor">
+            <a:schemeClr val="lt1"/>
+          </a:fontRef>
+        </p:style>
+        <p:txBody>
+          <a:bodyPr wrap="none" lIns="0" tIns="0" rIns="0" bIns="0" rtlCol="0" anchor="ctr"/>
+          <a:lstStyle/>
+          <a:p>
+            <a:pPr algn="ctr"/>
+            <a:r>
+              <a:rPr lang="de-AT" sz="1400" b="1" dirty="0">
+                <a:solidFill>
+                  <a:srgbClr val="FFFFFF"/>
+                </a:solidFill>
+              </a:rPr>
+              <a:t>F5</a:t>
+            </a:r>
+            <a:endParaRPr sz="1400" b="1" dirty="0">
+              <a:solidFill>
+                <a:srgbClr val="FFFFFF"/>
+              </a:solidFill>
+            </a:endParaRPr>
+          </a:p>
+        </p:txBody>
+      </p:sp>
+      <p:sp>
+        <p:nvSpPr>
+          <p:cNvPr id="7" name="Marker 7">
+            <a:extLst>
+              <a:ext uri="{FF2B5EF4-FFF2-40B4-BE49-F238E27FC236}">
+                <a16:creationId xmlns:a16="http://schemas.microsoft.com/office/drawing/2014/main" id="{37DEF1A7-D870-BE88-F4EB-68A9AB6BF19D}"/>
+              </a:ext>
+            </a:extLst>
+          </p:cNvPr>
+          <p:cNvSpPr/>
+          <p:nvPr/>
+        </p:nvSpPr>
+        <p:spPr>
+          <a:xfrm>
+            <a:off x="6937461" y="2831330"/>
+            <a:ext cx="276345" cy="276345"/>
           </a:xfrm>
           <a:prstGeom prst="ellipse">
             <a:avLst/>
@@ -17241,20 +18593,513 @@
           <a:p>
             <a:pPr algn="ctr"/>
             <a:r>
-              <a:rPr sz="1400" b="1">
+              <a:rPr lang="de-AT" sz="1400" b="1" dirty="0">
                 <a:solidFill>
                   <a:srgbClr val="FFFFFF"/>
                 </a:solidFill>
               </a:rPr>
-              <a:t>1</a:t>
-            </a:r>
+              <a:t>38</a:t>
+            </a:r>
+            <a:endParaRPr sz="1400" b="1" dirty="0">
+              <a:solidFill>
+                <a:srgbClr val="FFFFFF"/>
+              </a:solidFill>
+            </a:endParaRPr>
+          </a:p>
+        </p:txBody>
+      </p:sp>
+      <p:sp>
+        <p:nvSpPr>
+          <p:cNvPr id="9" name="Marker 7">
+            <a:extLst>
+              <a:ext uri="{FF2B5EF4-FFF2-40B4-BE49-F238E27FC236}">
+                <a16:creationId xmlns:a16="http://schemas.microsoft.com/office/drawing/2014/main" id="{2919ED9B-ED2E-B249-0631-96895A6DDC39}"/>
+              </a:ext>
+            </a:extLst>
+          </p:cNvPr>
+          <p:cNvSpPr/>
+          <p:nvPr/>
+        </p:nvSpPr>
+        <p:spPr>
+          <a:xfrm>
+            <a:off x="6441221" y="3610768"/>
+            <a:ext cx="276345" cy="276345"/>
+          </a:xfrm>
+          <a:prstGeom prst="ellipse">
+            <a:avLst/>
+          </a:prstGeom>
+          <a:solidFill>
+            <a:srgbClr val="E81C2E"/>
+          </a:solidFill>
+          <a:ln w="22225">
+            <a:solidFill>
+              <a:srgbClr val="FFFFFF"/>
+            </a:solidFill>
+          </a:ln>
+          <a:effectLst/>
+        </p:spPr>
+        <p:style>
+          <a:lnRef idx="1">
+            <a:schemeClr val="accent1"/>
+          </a:lnRef>
+          <a:fillRef idx="3">
+            <a:schemeClr val="accent1"/>
+          </a:fillRef>
+          <a:effectRef idx="2">
+            <a:schemeClr val="accent1"/>
+          </a:effectRef>
+          <a:fontRef idx="minor">
+            <a:schemeClr val="lt1"/>
+          </a:fontRef>
+        </p:style>
+        <p:txBody>
+          <a:bodyPr wrap="none" lIns="0" tIns="0" rIns="0" bIns="0" rtlCol="0" anchor="ctr"/>
+          <a:lstStyle/>
+          <a:p>
+            <a:pPr algn="ctr"/>
+            <a:r>
+              <a:rPr lang="de-AT" sz="1400" b="1" dirty="0">
+                <a:solidFill>
+                  <a:srgbClr val="FFFFFF"/>
+                </a:solidFill>
+              </a:rPr>
+              <a:t>39</a:t>
+            </a:r>
+            <a:endParaRPr sz="1400" b="1" dirty="0">
+              <a:solidFill>
+                <a:srgbClr val="FFFFFF"/>
+              </a:solidFill>
+            </a:endParaRPr>
+          </a:p>
+        </p:txBody>
+      </p:sp>
+      <p:sp>
+        <p:nvSpPr>
+          <p:cNvPr id="11" name="Marker 7">
+            <a:extLst>
+              <a:ext uri="{FF2B5EF4-FFF2-40B4-BE49-F238E27FC236}">
+                <a16:creationId xmlns:a16="http://schemas.microsoft.com/office/drawing/2014/main" id="{B647C745-C66D-9951-95A4-603E075BA0BA}"/>
+              </a:ext>
+            </a:extLst>
+          </p:cNvPr>
+          <p:cNvSpPr/>
+          <p:nvPr/>
+        </p:nvSpPr>
+        <p:spPr>
+          <a:xfrm>
+            <a:off x="6593621" y="4039513"/>
+            <a:ext cx="276345" cy="276345"/>
+          </a:xfrm>
+          <a:prstGeom prst="ellipse">
+            <a:avLst/>
+          </a:prstGeom>
+          <a:solidFill>
+            <a:srgbClr val="E81C2E"/>
+          </a:solidFill>
+          <a:ln w="22225">
+            <a:solidFill>
+              <a:srgbClr val="FFFFFF"/>
+            </a:solidFill>
+          </a:ln>
+          <a:effectLst/>
+        </p:spPr>
+        <p:style>
+          <a:lnRef idx="1">
+            <a:schemeClr val="accent1"/>
+          </a:lnRef>
+          <a:fillRef idx="3">
+            <a:schemeClr val="accent1"/>
+          </a:fillRef>
+          <a:effectRef idx="2">
+            <a:schemeClr val="accent1"/>
+          </a:effectRef>
+          <a:fontRef idx="minor">
+            <a:schemeClr val="lt1"/>
+          </a:fontRef>
+        </p:style>
+        <p:txBody>
+          <a:bodyPr wrap="none" lIns="0" tIns="0" rIns="0" bIns="0" rtlCol="0" anchor="ctr"/>
+          <a:lstStyle/>
+          <a:p>
+            <a:pPr algn="ctr"/>
+            <a:r>
+              <a:rPr lang="de-AT" sz="1400" b="1" dirty="0">
+                <a:solidFill>
+                  <a:srgbClr val="FFFFFF"/>
+                </a:solidFill>
+              </a:rPr>
+              <a:t>40</a:t>
+            </a:r>
+            <a:endParaRPr sz="1400" b="1" dirty="0">
+              <a:solidFill>
+                <a:srgbClr val="FFFFFF"/>
+              </a:solidFill>
+            </a:endParaRPr>
+          </a:p>
+        </p:txBody>
+      </p:sp>
+      <p:sp>
+        <p:nvSpPr>
+          <p:cNvPr id="13" name="Textfeld 12">
+            <a:extLst>
+              <a:ext uri="{FF2B5EF4-FFF2-40B4-BE49-F238E27FC236}">
+                <a16:creationId xmlns:a16="http://schemas.microsoft.com/office/drawing/2014/main" id="{B900FEBC-EFF3-5D20-D6DE-69314FEB60D0}"/>
+              </a:ext>
+            </a:extLst>
+          </p:cNvPr>
+          <p:cNvSpPr txBox="1"/>
+          <p:nvPr/>
+        </p:nvSpPr>
+        <p:spPr>
+          <a:xfrm>
+            <a:off x="8367831" y="2350792"/>
+            <a:ext cx="4455208" cy="2318583"/>
+          </a:xfrm>
+          <a:prstGeom prst="rect">
+            <a:avLst/>
+          </a:prstGeom>
+          <a:solidFill>
+            <a:schemeClr val="bg1"/>
+          </a:solidFill>
+          <a:ln w="28575">
+            <a:noFill/>
+            <a:extLst>
+              <a:ext uri="{C807C97D-BFC1-408E-A445-0C87EB9F89A2}">
+                <ask:lineSketchStyleProps xmlns:ask="http://schemas.microsoft.com/office/drawing/2018/sketchyshapes" sd="2188382381">
+                  <a:custGeom>
+                    <a:avLst/>
+                    <a:gdLst>
+                      <a:gd name="csX0" fmla="*/ 0 w 4455208"/>
+                      <a:gd name="csY0" fmla="*/ 0 h 2318583"/>
+                      <a:gd name="csX1" fmla="*/ 4455208 w 4455208"/>
+                      <a:gd name="csY1" fmla="*/ 0 h 2318583"/>
+                      <a:gd name="csX2" fmla="*/ 4455208 w 4455208"/>
+                      <a:gd name="csY2" fmla="*/ 2318583 h 2318583"/>
+                      <a:gd name="csX3" fmla="*/ 0 w 4455208"/>
+                      <a:gd name="csY3" fmla="*/ 2318583 h 2318583"/>
+                      <a:gd name="csX4" fmla="*/ 0 w 4455208"/>
+                      <a:gd name="csY4" fmla="*/ 0 h 2318583"/>
+                    </a:gdLst>
+                    <a:ahLst/>
+                    <a:cxnLst>
+                      <a:cxn ang="0">
+                        <a:pos x="csX0" y="csY0"/>
+                      </a:cxn>
+                      <a:cxn ang="0">
+                        <a:pos x="csX1" y="csY1"/>
+                      </a:cxn>
+                      <a:cxn ang="0">
+                        <a:pos x="csX2" y="csY2"/>
+                      </a:cxn>
+                      <a:cxn ang="0">
+                        <a:pos x="csX3" y="csY3"/>
+                      </a:cxn>
+                      <a:cxn ang="0">
+                        <a:pos x="csX4" y="csY4"/>
+                      </a:cxn>
+                    </a:cxnLst>
+                    <a:rect l="l" t="t" r="r" b="b"/>
+                    <a:pathLst>
+                      <a:path w="4455208" h="2318583" fill="none" extrusionOk="0">
+                        <a:moveTo>
+                          <a:pt x="0" y="0"/>
+                        </a:moveTo>
+                        <a:cubicBezTo>
+                          <a:pt x="1249259" y="-143182"/>
+                          <a:pt x="3504344" y="-123185"/>
+                          <a:pt x="4455208" y="0"/>
+                        </a:cubicBezTo>
+                        <a:cubicBezTo>
+                          <a:pt x="4621038" y="360816"/>
+                          <a:pt x="4358757" y="1799679"/>
+                          <a:pt x="4455208" y="2318583"/>
+                        </a:cubicBezTo>
+                        <a:cubicBezTo>
+                          <a:pt x="2482747" y="2277526"/>
+                          <a:pt x="1471973" y="2218197"/>
+                          <a:pt x="0" y="2318583"/>
+                        </a:cubicBezTo>
+                        <a:cubicBezTo>
+                          <a:pt x="-150974" y="1603487"/>
+                          <a:pt x="12648" y="881775"/>
+                          <a:pt x="0" y="0"/>
+                        </a:cubicBezTo>
+                        <a:close/>
+                      </a:path>
+                      <a:path w="4455208" h="2318583" stroke="0" extrusionOk="0">
+                        <a:moveTo>
+                          <a:pt x="0" y="0"/>
+                        </a:moveTo>
+                        <a:cubicBezTo>
+                          <a:pt x="635919" y="-118874"/>
+                          <a:pt x="2238219" y="84730"/>
+                          <a:pt x="4455208" y="0"/>
+                        </a:cubicBezTo>
+                        <a:cubicBezTo>
+                          <a:pt x="4522974" y="578724"/>
+                          <a:pt x="4568344" y="1559887"/>
+                          <a:pt x="4455208" y="2318583"/>
+                        </a:cubicBezTo>
+                        <a:cubicBezTo>
+                          <a:pt x="2705387" y="2152845"/>
+                          <a:pt x="551885" y="2453015"/>
+                          <a:pt x="0" y="2318583"/>
+                        </a:cubicBezTo>
+                        <a:cubicBezTo>
+                          <a:pt x="-18077" y="1789189"/>
+                          <a:pt x="-50488" y="1055303"/>
+                          <a:pt x="0" y="0"/>
+                        </a:cubicBezTo>
+                        <a:close/>
+                      </a:path>
+                    </a:pathLst>
+                  </a:custGeom>
+                  <ask:type>
+                    <ask:lineSketchNone/>
+                  </ask:type>
+                </ask:lineSketchStyleProps>
+              </a:ext>
+            </a:extLst>
+          </a:ln>
+        </p:spPr>
+        <p:txBody>
+          <a:bodyPr wrap="square">
+            <a:spAutoFit/>
+          </a:bodyPr>
+          <a:lstStyle/>
+          <a:p>
+            <a:pPr marL="285750" indent="-285750">
+              <a:spcAft>
+                <a:spcPts val="400"/>
+              </a:spcAft>
+              <a:buFont typeface="Arial" panose="020B0604020202020204" pitchFamily="34" charset="0"/>
+              <a:buChar char="•"/>
+            </a:pPr>
+            <a:r>
+              <a:rPr lang="de-DE" sz="1600" dirty="0">
+                <a:solidFill>
+                  <a:srgbClr val="1A1A1A"/>
+                </a:solidFill>
+              </a:rPr>
+              <a:t>Verfügbare Plättchen #38</a:t>
+            </a:r>
+          </a:p>
+          <a:p>
+            <a:pPr marL="285750" indent="-285750">
+              <a:spcAft>
+                <a:spcPts val="400"/>
+              </a:spcAft>
+              <a:buFont typeface="Arial" panose="020B0604020202020204" pitchFamily="34" charset="0"/>
+              <a:buChar char="•"/>
+            </a:pPr>
+            <a:r>
+              <a:rPr lang="de-DE" sz="1600" dirty="0">
+                <a:solidFill>
+                  <a:srgbClr val="1A1A1A"/>
+                </a:solidFill>
+              </a:rPr>
+              <a:t>Welche Plättchen sind gerade in Verwendung #39 </a:t>
+            </a:r>
+          </a:p>
+          <a:p>
+            <a:pPr marL="285750" indent="-285750">
+              <a:spcAft>
+                <a:spcPts val="400"/>
+              </a:spcAft>
+              <a:buFont typeface="Arial" panose="020B0604020202020204" pitchFamily="34" charset="0"/>
+              <a:buChar char="•"/>
+            </a:pPr>
+            <a:r>
+              <a:rPr lang="de-DE" sz="1600" dirty="0">
+                <a:solidFill>
+                  <a:srgbClr val="1A1A1A"/>
+                </a:solidFill>
+              </a:rPr>
+              <a:t>Akzeptieren/Abbrechen dieser Auswahl #40 </a:t>
+            </a:r>
+          </a:p>
+          <a:p>
+            <a:pPr marL="285750" indent="-285750">
+              <a:spcAft>
+                <a:spcPts val="400"/>
+              </a:spcAft>
+              <a:buFont typeface="Arial" panose="020B0604020202020204" pitchFamily="34" charset="0"/>
+              <a:buChar char="•"/>
+            </a:pPr>
+            <a:r>
+              <a:rPr lang="de-DE" sz="1600" dirty="0">
+                <a:solidFill>
+                  <a:srgbClr val="1A1A1A"/>
+                </a:solidFill>
+              </a:rPr>
+              <a:t>Es können mehre Fliesen über die Bonuschips aktiviert werden #41</a:t>
+            </a:r>
+          </a:p>
+          <a:p>
+            <a:pPr marL="285750" indent="-285750">
+              <a:spcAft>
+                <a:spcPts val="400"/>
+              </a:spcAft>
+              <a:buFont typeface="Arial" panose="020B0604020202020204" pitchFamily="34" charset="0"/>
+              <a:buChar char="•"/>
+            </a:pPr>
+            <a:r>
+              <a:rPr lang="de-DE" sz="1600" dirty="0">
+                <a:solidFill>
+                  <a:srgbClr val="1A1A1A"/>
+                </a:solidFill>
+              </a:rPr>
+              <a:t>Bestätigen oder Abbruch #42</a:t>
+            </a:r>
+          </a:p>
+          <a:p>
+            <a:pPr>
+              <a:spcAft>
+                <a:spcPts val="400"/>
+              </a:spcAft>
+            </a:pPr>
+            <a:endParaRPr lang="de-DE" sz="1600" dirty="0">
+              <a:solidFill>
+                <a:srgbClr val="1A1A1A"/>
+              </a:solidFill>
+            </a:endParaRPr>
+          </a:p>
+        </p:txBody>
+      </p:sp>
+      <p:sp>
+        <p:nvSpPr>
+          <p:cNvPr id="15" name="Marker 7">
+            <a:extLst>
+              <a:ext uri="{FF2B5EF4-FFF2-40B4-BE49-F238E27FC236}">
+                <a16:creationId xmlns:a16="http://schemas.microsoft.com/office/drawing/2014/main" id="{5D76DD9A-4496-B071-25B8-ED496C6A046B}"/>
+              </a:ext>
+            </a:extLst>
+          </p:cNvPr>
+          <p:cNvSpPr/>
+          <p:nvPr/>
+        </p:nvSpPr>
+        <p:spPr>
+          <a:xfrm>
+            <a:off x="5964971" y="4639252"/>
+            <a:ext cx="276345" cy="276345"/>
+          </a:xfrm>
+          <a:prstGeom prst="ellipse">
+            <a:avLst/>
+          </a:prstGeom>
+          <a:solidFill>
+            <a:srgbClr val="E81C2E"/>
+          </a:solidFill>
+          <a:ln w="22225">
+            <a:solidFill>
+              <a:srgbClr val="FFFFFF"/>
+            </a:solidFill>
+          </a:ln>
+          <a:effectLst/>
+        </p:spPr>
+        <p:style>
+          <a:lnRef idx="1">
+            <a:schemeClr val="accent1"/>
+          </a:lnRef>
+          <a:fillRef idx="3">
+            <a:schemeClr val="accent1"/>
+          </a:fillRef>
+          <a:effectRef idx="2">
+            <a:schemeClr val="accent1"/>
+          </a:effectRef>
+          <a:fontRef idx="minor">
+            <a:schemeClr val="lt1"/>
+          </a:fontRef>
+        </p:style>
+        <p:txBody>
+          <a:bodyPr wrap="none" lIns="0" tIns="0" rIns="0" bIns="0" rtlCol="0" anchor="ctr"/>
+          <a:lstStyle/>
+          <a:p>
+            <a:pPr algn="ctr"/>
+            <a:r>
+              <a:rPr lang="de-AT" sz="1400" b="1" dirty="0">
+                <a:solidFill>
+                  <a:srgbClr val="FFFFFF"/>
+                </a:solidFill>
+              </a:rPr>
+              <a:t>41</a:t>
+            </a:r>
+            <a:endParaRPr sz="1400" b="1" dirty="0">
+              <a:solidFill>
+                <a:srgbClr val="FFFFFF"/>
+              </a:solidFill>
+            </a:endParaRPr>
+          </a:p>
+        </p:txBody>
+      </p:sp>
+      <p:sp>
+        <p:nvSpPr>
+          <p:cNvPr id="17" name="Marker 7">
+            <a:extLst>
+              <a:ext uri="{FF2B5EF4-FFF2-40B4-BE49-F238E27FC236}">
+                <a16:creationId xmlns:a16="http://schemas.microsoft.com/office/drawing/2014/main" id="{5985DD78-573D-1439-730C-29B6FEF78538}"/>
+              </a:ext>
+            </a:extLst>
+          </p:cNvPr>
+          <p:cNvSpPr/>
+          <p:nvPr/>
+        </p:nvSpPr>
+        <p:spPr>
+          <a:xfrm>
+            <a:off x="6215182" y="5332472"/>
+            <a:ext cx="276345" cy="276345"/>
+          </a:xfrm>
+          <a:prstGeom prst="ellipse">
+            <a:avLst/>
+          </a:prstGeom>
+          <a:solidFill>
+            <a:srgbClr val="E81C2E"/>
+          </a:solidFill>
+          <a:ln w="22225">
+            <a:solidFill>
+              <a:srgbClr val="FFFFFF"/>
+            </a:solidFill>
+          </a:ln>
+          <a:effectLst/>
+        </p:spPr>
+        <p:style>
+          <a:lnRef idx="1">
+            <a:schemeClr val="accent1"/>
+          </a:lnRef>
+          <a:fillRef idx="3">
+            <a:schemeClr val="accent1"/>
+          </a:fillRef>
+          <a:effectRef idx="2">
+            <a:schemeClr val="accent1"/>
+          </a:effectRef>
+          <a:fontRef idx="minor">
+            <a:schemeClr val="lt1"/>
+          </a:fontRef>
+        </p:style>
+        <p:txBody>
+          <a:bodyPr wrap="none" lIns="0" tIns="0" rIns="0" bIns="0" rtlCol="0" anchor="ctr"/>
+          <a:lstStyle/>
+          <a:p>
+            <a:pPr algn="ctr"/>
+            <a:r>
+              <a:rPr lang="de-AT" sz="1400" b="1" dirty="0">
+                <a:solidFill>
+                  <a:srgbClr val="FFFFFF"/>
+                </a:solidFill>
+              </a:rPr>
+              <a:t>42</a:t>
+            </a:r>
+            <a:endParaRPr sz="1400" b="1" dirty="0">
+              <a:solidFill>
+                <a:srgbClr val="FFFFFF"/>
+              </a:solidFill>
+            </a:endParaRPr>
           </a:p>
         </p:txBody>
       </p:sp>
     </p:spTree>
     <p:extLst>
       <p:ext uri="{BB962C8B-B14F-4D97-AF65-F5344CB8AC3E}">
-        <p14:creationId xmlns:p14="http://schemas.microsoft.com/office/powerpoint/2010/main" val="2399453089"/>
+        <p14:creationId xmlns:p14="http://schemas.microsoft.com/office/powerpoint/2010/main" val="179565023"/>
       </p:ext>
     </p:extLst>
   </p:cSld>
@@ -17264,7 +19109,7 @@
 </p:sld>
 </file>
 
-<file path=ppt/slides/slide12.xml><?xml version="1.0" encoding="utf-8"?>
+<file path=ppt/slides/slide13.xml><?xml version="1.0" encoding="utf-8"?>
 <p:sld xmlns:a="http://schemas.openxmlformats.org/drawingml/2006/main" xmlns:r="http://schemas.openxmlformats.org/officeDocument/2006/relationships" xmlns:p="http://schemas.openxmlformats.org/presentationml/2006/main">
   <p:cSld>
     <p:spTree>
@@ -20636,6 +22481,657 @@
                 </a:solidFill>
               </a:rPr>
               <a:t> auf.</a:t>
+            </a:r>
+          </a:p>
+        </p:txBody>
+      </p:sp>
+    </p:spTree>
+  </p:cSld>
+  <p:clrMapOvr>
+    <a:masterClrMapping/>
+  </p:clrMapOvr>
+</p:sld>
+</file>
+
+<file path=ppt/slides/slide14.xml><?xml version="1.0" encoding="utf-8"?>
+<p:sld xmlns:a="http://schemas.openxmlformats.org/drawingml/2006/main" xmlns:r="http://schemas.openxmlformats.org/officeDocument/2006/relationships" xmlns:p="http://schemas.openxmlformats.org/presentationml/2006/main">
+  <p:cSld>
+    <p:spTree>
+      <p:nvGrpSpPr>
+        <p:cNvPr id="1" name=""/>
+        <p:cNvGrpSpPr/>
+        <p:nvPr/>
+      </p:nvGrpSpPr>
+      <p:grpSpPr>
+        <a:xfrm>
+          <a:off x="0" y="0"/>
+          <a:ext cx="0" cy="0"/>
+          <a:chOff x="0" y="0"/>
+          <a:chExt cx="0" cy="0"/>
+        </a:xfrm>
+      </p:grpSpPr>
+      <p:pic>
+        <p:nvPicPr>
+          <p:cNvPr id="2" name="Picture 1" descr="02_tiling_bonuschips.png"/>
+          <p:cNvPicPr>
+            <a:picLocks noChangeAspect="1"/>
+          </p:cNvPicPr>
+          <p:nvPr/>
+        </p:nvPicPr>
+        <p:blipFill>
+          <a:blip r:embed="rId2"/>
+          <a:stretch>
+            <a:fillRect/>
+          </a:stretch>
+        </p:blipFill>
+        <p:spPr>
+          <a:xfrm>
+            <a:off x="483395" y="0"/>
+            <a:ext cx="12191695" cy="7721406"/>
+          </a:xfrm>
+          <a:prstGeom prst="rect">
+            <a:avLst/>
+          </a:prstGeom>
+        </p:spPr>
+      </p:pic>
+      <p:sp>
+        <p:nvSpPr>
+          <p:cNvPr id="3" name="Marker 1"/>
+          <p:cNvSpPr/>
+          <p:nvPr/>
+        </p:nvSpPr>
+        <p:spPr>
+          <a:xfrm>
+            <a:off x="6701160" y="1609305"/>
+            <a:ext cx="243833" cy="243833"/>
+          </a:xfrm>
+          <a:prstGeom prst="ellipse">
+            <a:avLst/>
+          </a:prstGeom>
+          <a:solidFill>
+            <a:srgbClr val="E81C2E"/>
+          </a:solidFill>
+          <a:ln w="22225">
+            <a:solidFill>
+              <a:srgbClr val="FFFFFF"/>
+            </a:solidFill>
+          </a:ln>
+          <a:effectLst/>
+        </p:spPr>
+        <p:style>
+          <a:lnRef idx="1">
+            <a:schemeClr val="accent1"/>
+          </a:lnRef>
+          <a:fillRef idx="3">
+            <a:schemeClr val="accent1"/>
+          </a:fillRef>
+          <a:effectRef idx="2">
+            <a:schemeClr val="accent1"/>
+          </a:effectRef>
+          <a:fontRef idx="minor">
+            <a:schemeClr val="lt1"/>
+          </a:fontRef>
+        </p:style>
+        <p:txBody>
+          <a:bodyPr wrap="none" lIns="0" tIns="0" rIns="0" bIns="0" rtlCol="0" anchor="ctr"/>
+          <a:lstStyle/>
+          <a:p>
+            <a:pPr algn="ctr"/>
+            <a:r>
+              <a:rPr sz="1400" b="1">
+                <a:solidFill>
+                  <a:srgbClr val="FFFFFF"/>
+                </a:solidFill>
+              </a:rPr>
+              <a:t>1</a:t>
+            </a:r>
+          </a:p>
+        </p:txBody>
+      </p:sp>
+      <p:sp>
+        <p:nvSpPr>
+          <p:cNvPr id="4" name="Marker 2"/>
+          <p:cNvSpPr/>
+          <p:nvPr/>
+        </p:nvSpPr>
+        <p:spPr>
+          <a:xfrm>
+            <a:off x="4441632" y="1397982"/>
+            <a:ext cx="243833" cy="243833"/>
+          </a:xfrm>
+          <a:prstGeom prst="ellipse">
+            <a:avLst/>
+          </a:prstGeom>
+          <a:solidFill>
+            <a:srgbClr val="E81C2E"/>
+          </a:solidFill>
+          <a:ln w="22225">
+            <a:solidFill>
+              <a:srgbClr val="FFFFFF"/>
+            </a:solidFill>
+          </a:ln>
+          <a:effectLst/>
+        </p:spPr>
+        <p:style>
+          <a:lnRef idx="1">
+            <a:schemeClr val="accent1"/>
+          </a:lnRef>
+          <a:fillRef idx="3">
+            <a:schemeClr val="accent1"/>
+          </a:fillRef>
+          <a:effectRef idx="2">
+            <a:schemeClr val="accent1"/>
+          </a:effectRef>
+          <a:fontRef idx="minor">
+            <a:schemeClr val="lt1"/>
+          </a:fontRef>
+        </p:style>
+        <p:txBody>
+          <a:bodyPr wrap="none" lIns="0" tIns="0" rIns="0" bIns="0" rtlCol="0" anchor="ctr"/>
+          <a:lstStyle/>
+          <a:p>
+            <a:pPr algn="ctr"/>
+            <a:r>
+              <a:rPr sz="1400" b="1">
+                <a:solidFill>
+                  <a:srgbClr val="FFFFFF"/>
+                </a:solidFill>
+              </a:rPr>
+              <a:t>2</a:t>
+            </a:r>
+          </a:p>
+        </p:txBody>
+      </p:sp>
+      <p:sp>
+        <p:nvSpPr>
+          <p:cNvPr id="5" name="Marker 3"/>
+          <p:cNvSpPr/>
+          <p:nvPr/>
+        </p:nvSpPr>
+        <p:spPr>
+          <a:xfrm>
+            <a:off x="4441632" y="1796245"/>
+            <a:ext cx="243833" cy="243833"/>
+          </a:xfrm>
+          <a:prstGeom prst="ellipse">
+            <a:avLst/>
+          </a:prstGeom>
+          <a:solidFill>
+            <a:srgbClr val="E81C2E"/>
+          </a:solidFill>
+          <a:ln w="22225">
+            <a:solidFill>
+              <a:srgbClr val="FFFFFF"/>
+            </a:solidFill>
+          </a:ln>
+          <a:effectLst/>
+        </p:spPr>
+        <p:style>
+          <a:lnRef idx="1">
+            <a:schemeClr val="accent1"/>
+          </a:lnRef>
+          <a:fillRef idx="3">
+            <a:schemeClr val="accent1"/>
+          </a:fillRef>
+          <a:effectRef idx="2">
+            <a:schemeClr val="accent1"/>
+          </a:effectRef>
+          <a:fontRef idx="minor">
+            <a:schemeClr val="lt1"/>
+          </a:fontRef>
+        </p:style>
+        <p:txBody>
+          <a:bodyPr wrap="none" lIns="0" tIns="0" rIns="0" bIns="0" rtlCol="0" anchor="ctr"/>
+          <a:lstStyle/>
+          <a:p>
+            <a:pPr algn="ctr"/>
+            <a:r>
+              <a:rPr sz="1400" b="1">
+                <a:solidFill>
+                  <a:srgbClr val="FFFFFF"/>
+                </a:solidFill>
+              </a:rPr>
+              <a:t>3</a:t>
+            </a:r>
+          </a:p>
+        </p:txBody>
+      </p:sp>
+      <p:sp>
+        <p:nvSpPr>
+          <p:cNvPr id="6" name="Marker 4"/>
+          <p:cNvSpPr/>
+          <p:nvPr/>
+        </p:nvSpPr>
+        <p:spPr>
+          <a:xfrm>
+            <a:off x="5929019" y="1601177"/>
+            <a:ext cx="243833" cy="243833"/>
+          </a:xfrm>
+          <a:prstGeom prst="ellipse">
+            <a:avLst/>
+          </a:prstGeom>
+          <a:solidFill>
+            <a:srgbClr val="E81C2E"/>
+          </a:solidFill>
+          <a:ln w="22225">
+            <a:solidFill>
+              <a:srgbClr val="FFFFFF"/>
+            </a:solidFill>
+          </a:ln>
+          <a:effectLst/>
+        </p:spPr>
+        <p:style>
+          <a:lnRef idx="1">
+            <a:schemeClr val="accent1"/>
+          </a:lnRef>
+          <a:fillRef idx="3">
+            <a:schemeClr val="accent1"/>
+          </a:fillRef>
+          <a:effectRef idx="2">
+            <a:schemeClr val="accent1"/>
+          </a:effectRef>
+          <a:fontRef idx="minor">
+            <a:schemeClr val="lt1"/>
+          </a:fontRef>
+        </p:style>
+        <p:txBody>
+          <a:bodyPr wrap="none" lIns="0" tIns="0" rIns="0" bIns="0" rtlCol="0" anchor="ctr"/>
+          <a:lstStyle/>
+          <a:p>
+            <a:pPr algn="ctr"/>
+            <a:r>
+              <a:rPr sz="1400" b="1">
+                <a:solidFill>
+                  <a:srgbClr val="FFFFFF"/>
+                </a:solidFill>
+              </a:rPr>
+              <a:t>4</a:t>
+            </a:r>
+          </a:p>
+        </p:txBody>
+      </p:sp>
+      <p:sp>
+        <p:nvSpPr>
+          <p:cNvPr id="7" name="Marker 6"/>
+          <p:cNvSpPr/>
+          <p:nvPr/>
+        </p:nvSpPr>
+        <p:spPr>
+          <a:xfrm>
+            <a:off x="12309340" y="430775"/>
+            <a:ext cx="243833" cy="243833"/>
+          </a:xfrm>
+          <a:prstGeom prst="ellipse">
+            <a:avLst/>
+          </a:prstGeom>
+          <a:solidFill>
+            <a:srgbClr val="E81C2E"/>
+          </a:solidFill>
+          <a:ln w="22225">
+            <a:solidFill>
+              <a:srgbClr val="FFFFFF"/>
+            </a:solidFill>
+          </a:ln>
+          <a:effectLst/>
+        </p:spPr>
+        <p:style>
+          <a:lnRef idx="1">
+            <a:schemeClr val="accent1"/>
+          </a:lnRef>
+          <a:fillRef idx="3">
+            <a:schemeClr val="accent1"/>
+          </a:fillRef>
+          <a:effectRef idx="2">
+            <a:schemeClr val="accent1"/>
+          </a:effectRef>
+          <a:fontRef idx="minor">
+            <a:schemeClr val="lt1"/>
+          </a:fontRef>
+        </p:style>
+        <p:txBody>
+          <a:bodyPr wrap="none" lIns="0" tIns="0" rIns="0" bIns="0" rtlCol="0" anchor="ctr"/>
+          <a:lstStyle/>
+          <a:p>
+            <a:pPr algn="ctr"/>
+            <a:r>
+              <a:rPr sz="1400" b="1">
+                <a:solidFill>
+                  <a:srgbClr val="FFFFFF"/>
+                </a:solidFill>
+              </a:rPr>
+              <a:t>6</a:t>
+            </a:r>
+          </a:p>
+        </p:txBody>
+      </p:sp>
+      <p:sp>
+        <p:nvSpPr>
+          <p:cNvPr id="8" name="Marker 7"/>
+          <p:cNvSpPr/>
+          <p:nvPr/>
+        </p:nvSpPr>
+        <p:spPr>
+          <a:xfrm>
+            <a:off x="12309340" y="1341088"/>
+            <a:ext cx="243833" cy="243833"/>
+          </a:xfrm>
+          <a:prstGeom prst="ellipse">
+            <a:avLst/>
+          </a:prstGeom>
+          <a:solidFill>
+            <a:srgbClr val="E81C2E"/>
+          </a:solidFill>
+          <a:ln w="22225">
+            <a:solidFill>
+              <a:srgbClr val="FFFFFF"/>
+            </a:solidFill>
+          </a:ln>
+          <a:effectLst/>
+        </p:spPr>
+        <p:style>
+          <a:lnRef idx="1">
+            <a:schemeClr val="accent1"/>
+          </a:lnRef>
+          <a:fillRef idx="3">
+            <a:schemeClr val="accent1"/>
+          </a:fillRef>
+          <a:effectRef idx="2">
+            <a:schemeClr val="accent1"/>
+          </a:effectRef>
+          <a:fontRef idx="minor">
+            <a:schemeClr val="lt1"/>
+          </a:fontRef>
+        </p:style>
+        <p:txBody>
+          <a:bodyPr wrap="none" lIns="0" tIns="0" rIns="0" bIns="0" rtlCol="0" anchor="ctr"/>
+          <a:lstStyle/>
+          <a:p>
+            <a:pPr algn="ctr"/>
+            <a:r>
+              <a:rPr sz="1400" b="1">
+                <a:solidFill>
+                  <a:srgbClr val="FFFFFF"/>
+                </a:solidFill>
+              </a:rPr>
+              <a:t>7</a:t>
+            </a:r>
+          </a:p>
+        </p:txBody>
+      </p:sp>
+      <p:sp>
+        <p:nvSpPr>
+          <p:cNvPr id="9" name="TextBox 8"/>
+          <p:cNvSpPr txBox="1"/>
+          <p:nvPr/>
+        </p:nvSpPr>
+        <p:spPr>
+          <a:xfrm>
+            <a:off x="757714" y="5741126"/>
+            <a:ext cx="8229600" cy="400110"/>
+          </a:xfrm>
+          <a:prstGeom prst="rect">
+            <a:avLst/>
+          </a:prstGeom>
+          <a:noFill/>
+        </p:spPr>
+        <p:txBody>
+          <a:bodyPr wrap="square">
+            <a:spAutoFit/>
+          </a:bodyPr>
+          <a:lstStyle/>
+          <a:p>
+            <a:r>
+              <a:rPr sz="2000" b="1" dirty="0">
+                <a:solidFill>
+                  <a:srgbClr val="1A1A1A"/>
+                </a:solidFill>
+              </a:rPr>
+              <a:t>2) Tiling-Phase -- </a:t>
+            </a:r>
+            <a:r>
+              <a:rPr sz="2000" b="1" dirty="0" err="1">
+                <a:solidFill>
+                  <a:srgbClr val="1A1A1A"/>
+                </a:solidFill>
+              </a:rPr>
+              <a:t>Bonuschips</a:t>
+            </a:r>
+            <a:r>
+              <a:rPr sz="2000" b="1" dirty="0">
+                <a:solidFill>
+                  <a:srgbClr val="1A1A1A"/>
+                </a:solidFill>
+              </a:rPr>
+              <a:t> </a:t>
+            </a:r>
+            <a:r>
+              <a:rPr sz="2000" b="1" dirty="0" err="1">
+                <a:solidFill>
+                  <a:srgbClr val="1A1A1A"/>
+                </a:solidFill>
+              </a:rPr>
+              <a:t>einsetzen</a:t>
+            </a:r>
+            <a:r>
+              <a:rPr sz="2000" b="1" dirty="0">
+                <a:solidFill>
+                  <a:srgbClr val="1A1A1A"/>
+                </a:solidFill>
+              </a:rPr>
+              <a:t> </a:t>
+            </a:r>
+            <a:r>
+              <a:rPr sz="2000" b="1" dirty="0" err="1">
+                <a:solidFill>
+                  <a:srgbClr val="1A1A1A"/>
+                </a:solidFill>
+              </a:rPr>
+              <a:t>oder</a:t>
+            </a:r>
+            <a:r>
+              <a:rPr sz="2000" b="1" dirty="0">
+                <a:solidFill>
+                  <a:srgbClr val="1A1A1A"/>
+                </a:solidFill>
+              </a:rPr>
+              <a:t> Reihe </a:t>
+            </a:r>
+            <a:r>
+              <a:rPr sz="2000" b="1" dirty="0" err="1">
+                <a:solidFill>
+                  <a:srgbClr val="1A1A1A"/>
+                </a:solidFill>
+              </a:rPr>
+              <a:t>ueberspringen</a:t>
+            </a:r>
+            <a:endParaRPr sz="2000" b="1" dirty="0">
+              <a:solidFill>
+                <a:srgbClr val="1A1A1A"/>
+              </a:solidFill>
+            </a:endParaRPr>
+          </a:p>
+        </p:txBody>
+      </p:sp>
+      <p:sp>
+        <p:nvSpPr>
+          <p:cNvPr id="11" name="TextBox 10"/>
+          <p:cNvSpPr txBox="1"/>
+          <p:nvPr/>
+        </p:nvSpPr>
+        <p:spPr>
+          <a:xfrm>
+            <a:off x="757715" y="7831134"/>
+            <a:ext cx="5638647" cy="1210588"/>
+          </a:xfrm>
+          <a:prstGeom prst="rect">
+            <a:avLst/>
+          </a:prstGeom>
+          <a:noFill/>
+        </p:spPr>
+        <p:txBody>
+          <a:bodyPr wrap="square">
+            <a:spAutoFit/>
+          </a:bodyPr>
+          <a:lstStyle/>
+          <a:p>
+            <a:pPr>
+              <a:spcAft>
+                <a:spcPts val="400"/>
+              </a:spcAft>
+            </a:pPr>
+            <a:r>
+              <a:rPr sz="1100" b="1">
+                <a:solidFill>
+                  <a:srgbClr val="7A0D17"/>
+                </a:solidFill>
+              </a:rPr>
+              <a:t>1  </a:t>
+            </a:r>
+            <a:r>
+              <a:rPr sz="1100">
+                <a:solidFill>
+                  <a:srgbClr val="1A1A1A"/>
+                </a:solidFill>
+              </a:rPr>
+              <a:t>Blauer Punkt -- markiert die als naechstes faellige Reihe (oben-nach-unten-Regel).</a:t>
+            </a:r>
+          </a:p>
+          <a:p>
+            <a:pPr>
+              <a:spcAft>
+                <a:spcPts val="400"/>
+              </a:spcAft>
+            </a:pPr>
+            <a:r>
+              <a:rPr sz="1100" b="1">
+                <a:solidFill>
+                  <a:srgbClr val="7A0D17"/>
+                </a:solidFill>
+              </a:rPr>
+              <a:t>2  </a:t>
+            </a:r>
+            <a:r>
+              <a:rPr sz="1100">
+                <a:solidFill>
+                  <a:srgbClr val="1A1A1A"/>
+                </a:solidFill>
+              </a:rPr>
+              <a:t>Bonuschips-Kasten (jetzt farbig hervorgehoben) -- anklicken oeffnet den Dialog zum Einsetzen der Chips fuer die faellige Reihe: 2 gleichfarbige ODER 3 beliebige Chips = 1 fehlende Fliese.</a:t>
+            </a:r>
+          </a:p>
+          <a:p>
+            <a:pPr>
+              <a:spcAft>
+                <a:spcPts val="400"/>
+              </a:spcAft>
+            </a:pPr>
+            <a:r>
+              <a:rPr sz="1100" b="1">
+                <a:solidFill>
+                  <a:srgbClr val="7A0D17"/>
+                </a:solidFill>
+              </a:rPr>
+              <a:t>3  </a:t>
+            </a:r>
+            <a:r>
+              <a:rPr sz="1100">
+                <a:solidFill>
+                  <a:srgbClr val="1A1A1A"/>
+                </a:solidFill>
+              </a:rPr>
+              <a:t>„Reihe X fuer Bonuschips ignorieren“ -- ueberspringt diese nur per Chips komplettierbare Reihe bewusst, um z.B. erst eine spaetere zu bedienen. Ueber den „↺ zuruecksetzen“-Link wieder aufhebbar.</a:t>
+            </a:r>
+          </a:p>
+        </p:txBody>
+      </p:sp>
+      <p:sp>
+        <p:nvSpPr>
+          <p:cNvPr id="12" name="TextBox 11"/>
+          <p:cNvSpPr txBox="1"/>
+          <p:nvPr/>
+        </p:nvSpPr>
+        <p:spPr>
+          <a:xfrm>
+            <a:off x="6853562" y="7831135"/>
+            <a:ext cx="5638647" cy="1041311"/>
+          </a:xfrm>
+          <a:prstGeom prst="rect">
+            <a:avLst/>
+          </a:prstGeom>
+          <a:noFill/>
+        </p:spPr>
+        <p:txBody>
+          <a:bodyPr wrap="square">
+            <a:spAutoFit/>
+          </a:bodyPr>
+          <a:lstStyle/>
+          <a:p>
+            <a:pPr>
+              <a:spcAft>
+                <a:spcPts val="400"/>
+              </a:spcAft>
+            </a:pPr>
+            <a:r>
+              <a:rPr sz="1100" b="1">
+                <a:solidFill>
+                  <a:srgbClr val="7A0D17"/>
+                </a:solidFill>
+              </a:rPr>
+              <a:t>4  </a:t>
+            </a:r>
+            <a:r>
+              <a:rPr sz="1100">
+                <a:solidFill>
+                  <a:srgbClr val="1A1A1A"/>
+                </a:solidFill>
+              </a:rPr>
+              <a:t>Faellige Musterreihe -- gestrichelt umrandet, solange sie auf eine Aktion wartet.</a:t>
+            </a:r>
+          </a:p>
+          <a:p>
+            <a:pPr>
+              <a:spcAft>
+                <a:spcPts val="400"/>
+              </a:spcAft>
+            </a:pPr>
+            <a:r>
+              <a:rPr sz="1100" b="1">
+                <a:solidFill>
+                  <a:srgbClr val="7A0D17"/>
+                </a:solidFill>
+              </a:rPr>
+              <a:t>6  </a:t>
+            </a:r>
+            <a:r>
+              <a:rPr sz="1100">
+                <a:solidFill>
+                  <a:srgbClr val="1A1A1A"/>
+                </a:solidFill>
+              </a:rPr>
+              <a:t>Phasen-Anzeige „Phase 2: Reihe anklicken“ -- Hinweistext erklaert die Chip-Regel noch einmal.</a:t>
+            </a:r>
+          </a:p>
+          <a:p>
+            <a:pPr>
+              <a:spcAft>
+                <a:spcPts val="400"/>
+              </a:spcAft>
+            </a:pPr>
+            <a:r>
+              <a:rPr sz="1100" b="1">
+                <a:solidFill>
+                  <a:srgbClr val="7A0D17"/>
+                </a:solidFill>
+              </a:rPr>
+              <a:t>7  </a:t>
+            </a:r>
+            <a:r>
+              <a:rPr sz="1100">
+                <a:solidFill>
+                  <a:srgbClr val="1A1A1A"/>
+                </a:solidFill>
+              </a:rPr>
+              <a:t>„Mein Tiling abschliessen“ -- eigene Tiling-Phase beenden; danach ist die KI/der andere Spieler dran.</a:t>
             </a:r>
           </a:p>
         </p:txBody>
@@ -21369,7 +23865,7 @@
         <p:spPr>
           <a:xfrm>
             <a:off x="6993912" y="2414540"/>
-            <a:ext cx="5143499" cy="4791055"/>
+            <a:ext cx="5143499" cy="5037276"/>
           </a:xfrm>
           <a:prstGeom prst="rect">
             <a:avLst/>
@@ -21382,12 +23878,12 @@
           </a:bodyPr>
           <a:lstStyle/>
           <a:p>
-            <a:pPr marL="228600" indent="-228600">
+            <a:pPr marL="285750" indent="-285750">
               <a:spcAft>
                 <a:spcPts val="400"/>
               </a:spcAft>
-              <a:buFont typeface="+mj-lt"/>
-              <a:buAutoNum type="arabicPeriod"/>
+              <a:buFont typeface="Arial" panose="020B0604020202020204" pitchFamily="34" charset="0"/>
+              <a:buChar char="•"/>
             </a:pPr>
             <a:r>
               <a:rPr lang="de-DE" sz="1600" dirty="0">
@@ -21395,16 +23891,16 @@
                   <a:srgbClr val="1A1A1A"/>
                 </a:solidFill>
               </a:rPr>
-              <a:t>Eingabe von Spielername möglich</a:t>
+              <a:t>Eingabe von Spielername #1</a:t>
             </a:r>
           </a:p>
           <a:p>
-            <a:pPr marL="228600" indent="-228600">
+            <a:pPr marL="285750" indent="-285750">
               <a:spcAft>
                 <a:spcPts val="400"/>
               </a:spcAft>
-              <a:buFont typeface="+mj-lt"/>
-              <a:buAutoNum type="arabicPeriod"/>
+              <a:buFont typeface="Arial" panose="020B0604020202020204" pitchFamily="34" charset="0"/>
+              <a:buChar char="•"/>
             </a:pPr>
             <a:r>
               <a:rPr lang="de-DE" sz="1600" dirty="0">
@@ -21412,16 +23908,16 @@
                   <a:srgbClr val="1A1A1A"/>
                 </a:solidFill>
               </a:rPr>
-              <a:t>Auswahl ob gegen die KI gespielt werden möchte. Wenn nein dann ist es Spieler vs. Spieler</a:t>
+              <a:t>Auswahl ob gegen die KI gespielt werden möchte #2. Wenn nein dann ist es Spieler vs. Spieler</a:t>
             </a:r>
           </a:p>
           <a:p>
-            <a:pPr marL="228600" indent="-228600">
+            <a:pPr marL="285750" indent="-285750">
               <a:spcAft>
                 <a:spcPts val="400"/>
               </a:spcAft>
-              <a:buFont typeface="+mj-lt"/>
-              <a:buAutoNum type="arabicPeriod"/>
+              <a:buFont typeface="Arial" panose="020B0604020202020204" pitchFamily="34" charset="0"/>
+              <a:buChar char="•"/>
             </a:pPr>
             <a:r>
               <a:rPr lang="de-DE" sz="1600" dirty="0">
@@ -21429,7 +23925,7 @@
                   <a:srgbClr val="1A1A1A"/>
                 </a:solidFill>
               </a:rPr>
-              <a:t>Welches KI Modell soll verwendet werden, </a:t>
+              <a:t>Welches KI Modell soll verwendet werden #3, </a:t>
             </a:r>
             <a:r>
               <a:rPr lang="de-DE" sz="1600" dirty="0" err="1">
@@ -21481,12 +23977,12 @@
             </a:r>
           </a:p>
           <a:p>
-            <a:pPr marL="228600" indent="-228600">
+            <a:pPr marL="285750" indent="-285750">
               <a:spcAft>
                 <a:spcPts val="400"/>
               </a:spcAft>
-              <a:buFont typeface="+mj-lt"/>
-              <a:buAutoNum type="arabicPeriod"/>
+              <a:buFont typeface="Arial" panose="020B0604020202020204" pitchFamily="34" charset="0"/>
+              <a:buChar char="•"/>
             </a:pPr>
             <a:r>
               <a:rPr lang="de-DE" sz="1600" dirty="0">
@@ -21494,16 +23990,16 @@
                   <a:srgbClr val="1A1A1A"/>
                 </a:solidFill>
               </a:rPr>
-              <a:t>Mehr Simulationen = stärkere KI, aber braucht länger für die Züge</a:t>
+              <a:t>Mehr Simulationen = stärkere KI #4, aber braucht länger für die Züge</a:t>
             </a:r>
           </a:p>
           <a:p>
-            <a:pPr marL="228600" indent="-228600">
+            <a:pPr marL="285750" indent="-285750">
               <a:spcAft>
                 <a:spcPts val="400"/>
               </a:spcAft>
-              <a:buFont typeface="+mj-lt"/>
-              <a:buAutoNum type="arabicPeriod"/>
+              <a:buFont typeface="Arial" panose="020B0604020202020204" pitchFamily="34" charset="0"/>
+              <a:buChar char="•"/>
             </a:pPr>
             <a:r>
               <a:rPr lang="de-DE" sz="1600" dirty="0">
@@ -21511,16 +24007,16 @@
                   <a:srgbClr val="1A1A1A"/>
                 </a:solidFill>
               </a:rPr>
-              <a:t>Damit lässt sich anzeigen wie die KI die Züge und das Spiel an sich bewertet.</a:t>
+              <a:t>Damit lässt sich anzeigen wie die KI die Züge und das Spiel an sich bewertet #5.</a:t>
             </a:r>
           </a:p>
           <a:p>
-            <a:pPr marL="228600" indent="-228600">
+            <a:pPr marL="285750" indent="-285750">
               <a:spcAft>
                 <a:spcPts val="400"/>
               </a:spcAft>
-              <a:buFont typeface="+mj-lt"/>
-              <a:buAutoNum type="arabicPeriod"/>
+              <a:buFont typeface="Arial" panose="020B0604020202020204" pitchFamily="34" charset="0"/>
+              <a:buChar char="•"/>
             </a:pPr>
             <a:r>
               <a:rPr lang="de-DE" sz="1600" dirty="0">
@@ -21528,16 +24024,16 @@
                   <a:srgbClr val="1A1A1A"/>
                 </a:solidFill>
               </a:rPr>
-              <a:t>Auswahl ob und in welcher Form die KI Tipps geben soll</a:t>
+              <a:t>Auswahl ob und in welcher Form die KI Tipps geben soll #6</a:t>
             </a:r>
           </a:p>
           <a:p>
-            <a:pPr marL="228600" indent="-228600">
+            <a:pPr marL="285750" indent="-285750">
               <a:spcAft>
                 <a:spcPts val="400"/>
               </a:spcAft>
-              <a:buFont typeface="+mj-lt"/>
-              <a:buAutoNum type="arabicPeriod"/>
+              <a:buFont typeface="Arial" panose="020B0604020202020204" pitchFamily="34" charset="0"/>
+              <a:buChar char="•"/>
             </a:pPr>
             <a:r>
               <a:rPr lang="de-DE" sz="1600" dirty="0">
@@ -21545,16 +24041,16 @@
                   <a:srgbClr val="1A1A1A"/>
                 </a:solidFill>
               </a:rPr>
-              <a:t>Lehrer Sims würd ich das doppelte der Gegner KI Simulationen wählen</a:t>
+              <a:t>Lehrer Sims #7 würd ich das doppelte der Gegner KI Simulationen wählen</a:t>
             </a:r>
           </a:p>
           <a:p>
-            <a:pPr marL="228600" indent="-228600">
+            <a:pPr marL="285750" indent="-285750">
               <a:spcAft>
                 <a:spcPts val="400"/>
               </a:spcAft>
-              <a:buFont typeface="+mj-lt"/>
-              <a:buAutoNum type="arabicPeriod"/>
+              <a:buFont typeface="Arial" panose="020B0604020202020204" pitchFamily="34" charset="0"/>
+              <a:buChar char="•"/>
             </a:pPr>
             <a:r>
               <a:rPr lang="de-DE" sz="1600" dirty="0">
@@ -21562,16 +24058,16 @@
                   <a:srgbClr val="1A1A1A"/>
                 </a:solidFill>
               </a:rPr>
-              <a:t>Auswahl wer beginnt</a:t>
+              <a:t>Auswahl wer beginnt #8</a:t>
             </a:r>
           </a:p>
           <a:p>
-            <a:pPr marL="228600" indent="-228600">
+            <a:pPr marL="285750" indent="-285750">
               <a:spcAft>
                 <a:spcPts val="400"/>
               </a:spcAft>
-              <a:buFont typeface="+mj-lt"/>
-              <a:buAutoNum type="arabicPeriod"/>
+              <a:buFont typeface="Arial" panose="020B0604020202020204" pitchFamily="34" charset="0"/>
+              <a:buChar char="•"/>
             </a:pPr>
             <a:r>
               <a:rPr lang="de-DE" sz="1600" dirty="0">
@@ -21579,16 +24075,16 @@
                   <a:srgbClr val="1A1A1A"/>
                 </a:solidFill>
               </a:rPr>
-              <a:t>Muss normal nicht eingegeben werden, hauptsächlich zum debuggen</a:t>
+              <a:t>Reproduzierbare Stellung #9 – Muss normal nicht eingegeben werden, hauptsächlich zum debuggen</a:t>
             </a:r>
           </a:p>
           <a:p>
-            <a:pPr marL="228600" indent="-228600">
+            <a:pPr marL="285750" indent="-285750">
               <a:spcAft>
                 <a:spcPts val="400"/>
               </a:spcAft>
-              <a:buFont typeface="+mj-lt"/>
-              <a:buAutoNum type="arabicPeriod"/>
+              <a:buFont typeface="Arial" panose="020B0604020202020204" pitchFamily="34" charset="0"/>
+              <a:buChar char="•"/>
             </a:pPr>
             <a:r>
               <a:rPr lang="de-DE" sz="1600" dirty="0">
@@ -21596,7 +24092,7 @@
                   <a:srgbClr val="1A1A1A"/>
                 </a:solidFill>
               </a:rPr>
-              <a:t>Mit der Auswahl starten</a:t>
+              <a:t>Mit der Auswahl starten #10</a:t>
             </a:r>
           </a:p>
           <a:p>
@@ -21847,7 +24343,7 @@
                   <a:srgbClr val="FFFFFF"/>
                 </a:solidFill>
               </a:rPr>
-              <a:t>1</a:t>
+              <a:t>11</a:t>
             </a:r>
             <a:endParaRPr sz="1400" b="1" dirty="0">
               <a:solidFill>
@@ -21912,7 +24408,7 @@
                   <a:srgbClr val="FFFFFF"/>
                 </a:solidFill>
               </a:rPr>
-              <a:t>2</a:t>
+              <a:t>12</a:t>
             </a:r>
             <a:endParaRPr sz="1400" b="1" dirty="0">
               <a:solidFill>
@@ -21941,7 +24437,7 @@
           </a:xfrm>
           <a:prstGeom prst="roundRect">
             <a:avLst>
-              <a:gd name="adj" fmla="val 6000"/>
+              <a:gd name="adj" fmla="val 3097"/>
             </a:avLst>
           </a:prstGeom>
           <a:noFill/>
@@ -21994,7 +24490,7 @@
           </a:xfrm>
           <a:prstGeom prst="roundRect">
             <a:avLst>
-              <a:gd name="adj" fmla="val 6000"/>
+              <a:gd name="adj" fmla="val 10194"/>
             </a:avLst>
           </a:prstGeom>
           <a:noFill/>
@@ -22056,12 +24552,12 @@
           </a:bodyPr>
           <a:lstStyle/>
           <a:p>
-            <a:pPr marL="228600" indent="-228600">
+            <a:pPr marL="285750" indent="-285750">
               <a:spcAft>
                 <a:spcPts val="400"/>
               </a:spcAft>
-              <a:buFont typeface="+mj-lt"/>
-              <a:buAutoNum type="arabicPeriod"/>
+              <a:buFont typeface="Arial" panose="020B0604020202020204" pitchFamily="34" charset="0"/>
+              <a:buChar char="•"/>
             </a:pPr>
             <a:r>
               <a:rPr lang="de-DE" sz="1600" dirty="0">
@@ -22069,16 +24565,16 @@
                   <a:srgbClr val="1A1A1A"/>
                 </a:solidFill>
               </a:rPr>
-              <a:t>Auswahl von genau 3 Wertungsplatten, manche Platten schließen sich aus.</a:t>
+              <a:t>Auswahl von genau 3 Wertungsplatten #11, manche Platten schließen sich aus.</a:t>
             </a:r>
           </a:p>
           <a:p>
-            <a:pPr marL="228600" indent="-228600">
+            <a:pPr marL="285750" indent="-285750">
               <a:spcAft>
                 <a:spcPts val="400"/>
               </a:spcAft>
-              <a:buFont typeface="+mj-lt"/>
-              <a:buAutoNum type="arabicPeriod"/>
+              <a:buFont typeface="Arial" panose="020B0604020202020204" pitchFamily="34" charset="0"/>
+              <a:buChar char="•"/>
             </a:pPr>
             <a:r>
               <a:rPr lang="de-DE" sz="1600" dirty="0">
@@ -22086,7 +24582,7 @@
                   <a:srgbClr val="1A1A1A"/>
                 </a:solidFill>
               </a:rPr>
-              <a:t>Bestätigung</a:t>
+              <a:t>Bestätigung #12</a:t>
             </a:r>
           </a:p>
         </p:txBody>
@@ -22123,10 +24619,10 @@
       </p:grpSpPr>
       <p:pic>
         <p:nvPicPr>
-          <p:cNvPr id="3" name="Grafik 2">
+          <p:cNvPr id="4" name="Grafik 3">
             <a:extLst>
               <a:ext uri="{FF2B5EF4-FFF2-40B4-BE49-F238E27FC236}">
-                <a16:creationId xmlns:a16="http://schemas.microsoft.com/office/drawing/2014/main" id="{8265A1A3-73C7-F1CB-B560-DB153859E258}"/>
+                <a16:creationId xmlns:a16="http://schemas.microsoft.com/office/drawing/2014/main" id="{26F44A74-A60F-D298-A8BA-F3ADA4D2091F}"/>
               </a:ext>
             </a:extLst>
           </p:cNvPr>
@@ -22143,8 +24639,8 @@
         </p:blipFill>
         <p:spPr>
           <a:xfrm>
-            <a:off x="770707" y="2810778"/>
-            <a:ext cx="12009257" cy="4697586"/>
+            <a:off x="1739749" y="3154359"/>
+            <a:ext cx="10303101" cy="4964707"/>
           </a:xfrm>
           <a:prstGeom prst="rect">
             <a:avLst/>
@@ -22197,71 +24693,6 @@
       </p:sp>
       <p:sp>
         <p:nvSpPr>
-          <p:cNvPr id="7" name="Marker 7">
-            <a:extLst>
-              <a:ext uri="{FF2B5EF4-FFF2-40B4-BE49-F238E27FC236}">
-                <a16:creationId xmlns:a16="http://schemas.microsoft.com/office/drawing/2014/main" id="{8D1E6D27-6EB7-CAE1-4D33-1DE28E42C4B6}"/>
-              </a:ext>
-            </a:extLst>
-          </p:cNvPr>
-          <p:cNvSpPr/>
-          <p:nvPr/>
-        </p:nvSpPr>
-        <p:spPr>
-          <a:xfrm>
-            <a:off x="10831209" y="3612354"/>
-            <a:ext cx="276345" cy="276345"/>
-          </a:xfrm>
-          <a:prstGeom prst="ellipse">
-            <a:avLst/>
-          </a:prstGeom>
-          <a:solidFill>
-            <a:srgbClr val="E81C2E"/>
-          </a:solidFill>
-          <a:ln w="22225">
-            <a:solidFill>
-              <a:srgbClr val="FFFFFF"/>
-            </a:solidFill>
-          </a:ln>
-          <a:effectLst/>
-        </p:spPr>
-        <p:style>
-          <a:lnRef idx="1">
-            <a:schemeClr val="accent1"/>
-          </a:lnRef>
-          <a:fillRef idx="3">
-            <a:schemeClr val="accent1"/>
-          </a:fillRef>
-          <a:effectRef idx="2">
-            <a:schemeClr val="accent1"/>
-          </a:effectRef>
-          <a:fontRef idx="minor">
-            <a:schemeClr val="lt1"/>
-          </a:fontRef>
-        </p:style>
-        <p:txBody>
-          <a:bodyPr wrap="none" lIns="0" tIns="0" rIns="0" bIns="0" rtlCol="0" anchor="ctr"/>
-          <a:lstStyle/>
-          <a:p>
-            <a:pPr algn="ctr"/>
-            <a:r>
-              <a:rPr lang="de-AT" sz="1400" b="1" dirty="0">
-                <a:solidFill>
-                  <a:srgbClr val="FFFFFF"/>
-                </a:solidFill>
-              </a:rPr>
-              <a:t>1</a:t>
-            </a:r>
-            <a:endParaRPr sz="1400" b="1" dirty="0">
-              <a:solidFill>
-                <a:srgbClr val="FFFFFF"/>
-              </a:solidFill>
-            </a:endParaRPr>
-          </a:p>
-        </p:txBody>
-      </p:sp>
-      <p:sp>
-        <p:nvSpPr>
           <p:cNvPr id="9" name="Bereich 5">
             <a:extLst>
               <a:ext uri="{FF2B5EF4-FFF2-40B4-BE49-F238E27FC236}">
@@ -22274,7 +24705,7 @@
         </p:nvSpPr>
         <p:spPr>
           <a:xfrm>
-            <a:off x="11028279" y="3382252"/>
+            <a:off x="10191152" y="3833012"/>
             <a:ext cx="1851698" cy="771738"/>
           </a:xfrm>
           <a:prstGeom prst="roundRect">
@@ -22315,6 +24746,71 @@
       </p:sp>
       <p:sp>
         <p:nvSpPr>
+          <p:cNvPr id="7" name="Marker 7">
+            <a:extLst>
+              <a:ext uri="{FF2B5EF4-FFF2-40B4-BE49-F238E27FC236}">
+                <a16:creationId xmlns:a16="http://schemas.microsoft.com/office/drawing/2014/main" id="{8D1E6D27-6EB7-CAE1-4D33-1DE28E42C4B6}"/>
+              </a:ext>
+            </a:extLst>
+          </p:cNvPr>
+          <p:cNvSpPr/>
+          <p:nvPr/>
+        </p:nvSpPr>
+        <p:spPr>
+          <a:xfrm>
+            <a:off x="9994082" y="4063114"/>
+            <a:ext cx="276345" cy="276345"/>
+          </a:xfrm>
+          <a:prstGeom prst="ellipse">
+            <a:avLst/>
+          </a:prstGeom>
+          <a:solidFill>
+            <a:srgbClr val="E81C2E"/>
+          </a:solidFill>
+          <a:ln w="22225">
+            <a:solidFill>
+              <a:srgbClr val="FFFFFF"/>
+            </a:solidFill>
+          </a:ln>
+          <a:effectLst/>
+        </p:spPr>
+        <p:style>
+          <a:lnRef idx="1">
+            <a:schemeClr val="accent1"/>
+          </a:lnRef>
+          <a:fillRef idx="3">
+            <a:schemeClr val="accent1"/>
+          </a:fillRef>
+          <a:effectRef idx="2">
+            <a:schemeClr val="accent1"/>
+          </a:effectRef>
+          <a:fontRef idx="minor">
+            <a:schemeClr val="lt1"/>
+          </a:fontRef>
+        </p:style>
+        <p:txBody>
+          <a:bodyPr wrap="none" lIns="0" tIns="0" rIns="0" bIns="0" rtlCol="0" anchor="ctr"/>
+          <a:lstStyle/>
+          <a:p>
+            <a:pPr algn="ctr"/>
+            <a:r>
+              <a:rPr lang="de-AT" sz="1400" b="1" dirty="0">
+                <a:solidFill>
+                  <a:srgbClr val="FFFFFF"/>
+                </a:solidFill>
+              </a:rPr>
+              <a:t>13</a:t>
+            </a:r>
+            <a:endParaRPr sz="1400" b="1" dirty="0">
+              <a:solidFill>
+                <a:srgbClr val="FFFFFF"/>
+              </a:solidFill>
+            </a:endParaRPr>
+          </a:p>
+        </p:txBody>
+      </p:sp>
+      <p:sp>
+        <p:nvSpPr>
           <p:cNvPr id="11" name="Bereich 5">
             <a:extLst>
               <a:ext uri="{FF2B5EF4-FFF2-40B4-BE49-F238E27FC236}">
@@ -22327,8 +24823,8 @@
         </p:nvSpPr>
         <p:spPr>
           <a:xfrm>
-            <a:off x="11028279" y="4262848"/>
-            <a:ext cx="1851698" cy="923105"/>
+            <a:off x="10191152" y="4834852"/>
+            <a:ext cx="1851698" cy="678653"/>
           </a:xfrm>
           <a:prstGeom prst="roundRect">
             <a:avLst>
@@ -22380,7 +24876,7 @@
         </p:nvSpPr>
         <p:spPr>
           <a:xfrm>
-            <a:off x="10831209" y="4625944"/>
+            <a:off x="9994082" y="5076704"/>
             <a:ext cx="276345" cy="276345"/>
           </a:xfrm>
           <a:prstGeom prst="ellipse">
@@ -22421,7 +24917,7 @@
                   <a:srgbClr val="FFFFFF"/>
                 </a:solidFill>
               </a:rPr>
-              <a:t>2</a:t>
+              <a:t>14</a:t>
             </a:r>
             <a:endParaRPr sz="1400" b="1" dirty="0">
               <a:solidFill>
@@ -22446,7 +24942,7 @@
         <p:spPr>
           <a:xfrm>
             <a:off x="5456035" y="675863"/>
-            <a:ext cx="5143499" cy="2369880"/>
+            <a:ext cx="5143499" cy="2616101"/>
           </a:xfrm>
           <a:prstGeom prst="rect">
             <a:avLst/>
@@ -22459,12 +24955,12 @@
           </a:bodyPr>
           <a:lstStyle/>
           <a:p>
-            <a:pPr marL="228600" indent="-228600">
+            <a:pPr marL="285750" indent="-285750">
               <a:spcAft>
                 <a:spcPts val="400"/>
               </a:spcAft>
-              <a:buFont typeface="+mj-lt"/>
-              <a:buAutoNum type="arabicPeriod"/>
+              <a:buFont typeface="Arial" panose="020B0604020202020204" pitchFamily="34" charset="0"/>
+              <a:buChar char="•"/>
             </a:pPr>
             <a:r>
               <a:rPr lang="de-DE" sz="1600" dirty="0">
@@ -22472,16 +24968,16 @@
                   <a:srgbClr val="1A1A1A"/>
                 </a:solidFill>
               </a:rPr>
-              <a:t>Hinweisfenster</a:t>
+              <a:t>Hinweisfenster #13</a:t>
             </a:r>
           </a:p>
           <a:p>
-            <a:pPr marL="228600" indent="-228600">
+            <a:pPr marL="285750" indent="-285750">
               <a:spcAft>
                 <a:spcPts val="400"/>
               </a:spcAft>
-              <a:buFont typeface="+mj-lt"/>
-              <a:buAutoNum type="arabicPeriod"/>
+              <a:buFont typeface="Arial" panose="020B0604020202020204" pitchFamily="34" charset="0"/>
+              <a:buChar char="•"/>
             </a:pPr>
             <a:r>
               <a:rPr lang="de-DE" sz="1600" dirty="0">
@@ -22489,16 +24985,16 @@
                   <a:srgbClr val="1A1A1A"/>
                 </a:solidFill>
               </a:rPr>
-              <a:t>Eine der Kuppelplatten auswählen, Fenster F1 öffnet sich</a:t>
+              <a:t>Eine der Kuppelplatten auswählen #14, Fenster F1 öffnet sich</a:t>
             </a:r>
           </a:p>
           <a:p>
-            <a:pPr marL="228600" indent="-228600">
+            <a:pPr marL="285750" indent="-285750">
               <a:spcAft>
                 <a:spcPts val="400"/>
               </a:spcAft>
-              <a:buFont typeface="+mj-lt"/>
-              <a:buAutoNum type="arabicPeriod"/>
+              <a:buFont typeface="Arial" panose="020B0604020202020204" pitchFamily="34" charset="0"/>
+              <a:buChar char="•"/>
             </a:pPr>
             <a:r>
               <a:rPr lang="de-DE" sz="1600" dirty="0">
@@ -22506,16 +25002,16 @@
                   <a:srgbClr val="1A1A1A"/>
                 </a:solidFill>
               </a:rPr>
-              <a:t>Auslage, zu legende Kuppelplatte kann noch geändert werden</a:t>
+              <a:t>Auslage #15, zu legende Kuppelplatte kann noch geändert werden</a:t>
             </a:r>
           </a:p>
           <a:p>
-            <a:pPr marL="228600" indent="-228600">
+            <a:pPr marL="285750" indent="-285750">
               <a:spcAft>
                 <a:spcPts val="400"/>
               </a:spcAft>
-              <a:buFont typeface="+mj-lt"/>
-              <a:buAutoNum type="arabicPeriod"/>
+              <a:buFont typeface="Arial" panose="020B0604020202020204" pitchFamily="34" charset="0"/>
+              <a:buChar char="•"/>
             </a:pPr>
             <a:r>
               <a:rPr lang="de-DE" sz="1600" dirty="0">
@@ -22523,16 +25019,16 @@
                   <a:srgbClr val="1A1A1A"/>
                 </a:solidFill>
               </a:rPr>
-              <a:t>Rotation der selektierten Kuppelplatte ändern</a:t>
+              <a:t>Rotation der selektierten Kuppelplatte ändern #16</a:t>
             </a:r>
           </a:p>
           <a:p>
-            <a:pPr marL="228600" indent="-228600">
+            <a:pPr marL="285750" indent="-285750">
               <a:spcAft>
                 <a:spcPts val="400"/>
               </a:spcAft>
-              <a:buFont typeface="+mj-lt"/>
-              <a:buAutoNum type="arabicPeriod"/>
+              <a:buFont typeface="Arial" panose="020B0604020202020204" pitchFamily="34" charset="0"/>
+              <a:buChar char="•"/>
             </a:pPr>
             <a:r>
               <a:rPr lang="de-DE" sz="1600" dirty="0">
@@ -22540,16 +25036,16 @@
                   <a:srgbClr val="1A1A1A"/>
                 </a:solidFill>
               </a:rPr>
-              <a:t>Vorschau</a:t>
+              <a:t>Vorschau #17</a:t>
             </a:r>
           </a:p>
           <a:p>
-            <a:pPr marL="228600" indent="-228600">
+            <a:pPr marL="285750" indent="-285750">
               <a:spcAft>
                 <a:spcPts val="400"/>
               </a:spcAft>
-              <a:buFont typeface="+mj-lt"/>
-              <a:buAutoNum type="arabicPeriod"/>
+              <a:buFont typeface="Arial" panose="020B0604020202020204" pitchFamily="34" charset="0"/>
+              <a:buChar char="•"/>
             </a:pPr>
             <a:r>
               <a:rPr lang="de-DE" sz="1600" dirty="0">
@@ -22557,7 +25053,7 @@
                   <a:srgbClr val="1A1A1A"/>
                 </a:solidFill>
               </a:rPr>
-              <a:t>Legen oder abbrechen</a:t>
+              <a:t>Legen oder abbrechen #18</a:t>
             </a:r>
           </a:p>
           <a:p>
@@ -22592,14 +25088,13 @@
         </p:nvPicPr>
         <p:blipFill>
           <a:blip r:embed="rId3"/>
-          <a:stretch>
-            <a:fillRect/>
-          </a:stretch>
+          <a:srcRect/>
+          <a:stretch/>
         </p:blipFill>
         <p:spPr>
           <a:xfrm>
-            <a:off x="3335130" y="4105011"/>
-            <a:ext cx="4734586" cy="4201111"/>
+            <a:off x="2498003" y="4593264"/>
+            <a:ext cx="4734586" cy="4126124"/>
           </a:xfrm>
           <a:prstGeom prst="rect">
             <a:avLst/>
@@ -22625,7 +25120,7 @@
         </p:nvSpPr>
         <p:spPr>
           <a:xfrm>
-            <a:off x="3196956" y="4262847"/>
+            <a:off x="2212916" y="4958178"/>
             <a:ext cx="432000" cy="432000"/>
           </a:xfrm>
           <a:prstGeom prst="ellipse">
@@ -22690,7 +25185,7 @@
         </p:nvSpPr>
         <p:spPr>
           <a:xfrm>
-            <a:off x="3624284" y="5538654"/>
+            <a:off x="2787157" y="5989414"/>
             <a:ext cx="276345" cy="276345"/>
           </a:xfrm>
           <a:prstGeom prst="ellipse">
@@ -22731,7 +25226,7 @@
                   <a:srgbClr val="FFFFFF"/>
                 </a:solidFill>
               </a:rPr>
-              <a:t>3</a:t>
+              <a:t>15</a:t>
             </a:r>
             <a:endParaRPr sz="1400" b="1" dirty="0">
               <a:solidFill>
@@ -22755,7 +25250,7 @@
         </p:nvSpPr>
         <p:spPr>
           <a:xfrm>
-            <a:off x="3127871" y="6205566"/>
+            <a:off x="2290744" y="6656326"/>
             <a:ext cx="276345" cy="276345"/>
           </a:xfrm>
           <a:prstGeom prst="ellipse">
@@ -22796,7 +25291,7 @@
                   <a:srgbClr val="FFFFFF"/>
                 </a:solidFill>
               </a:rPr>
-              <a:t>4</a:t>
+              <a:t>16</a:t>
             </a:r>
             <a:endParaRPr sz="1400" b="1" dirty="0">
               <a:solidFill>
@@ -22820,7 +25315,7 @@
         </p:nvSpPr>
         <p:spPr>
           <a:xfrm>
-            <a:off x="4489521" y="6854354"/>
+            <a:off x="3652394" y="7305114"/>
             <a:ext cx="276345" cy="276345"/>
           </a:xfrm>
           <a:prstGeom prst="ellipse">
@@ -22861,7 +25356,7 @@
                   <a:srgbClr val="FFFFFF"/>
                 </a:solidFill>
               </a:rPr>
-              <a:t>5</a:t>
+              <a:t>17</a:t>
             </a:r>
             <a:endParaRPr sz="1400" b="1" dirty="0">
               <a:solidFill>
@@ -22885,7 +25380,7 @@
         </p:nvSpPr>
         <p:spPr>
           <a:xfrm>
-            <a:off x="3663908" y="7630897"/>
+            <a:off x="2826781" y="8081657"/>
             <a:ext cx="276345" cy="276345"/>
           </a:xfrm>
           <a:prstGeom prst="ellipse">
@@ -22926,7 +25421,7 @@
                   <a:srgbClr val="FFFFFF"/>
                 </a:solidFill>
               </a:rPr>
-              <a:t>6</a:t>
+              <a:t>18</a:t>
             </a:r>
             <a:endParaRPr sz="1400" b="1" dirty="0">
               <a:solidFill>
@@ -22982,14 +25477,13 @@
         </p:nvPicPr>
         <p:blipFill>
           <a:blip r:embed="rId2"/>
-          <a:stretch>
-            <a:fillRect/>
-          </a:stretch>
+          <a:srcRect/>
+          <a:stretch/>
         </p:blipFill>
         <p:spPr>
           <a:xfrm>
-            <a:off x="483325" y="2573915"/>
-            <a:ext cx="12192137" cy="4721658"/>
+            <a:off x="2544603" y="2483750"/>
+            <a:ext cx="10156829" cy="4811823"/>
           </a:xfrm>
           <a:prstGeom prst="rect">
             <a:avLst/>
@@ -23012,7 +25506,7 @@
         </p:nvPicPr>
         <p:blipFill>
           <a:blip r:embed="rId3"/>
-          <a:srcRect r="1719" b="4003"/>
+          <a:srcRect t="10412" r="5530" b="10412"/>
           <a:stretch>
             <a:fillRect/>
           </a:stretch>
@@ -23020,7 +25514,7 @@
         <p:spPr>
           <a:xfrm>
             <a:off x="4286018" y="5923782"/>
-            <a:ext cx="6151205" cy="2633772"/>
+            <a:ext cx="5811019" cy="2633772"/>
           </a:xfrm>
           <a:prstGeom prst="rect">
             <a:avLst/>
@@ -23032,71 +25526,6 @@
           </a:ln>
         </p:spPr>
       </p:pic>
-      <p:sp>
-        <p:nvSpPr>
-          <p:cNvPr id="7" name="Marker 7">
-            <a:extLst>
-              <a:ext uri="{FF2B5EF4-FFF2-40B4-BE49-F238E27FC236}">
-                <a16:creationId xmlns:a16="http://schemas.microsoft.com/office/drawing/2014/main" id="{59B27428-4C66-B279-D71E-D6F2F94209D3}"/>
-              </a:ext>
-            </a:extLst>
-          </p:cNvPr>
-          <p:cNvSpPr/>
-          <p:nvPr/>
-        </p:nvSpPr>
-        <p:spPr>
-          <a:xfrm>
-            <a:off x="6759805" y="4110676"/>
-            <a:ext cx="276345" cy="276345"/>
-          </a:xfrm>
-          <a:prstGeom prst="ellipse">
-            <a:avLst/>
-          </a:prstGeom>
-          <a:solidFill>
-            <a:srgbClr val="E81C2E"/>
-          </a:solidFill>
-          <a:ln w="22225">
-            <a:solidFill>
-              <a:srgbClr val="FFFFFF"/>
-            </a:solidFill>
-          </a:ln>
-          <a:effectLst/>
-        </p:spPr>
-        <p:style>
-          <a:lnRef idx="1">
-            <a:schemeClr val="accent1"/>
-          </a:lnRef>
-          <a:fillRef idx="3">
-            <a:schemeClr val="accent1"/>
-          </a:fillRef>
-          <a:effectRef idx="2">
-            <a:schemeClr val="accent1"/>
-          </a:effectRef>
-          <a:fontRef idx="minor">
-            <a:schemeClr val="lt1"/>
-          </a:fontRef>
-        </p:style>
-        <p:txBody>
-          <a:bodyPr wrap="none" lIns="0" tIns="0" rIns="0" bIns="0" rtlCol="0" anchor="ctr"/>
-          <a:lstStyle/>
-          <a:p>
-            <a:pPr algn="ctr"/>
-            <a:r>
-              <a:rPr lang="de-AT" sz="1400" b="1" dirty="0">
-                <a:solidFill>
-                  <a:srgbClr val="FFFFFF"/>
-                </a:solidFill>
-              </a:rPr>
-              <a:t>7</a:t>
-            </a:r>
-            <a:endParaRPr sz="1400" b="1" dirty="0">
-              <a:solidFill>
-                <a:srgbClr val="FFFFFF"/>
-              </a:solidFill>
-            </a:endParaRPr>
-          </a:p>
-        </p:txBody>
-      </p:sp>
       <p:sp>
         <p:nvSpPr>
           <p:cNvPr id="9" name="Bereich 5">
@@ -23152,10 +25581,73 @@
       </p:sp>
       <p:sp>
         <p:nvSpPr>
-          <p:cNvPr id="11" name="Marker 7">
+          <p:cNvPr id="15" name="Textfeld 14">
             <a:extLst>
               <a:ext uri="{FF2B5EF4-FFF2-40B4-BE49-F238E27FC236}">
-                <a16:creationId xmlns:a16="http://schemas.microsoft.com/office/drawing/2014/main" id="{917ED253-C5BE-8FC0-DB82-630300C2CAC9}"/>
+                <a16:creationId xmlns:a16="http://schemas.microsoft.com/office/drawing/2014/main" id="{2B29DA71-9CAA-F806-2A63-A9EAC4001C30}"/>
+              </a:ext>
+            </a:extLst>
+          </p:cNvPr>
+          <p:cNvSpPr txBox="1"/>
+          <p:nvPr/>
+        </p:nvSpPr>
+        <p:spPr>
+          <a:xfrm>
+            <a:off x="5446510" y="685388"/>
+            <a:ext cx="5143499" cy="882293"/>
+          </a:xfrm>
+          <a:prstGeom prst="rect">
+            <a:avLst/>
+          </a:prstGeom>
+          <a:noFill/>
+        </p:spPr>
+        <p:txBody>
+          <a:bodyPr wrap="square">
+            <a:spAutoFit/>
+          </a:bodyPr>
+          <a:lstStyle/>
+          <a:p>
+            <a:pPr marL="285750" indent="-285750">
+              <a:spcAft>
+                <a:spcPts val="400"/>
+              </a:spcAft>
+              <a:buFont typeface="Arial" panose="020B0604020202020204" pitchFamily="34" charset="0"/>
+              <a:buChar char="•"/>
+            </a:pPr>
+            <a:r>
+              <a:rPr lang="de-DE" sz="1600" dirty="0">
+                <a:solidFill>
+                  <a:srgbClr val="1A1A1A"/>
+                </a:solidFill>
+              </a:rPr>
+              <a:t>Kuppel #19, hier werden die Kuppelplatten #14 platziert</a:t>
+            </a:r>
+          </a:p>
+          <a:p>
+            <a:pPr marL="285750" indent="-285750">
+              <a:spcAft>
+                <a:spcPts val="400"/>
+              </a:spcAft>
+              <a:buFont typeface="Arial" panose="020B0604020202020204" pitchFamily="34" charset="0"/>
+              <a:buChar char="•"/>
+            </a:pPr>
+            <a:r>
+              <a:rPr lang="de-DE" sz="1600" dirty="0">
+                <a:solidFill>
+                  <a:srgbClr val="1A1A1A"/>
+                </a:solidFill>
+              </a:rPr>
+              <a:t>Stand nach dem platzieren #H1</a:t>
+            </a:r>
+          </a:p>
+        </p:txBody>
+      </p:sp>
+      <p:sp>
+        <p:nvSpPr>
+          <p:cNvPr id="17" name="Marker 7">
+            <a:extLst>
+              <a:ext uri="{FF2B5EF4-FFF2-40B4-BE49-F238E27FC236}">
+                <a16:creationId xmlns:a16="http://schemas.microsoft.com/office/drawing/2014/main" id="{050BBA4A-6660-E6D9-390B-9CE80A3D1646}"/>
               </a:ext>
             </a:extLst>
           </p:cNvPr>
@@ -23164,7 +25656,116 @@
         </p:nvSpPr>
         <p:spPr>
           <a:xfrm>
-            <a:off x="10737706" y="3350033"/>
+            <a:off x="4070018" y="6140565"/>
+            <a:ext cx="432000" cy="432000"/>
+          </a:xfrm>
+          <a:prstGeom prst="ellipse">
+            <a:avLst/>
+          </a:prstGeom>
+          <a:solidFill>
+            <a:schemeClr val="accent1"/>
+          </a:solidFill>
+          <a:ln w="22225">
+            <a:solidFill>
+              <a:srgbClr val="FFFFFF"/>
+            </a:solidFill>
+          </a:ln>
+          <a:effectLst/>
+        </p:spPr>
+        <p:style>
+          <a:lnRef idx="1">
+            <a:schemeClr val="accent1"/>
+          </a:lnRef>
+          <a:fillRef idx="3">
+            <a:schemeClr val="accent1"/>
+          </a:fillRef>
+          <a:effectRef idx="2">
+            <a:schemeClr val="accent1"/>
+          </a:effectRef>
+          <a:fontRef idx="minor">
+            <a:schemeClr val="lt1"/>
+          </a:fontRef>
+        </p:style>
+        <p:txBody>
+          <a:bodyPr wrap="none" lIns="0" tIns="0" rIns="0" bIns="0" rtlCol="0" anchor="ctr"/>
+          <a:lstStyle/>
+          <a:p>
+            <a:pPr algn="ctr"/>
+            <a:r>
+              <a:rPr lang="de-AT" sz="1400" b="1" dirty="0">
+                <a:solidFill>
+                  <a:srgbClr val="FFFFFF"/>
+                </a:solidFill>
+              </a:rPr>
+              <a:t>H1</a:t>
+            </a:r>
+            <a:endParaRPr sz="1400" b="1" dirty="0">
+              <a:solidFill>
+                <a:srgbClr val="FFFFFF"/>
+              </a:solidFill>
+            </a:endParaRPr>
+          </a:p>
+        </p:txBody>
+      </p:sp>
+      <p:sp>
+        <p:nvSpPr>
+          <p:cNvPr id="19" name="TextBox 19">
+            <a:extLst>
+              <a:ext uri="{FF2B5EF4-FFF2-40B4-BE49-F238E27FC236}">
+                <a16:creationId xmlns:a16="http://schemas.microsoft.com/office/drawing/2014/main" id="{A5613CFE-59C3-C58A-40C7-6D894007FA64}"/>
+              </a:ext>
+            </a:extLst>
+          </p:cNvPr>
+          <p:cNvSpPr txBox="1"/>
+          <p:nvPr/>
+        </p:nvSpPr>
+        <p:spPr>
+          <a:xfrm>
+            <a:off x="512894" y="907594"/>
+            <a:ext cx="3989124" cy="400110"/>
+          </a:xfrm>
+          <a:prstGeom prst="rect">
+            <a:avLst/>
+          </a:prstGeom>
+          <a:noFill/>
+        </p:spPr>
+        <p:txBody>
+          <a:bodyPr wrap="square">
+            <a:spAutoFit/>
+          </a:bodyPr>
+          <a:lstStyle/>
+          <a:p>
+            <a:r>
+              <a:rPr lang="de-AT" sz="2000" b="1" dirty="0">
+                <a:solidFill>
+                  <a:srgbClr val="1A1A1A"/>
+                </a:solidFill>
+              </a:rPr>
+              <a:t>Spielstart</a:t>
+            </a:r>
+            <a:endParaRPr sz="2000" b="1" dirty="0">
+              <a:solidFill>
+                <a:srgbClr val="1A1A1A"/>
+              </a:solidFill>
+            </a:endParaRPr>
+          </a:p>
+        </p:txBody>
+      </p:sp>
+      <p:sp>
+        <p:nvSpPr>
+          <p:cNvPr id="7" name="Marker 7">
+            <a:extLst>
+              <a:ext uri="{FF2B5EF4-FFF2-40B4-BE49-F238E27FC236}">
+                <a16:creationId xmlns:a16="http://schemas.microsoft.com/office/drawing/2014/main" id="{59B27428-4C66-B279-D71E-D6F2F94209D3}"/>
+              </a:ext>
+            </a:extLst>
+          </p:cNvPr>
+          <p:cNvSpPr/>
+          <p:nvPr/>
+        </p:nvSpPr>
+        <p:spPr>
+          <a:xfrm>
+            <a:off x="6826480" y="3539176"/>
             <a:ext cx="276345" cy="276345"/>
           </a:xfrm>
           <a:prstGeom prst="ellipse">
@@ -23205,249 +25806,11 @@
                   <a:srgbClr val="FFFFFF"/>
                 </a:solidFill>
               </a:rPr>
-              <a:t>1</a:t>
+              <a:t>19</a:t>
             </a:r>
             <a:endParaRPr sz="1400" b="1" dirty="0">
               <a:solidFill>
                 <a:srgbClr val="FFFFFF"/>
-              </a:solidFill>
-            </a:endParaRPr>
-          </a:p>
-        </p:txBody>
-      </p:sp>
-      <p:sp>
-        <p:nvSpPr>
-          <p:cNvPr id="13" name="Bereich 5">
-            <a:extLst>
-              <a:ext uri="{FF2B5EF4-FFF2-40B4-BE49-F238E27FC236}">
-                <a16:creationId xmlns:a16="http://schemas.microsoft.com/office/drawing/2014/main" id="{C5889B22-FAA2-5C62-2871-A0F6DAD87810}"/>
-              </a:ext>
-            </a:extLst>
-          </p:cNvPr>
-          <p:cNvSpPr/>
-          <p:nvPr/>
-        </p:nvSpPr>
-        <p:spPr>
-          <a:xfrm>
-            <a:off x="10966450" y="3173208"/>
-            <a:ext cx="1631950" cy="1098346"/>
-          </a:xfrm>
-          <a:prstGeom prst="roundRect">
-            <a:avLst>
-              <a:gd name="adj" fmla="val 6000"/>
-            </a:avLst>
-          </a:prstGeom>
-          <a:noFill/>
-          <a:ln w="28575">
-            <a:solidFill>
-              <a:srgbClr val="E81C2E"/>
-            </a:solidFill>
-          </a:ln>
-          <a:effectLst/>
-        </p:spPr>
-        <p:style>
-          <a:lnRef idx="1">
-            <a:schemeClr val="accent1"/>
-          </a:lnRef>
-          <a:fillRef idx="3">
-            <a:schemeClr val="accent1"/>
-          </a:fillRef>
-          <a:effectRef idx="2">
-            <a:schemeClr val="accent1"/>
-          </a:effectRef>
-          <a:fontRef idx="minor">
-            <a:schemeClr val="lt1"/>
-          </a:fontRef>
-        </p:style>
-        <p:txBody>
-          <a:bodyPr rtlCol="0" anchor="ctr"/>
-          <a:lstStyle/>
-          <a:p>
-            <a:pPr algn="ctr"/>
-            <a:endParaRPr/>
-          </a:p>
-        </p:txBody>
-      </p:sp>
-      <p:sp>
-        <p:nvSpPr>
-          <p:cNvPr id="15" name="Textfeld 14">
-            <a:extLst>
-              <a:ext uri="{FF2B5EF4-FFF2-40B4-BE49-F238E27FC236}">
-                <a16:creationId xmlns:a16="http://schemas.microsoft.com/office/drawing/2014/main" id="{2B29DA71-9CAA-F806-2A63-A9EAC4001C30}"/>
-              </a:ext>
-            </a:extLst>
-          </p:cNvPr>
-          <p:cNvSpPr txBox="1"/>
-          <p:nvPr/>
-        </p:nvSpPr>
-        <p:spPr>
-          <a:xfrm>
-            <a:off x="5456035" y="675863"/>
-            <a:ext cx="5143499" cy="933589"/>
-          </a:xfrm>
-          <a:prstGeom prst="rect">
-            <a:avLst/>
-          </a:prstGeom>
-          <a:noFill/>
-        </p:spPr>
-        <p:txBody>
-          <a:bodyPr wrap="square">
-            <a:spAutoFit/>
-          </a:bodyPr>
-          <a:lstStyle/>
-          <a:p>
-            <a:pPr marL="228600" indent="-228600">
-              <a:spcAft>
-                <a:spcPts val="400"/>
-              </a:spcAft>
-              <a:buFont typeface="+mj-lt"/>
-              <a:buAutoNum type="arabicPeriod"/>
-            </a:pPr>
-            <a:r>
-              <a:rPr lang="de-DE" sz="1600" dirty="0">
-                <a:solidFill>
-                  <a:srgbClr val="1A1A1A"/>
-                </a:solidFill>
-              </a:rPr>
-              <a:t>Hinweisfenster</a:t>
-            </a:r>
-          </a:p>
-          <a:p>
-            <a:pPr>
-              <a:spcAft>
-                <a:spcPts val="400"/>
-              </a:spcAft>
-            </a:pPr>
-            <a:r>
-              <a:rPr lang="de-DE" sz="1600" dirty="0">
-                <a:solidFill>
-                  <a:srgbClr val="1A1A1A"/>
-                </a:solidFill>
-              </a:rPr>
-              <a:t>7. Mögliche Platzierung der Startkuppel</a:t>
-            </a:r>
-          </a:p>
-          <a:p>
-            <a:pPr>
-              <a:spcAft>
-                <a:spcPts val="400"/>
-              </a:spcAft>
-            </a:pPr>
-            <a:r>
-              <a:rPr lang="de-DE" sz="1600" dirty="0">
-                <a:solidFill>
-                  <a:srgbClr val="1A1A1A"/>
-                </a:solidFill>
-              </a:rPr>
-              <a:t>8. Stand nach dem platzieren</a:t>
-            </a:r>
-          </a:p>
-        </p:txBody>
-      </p:sp>
-      <p:sp>
-        <p:nvSpPr>
-          <p:cNvPr id="17" name="Marker 7">
-            <a:extLst>
-              <a:ext uri="{FF2B5EF4-FFF2-40B4-BE49-F238E27FC236}">
-                <a16:creationId xmlns:a16="http://schemas.microsoft.com/office/drawing/2014/main" id="{050BBA4A-6660-E6D9-390B-9CE80A3D1646}"/>
-              </a:ext>
-            </a:extLst>
-          </p:cNvPr>
-          <p:cNvSpPr/>
-          <p:nvPr/>
-        </p:nvSpPr>
-        <p:spPr>
-          <a:xfrm>
-            <a:off x="4147845" y="7788391"/>
-            <a:ext cx="276345" cy="276345"/>
-          </a:xfrm>
-          <a:prstGeom prst="ellipse">
-            <a:avLst/>
-          </a:prstGeom>
-          <a:solidFill>
-            <a:schemeClr val="accent1"/>
-          </a:solidFill>
-          <a:ln w="22225">
-            <a:solidFill>
-              <a:srgbClr val="FFFFFF"/>
-            </a:solidFill>
-          </a:ln>
-          <a:effectLst/>
-        </p:spPr>
-        <p:style>
-          <a:lnRef idx="1">
-            <a:schemeClr val="accent1"/>
-          </a:lnRef>
-          <a:fillRef idx="3">
-            <a:schemeClr val="accent1"/>
-          </a:fillRef>
-          <a:effectRef idx="2">
-            <a:schemeClr val="accent1"/>
-          </a:effectRef>
-          <a:fontRef idx="minor">
-            <a:schemeClr val="lt1"/>
-          </a:fontRef>
-        </p:style>
-        <p:txBody>
-          <a:bodyPr wrap="none" lIns="0" tIns="0" rIns="0" bIns="0" rtlCol="0" anchor="ctr"/>
-          <a:lstStyle/>
-          <a:p>
-            <a:pPr algn="ctr"/>
-            <a:r>
-              <a:rPr lang="de-AT" sz="1400" b="1" dirty="0">
-                <a:solidFill>
-                  <a:srgbClr val="FFFFFF"/>
-                </a:solidFill>
-              </a:rPr>
-              <a:t>8</a:t>
-            </a:r>
-            <a:endParaRPr sz="1400" b="1" dirty="0">
-              <a:solidFill>
-                <a:srgbClr val="FFFFFF"/>
-              </a:solidFill>
-            </a:endParaRPr>
-          </a:p>
-        </p:txBody>
-      </p:sp>
-      <p:sp>
-        <p:nvSpPr>
-          <p:cNvPr id="19" name="TextBox 19">
-            <a:extLst>
-              <a:ext uri="{FF2B5EF4-FFF2-40B4-BE49-F238E27FC236}">
-                <a16:creationId xmlns:a16="http://schemas.microsoft.com/office/drawing/2014/main" id="{A5613CFE-59C3-C58A-40C7-6D894007FA64}"/>
-              </a:ext>
-            </a:extLst>
-          </p:cNvPr>
-          <p:cNvSpPr txBox="1"/>
-          <p:nvPr/>
-        </p:nvSpPr>
-        <p:spPr>
-          <a:xfrm>
-            <a:off x="512894" y="907594"/>
-            <a:ext cx="8229600" cy="400110"/>
-          </a:xfrm>
-          <a:prstGeom prst="rect">
-            <a:avLst/>
-          </a:prstGeom>
-          <a:noFill/>
-        </p:spPr>
-        <p:txBody>
-          <a:bodyPr wrap="square">
-            <a:spAutoFit/>
-          </a:bodyPr>
-          <a:lstStyle/>
-          <a:p>
-            <a:r>
-              <a:rPr lang="de-AT" sz="2000" b="1" dirty="0">
-                <a:solidFill>
-                  <a:srgbClr val="1A1A1A"/>
-                </a:solidFill>
-              </a:rPr>
-              <a:t>Spielstart</a:t>
-            </a:r>
-            <a:endParaRPr sz="2000" b="1" dirty="0">
-              <a:solidFill>
-                <a:srgbClr val="1A1A1A"/>
               </a:solidFill>
             </a:endParaRPr>
           </a:p>
@@ -23499,14 +25862,13 @@
         </p:nvPicPr>
         <p:blipFill>
           <a:blip r:embed="rId2"/>
-          <a:stretch>
-            <a:fillRect/>
-          </a:stretch>
+          <a:srcRect/>
+          <a:stretch/>
         </p:blipFill>
         <p:spPr>
           <a:xfrm>
-            <a:off x="0" y="4103350"/>
-            <a:ext cx="13158788" cy="5164470"/>
+            <a:off x="2272283" y="4065250"/>
+            <a:ext cx="10877006" cy="5164470"/>
           </a:xfrm>
           <a:prstGeom prst="rect">
             <a:avLst/>
@@ -23571,8 +25933,8 @@
         </p:nvSpPr>
         <p:spPr>
           <a:xfrm>
-            <a:off x="4850845" y="1425666"/>
-            <a:ext cx="7483399" cy="2513509"/>
+            <a:off x="4898471" y="437660"/>
+            <a:ext cx="7483399" cy="3498394"/>
           </a:xfrm>
           <a:prstGeom prst="rect">
             <a:avLst/>
@@ -23600,12 +25962,12 @@
             </a:r>
           </a:p>
           <a:p>
-            <a:pPr marL="228600" indent="-228600">
+            <a:pPr marL="285750" indent="-285750">
               <a:spcAft>
                 <a:spcPts val="400"/>
               </a:spcAft>
-              <a:buFont typeface="+mj-lt"/>
-              <a:buAutoNum type="arabicPeriod"/>
+              <a:buFont typeface="Wingdings" panose="05000000000000000000" pitchFamily="2" charset="2"/>
+              <a:buChar char="v"/>
             </a:pPr>
             <a:r>
               <a:rPr lang="de-DE" sz="1600" dirty="0">
@@ -23613,14 +25975,16 @@
                   <a:srgbClr val="1A1A1A"/>
                 </a:solidFill>
               </a:rPr>
-              <a:t>Kuppelplatten aus der Auslage oder dem Stapel (1‘) ziehen und auf die Kuppel (6) legen. Insgesamt 2 Kuppelplatten müssen je Runde &amp; Spieler gezogen werden. Wird von 1‘ gezogen öffnet sich Fenster F2 ansonsten F3.</a:t>
+              <a:t>Kuppelplatten aus der Auslage #14 oder dem Stapel #14‘ ziehen und auf die Kuppel #19 legen. Insgesamt 2 Kuppelplatten müssen je Runde &amp; Spieler gezogen werden. Wird von #14‘ gezogen kostet das einen Punkt je Kuppelplatte und es öffnet sich Fenster #F2, ansonsten #F3.</a:t>
             </a:r>
           </a:p>
           <a:p>
-            <a:pPr>
+            <a:pPr marL="285750" indent="-285750">
               <a:spcAft>
                 <a:spcPts val="400"/>
               </a:spcAft>
+              <a:buFont typeface="Wingdings" panose="05000000000000000000" pitchFamily="2" charset="2"/>
+              <a:buChar char="v"/>
             </a:pPr>
             <a:r>
               <a:rPr lang="de-DE" sz="1600" dirty="0">
@@ -23628,14 +25992,16 @@
                   <a:srgbClr val="1A1A1A"/>
                 </a:solidFill>
               </a:rPr>
-              <a:t>2. Fliesen von der Sonnenseite der Fabriken auswählen und in eine Reihe (5) legen</a:t>
+              <a:t>Fliesen von der Sonnenseite #20 der Fabriken auswählen und in eine Reihe #21 oder den Boden #22 legen.</a:t>
             </a:r>
           </a:p>
           <a:p>
-            <a:pPr>
+            <a:pPr marL="285750" indent="-285750">
               <a:spcAft>
                 <a:spcPts val="400"/>
               </a:spcAft>
+              <a:buFont typeface="Wingdings" panose="05000000000000000000" pitchFamily="2" charset="2"/>
+              <a:buChar char="v"/>
             </a:pPr>
             <a:r>
               <a:rPr lang="de-DE" sz="1600" dirty="0">
@@ -23643,14 +26009,16 @@
                   <a:srgbClr val="1A1A1A"/>
                 </a:solidFill>
               </a:rPr>
-              <a:t>3. Fliesen von der Mondseite der Fabriken auswählen und in eine Reihe (5) legen. Fenster F3 für die Reihenfolge öffnet sich.</a:t>
+              <a:t>Fliesen von der Mondseite der Fabriken auswählen #23 und wenn möglich eine Reihe #21 oder auf den Boden #22 legen. Fenster #F3 für die Reihenfolge öffnet sich. Reihenfolge des Mondstapels je Fabrik ist in #23‘ ersichtlich. Keine Selektion der Fliesen in #23‘ möglich.</a:t>
             </a:r>
           </a:p>
           <a:p>
-            <a:pPr>
+            <a:pPr marL="285750" indent="-285750">
               <a:spcAft>
                 <a:spcPts val="400"/>
               </a:spcAft>
+              <a:buFont typeface="Wingdings" panose="05000000000000000000" pitchFamily="2" charset="2"/>
+              <a:buChar char="v"/>
             </a:pPr>
             <a:r>
               <a:rPr lang="de-DE" sz="1600" dirty="0">
@@ -23658,7 +26026,7 @@
                   <a:srgbClr val="1A1A1A"/>
                 </a:solidFill>
               </a:rPr>
-              <a:t>4. Bonusplättchen nehmen wenn verfügbar (Fabrik muss vollkommen leer sein). 2 müssen je Runde &amp; Spieler gezogen werden.</a:t>
+              <a:t>Bonusplättchen nehmen #24 wenn verfügbar – Fabrik muss vollkommen leer sein. 2 müssen je Runde &amp; Spieler gezogen werden.</a:t>
             </a:r>
           </a:p>
         </p:txBody>
@@ -23677,7 +26045,7 @@
         </p:nvSpPr>
         <p:spPr>
           <a:xfrm>
-            <a:off x="11271661" y="5854191"/>
+            <a:off x="11310413" y="6259563"/>
             <a:ext cx="276345" cy="276345"/>
           </a:xfrm>
           <a:prstGeom prst="ellipse">
@@ -23718,7 +26086,7 @@
                   <a:srgbClr val="FFFFFF"/>
                 </a:solidFill>
               </a:rPr>
-              <a:t>1‘</a:t>
+              <a:t>14‘</a:t>
             </a:r>
             <a:endParaRPr sz="1400" b="1" dirty="0">
               <a:solidFill>
@@ -23795,7 +26163,7 @@
         </p:nvSpPr>
         <p:spPr>
           <a:xfrm>
-            <a:off x="5370814" y="5411369"/>
+            <a:off x="5389159" y="5609332"/>
             <a:ext cx="276345" cy="276345"/>
           </a:xfrm>
           <a:prstGeom prst="ellipse">
@@ -23836,7 +26204,7 @@
                   <a:srgbClr val="FFFFFF"/>
                 </a:solidFill>
               </a:rPr>
-              <a:t>5</a:t>
+              <a:t>21</a:t>
             </a:r>
             <a:endParaRPr sz="1400" b="1" dirty="0">
               <a:solidFill>
@@ -23954,7 +26322,7 @@
                   <a:srgbClr val="FFFFFF"/>
                 </a:solidFill>
               </a:rPr>
-              <a:t>6</a:t>
+              <a:t>19</a:t>
             </a:r>
             <a:endParaRPr sz="1400" b="1" dirty="0">
               <a:solidFill>
@@ -23964,36 +26332,6 @@
           </a:p>
         </p:txBody>
       </p:sp>
-      <p:pic>
-        <p:nvPicPr>
-          <p:cNvPr id="47" name="Grafik 46">
-            <a:extLst>
-              <a:ext uri="{FF2B5EF4-FFF2-40B4-BE49-F238E27FC236}">
-                <a16:creationId xmlns:a16="http://schemas.microsoft.com/office/drawing/2014/main" id="{C5B418AF-CDD9-6B62-F1EF-B90F14C2F93A}"/>
-              </a:ext>
-            </a:extLst>
-          </p:cNvPr>
-          <p:cNvPicPr>
-            <a:picLocks noChangeAspect="1"/>
-          </p:cNvPicPr>
-          <p:nvPr/>
-        </p:nvPicPr>
-        <p:blipFill>
-          <a:blip r:embed="rId3"/>
-          <a:stretch>
-            <a:fillRect/>
-          </a:stretch>
-        </p:blipFill>
-        <p:spPr>
-          <a:xfrm>
-            <a:off x="8837666" y="4398744"/>
-            <a:ext cx="2366813" cy="4869076"/>
-          </a:xfrm>
-          <a:prstGeom prst="rect">
-            <a:avLst/>
-          </a:prstGeom>
-        </p:spPr>
-      </p:pic>
       <p:sp>
         <p:nvSpPr>
           <p:cNvPr id="15" name="Bereich 5">
@@ -24008,12 +26346,12 @@
         </p:nvSpPr>
         <p:spPr>
           <a:xfrm>
-            <a:off x="8920088" y="4583495"/>
-            <a:ext cx="2118025" cy="3780079"/>
+            <a:off x="10691296" y="5160661"/>
+            <a:ext cx="321178" cy="2540905"/>
           </a:xfrm>
           <a:prstGeom prst="roundRect">
             <a:avLst>
-              <a:gd name="adj" fmla="val 6000"/>
+              <a:gd name="adj" fmla="val 50000"/>
             </a:avLst>
           </a:prstGeom>
           <a:noFill/>
@@ -24061,7 +26399,7 @@
         </p:nvSpPr>
         <p:spPr>
           <a:xfrm>
-            <a:off x="10574703" y="8225401"/>
+            <a:off x="10298177" y="5411369"/>
             <a:ext cx="276345" cy="276345"/>
           </a:xfrm>
           <a:prstGeom prst="ellipse">
@@ -24102,7 +26440,7 @@
                   <a:srgbClr val="FFFFFF"/>
                 </a:solidFill>
               </a:rPr>
-              <a:t>2</a:t>
+              <a:t>20</a:t>
             </a:r>
             <a:endParaRPr sz="1400" b="1" dirty="0">
               <a:solidFill>
@@ -24167,7 +26505,7 @@
                   <a:srgbClr val="FFFFFF"/>
                 </a:solidFill>
               </a:rPr>
-              <a:t>4</a:t>
+              <a:t>24</a:t>
             </a:r>
             <a:endParaRPr sz="1400" b="1" dirty="0">
               <a:solidFill>
@@ -24191,12 +26529,12 @@
         </p:nvSpPr>
         <p:spPr>
           <a:xfrm>
-            <a:off x="11204479" y="5022488"/>
-            <a:ext cx="1819190" cy="1182977"/>
+            <a:off x="11271661" y="5471160"/>
+            <a:ext cx="1752008" cy="1097279"/>
           </a:xfrm>
           <a:prstGeom prst="roundRect">
             <a:avLst>
-              <a:gd name="adj" fmla="val 6000"/>
+              <a:gd name="adj" fmla="val 8062"/>
             </a:avLst>
           </a:prstGeom>
           <a:noFill/>
@@ -24244,12 +26582,12 @@
         </p:nvSpPr>
         <p:spPr>
           <a:xfrm>
-            <a:off x="11204479" y="6268708"/>
-            <a:ext cx="1819190" cy="537460"/>
+            <a:off x="8945168" y="4534430"/>
+            <a:ext cx="1341097" cy="462056"/>
           </a:xfrm>
           <a:prstGeom prst="roundRect">
             <a:avLst>
-              <a:gd name="adj" fmla="val 6000"/>
+              <a:gd name="adj" fmla="val 22491"/>
             </a:avLst>
           </a:prstGeom>
           <a:noFill/>
@@ -24297,7 +26635,7 @@
         </p:nvSpPr>
         <p:spPr>
           <a:xfrm>
-            <a:off x="12610589" y="4884316"/>
+            <a:off x="12472416" y="5332987"/>
             <a:ext cx="276345" cy="276345"/>
           </a:xfrm>
           <a:prstGeom prst="ellipse">
@@ -24338,7 +26676,7 @@
                   <a:srgbClr val="FFFFFF"/>
                 </a:solidFill>
               </a:rPr>
-              <a:t>1</a:t>
+              <a:t>14</a:t>
             </a:r>
             <a:endParaRPr sz="1400" b="1" dirty="0">
               <a:solidFill>
@@ -24362,7 +26700,7 @@
         </p:nvSpPr>
         <p:spPr>
           <a:xfrm>
-            <a:off x="12334244" y="6667995"/>
+            <a:off x="10179880" y="4619187"/>
             <a:ext cx="276345" cy="276345"/>
           </a:xfrm>
           <a:prstGeom prst="ellipse">
@@ -24403,7 +26741,607 @@
                   <a:srgbClr val="FFFFFF"/>
                 </a:solidFill>
               </a:rPr>
-              <a:t>3</a:t>
+              <a:t>23</a:t>
+            </a:r>
+            <a:endParaRPr sz="1400" b="1" dirty="0">
+              <a:solidFill>
+                <a:srgbClr val="FFFFFF"/>
+              </a:solidFill>
+            </a:endParaRPr>
+          </a:p>
+        </p:txBody>
+      </p:sp>
+      <p:sp>
+        <p:nvSpPr>
+          <p:cNvPr id="3" name="Marker 7">
+            <a:extLst>
+              <a:ext uri="{FF2B5EF4-FFF2-40B4-BE49-F238E27FC236}">
+                <a16:creationId xmlns:a16="http://schemas.microsoft.com/office/drawing/2014/main" id="{B99B07EB-AE0E-B489-6AA7-3EDD3053D47E}"/>
+              </a:ext>
+            </a:extLst>
+          </p:cNvPr>
+          <p:cNvSpPr/>
+          <p:nvPr/>
+        </p:nvSpPr>
+        <p:spPr>
+          <a:xfrm>
+            <a:off x="10286265" y="6067292"/>
+            <a:ext cx="276345" cy="276345"/>
+          </a:xfrm>
+          <a:prstGeom prst="ellipse">
+            <a:avLst/>
+          </a:prstGeom>
+          <a:solidFill>
+            <a:srgbClr val="E81C2E"/>
+          </a:solidFill>
+          <a:ln w="22225">
+            <a:solidFill>
+              <a:srgbClr val="FFFFFF"/>
+            </a:solidFill>
+          </a:ln>
+          <a:effectLst/>
+        </p:spPr>
+        <p:style>
+          <a:lnRef idx="1">
+            <a:schemeClr val="accent1"/>
+          </a:lnRef>
+          <a:fillRef idx="3">
+            <a:schemeClr val="accent1"/>
+          </a:fillRef>
+          <a:effectRef idx="2">
+            <a:schemeClr val="accent1"/>
+          </a:effectRef>
+          <a:fontRef idx="minor">
+            <a:schemeClr val="lt1"/>
+          </a:fontRef>
+        </p:style>
+        <p:txBody>
+          <a:bodyPr wrap="none" lIns="0" tIns="0" rIns="0" bIns="0" rtlCol="0" anchor="ctr"/>
+          <a:lstStyle/>
+          <a:p>
+            <a:pPr algn="ctr"/>
+            <a:r>
+              <a:rPr lang="de-DE" sz="1400" b="1" dirty="0">
+                <a:solidFill>
+                  <a:srgbClr val="FFFFFF"/>
+                </a:solidFill>
+              </a:rPr>
+              <a:t>2</a:t>
+            </a:r>
+            <a:r>
+              <a:rPr lang="de-AT" sz="1400" b="1" dirty="0">
+                <a:solidFill>
+                  <a:srgbClr val="FFFFFF"/>
+                </a:solidFill>
+              </a:rPr>
+              <a:t>0</a:t>
+            </a:r>
+            <a:endParaRPr sz="1400" b="1" dirty="0">
+              <a:solidFill>
+                <a:srgbClr val="FFFFFF"/>
+              </a:solidFill>
+            </a:endParaRPr>
+          </a:p>
+        </p:txBody>
+      </p:sp>
+      <p:sp>
+        <p:nvSpPr>
+          <p:cNvPr id="6" name="Marker 7">
+            <a:extLst>
+              <a:ext uri="{FF2B5EF4-FFF2-40B4-BE49-F238E27FC236}">
+                <a16:creationId xmlns:a16="http://schemas.microsoft.com/office/drawing/2014/main" id="{3948504B-4B65-2EC6-FEEC-704A4FF98CC7}"/>
+              </a:ext>
+            </a:extLst>
+          </p:cNvPr>
+          <p:cNvSpPr/>
+          <p:nvPr/>
+        </p:nvSpPr>
+        <p:spPr>
+          <a:xfrm>
+            <a:off x="10562610" y="8560634"/>
+            <a:ext cx="276345" cy="276345"/>
+          </a:xfrm>
+          <a:prstGeom prst="ellipse">
+            <a:avLst/>
+          </a:prstGeom>
+          <a:solidFill>
+            <a:srgbClr val="E81C2E"/>
+          </a:solidFill>
+          <a:ln w="22225">
+            <a:solidFill>
+              <a:srgbClr val="FFFFFF"/>
+            </a:solidFill>
+          </a:ln>
+          <a:effectLst/>
+        </p:spPr>
+        <p:style>
+          <a:lnRef idx="1">
+            <a:schemeClr val="accent1"/>
+          </a:lnRef>
+          <a:fillRef idx="3">
+            <a:schemeClr val="accent1"/>
+          </a:fillRef>
+          <a:effectRef idx="2">
+            <a:schemeClr val="accent1"/>
+          </a:effectRef>
+          <a:fontRef idx="minor">
+            <a:schemeClr val="lt1"/>
+          </a:fontRef>
+        </p:style>
+        <p:txBody>
+          <a:bodyPr wrap="none" lIns="0" tIns="0" rIns="0" bIns="0" rtlCol="0" anchor="ctr"/>
+          <a:lstStyle/>
+          <a:p>
+            <a:pPr algn="ctr"/>
+            <a:r>
+              <a:rPr lang="de-AT" sz="1400" b="1" dirty="0">
+                <a:solidFill>
+                  <a:srgbClr val="FFFFFF"/>
+                </a:solidFill>
+              </a:rPr>
+              <a:t>20</a:t>
+            </a:r>
+            <a:endParaRPr sz="1400" b="1" dirty="0">
+              <a:solidFill>
+                <a:srgbClr val="FFFFFF"/>
+              </a:solidFill>
+            </a:endParaRPr>
+          </a:p>
+        </p:txBody>
+      </p:sp>
+      <p:sp>
+        <p:nvSpPr>
+          <p:cNvPr id="10" name="Textfeld 9">
+            <a:extLst>
+              <a:ext uri="{FF2B5EF4-FFF2-40B4-BE49-F238E27FC236}">
+                <a16:creationId xmlns:a16="http://schemas.microsoft.com/office/drawing/2014/main" id="{DBA0CDB2-2895-6461-4B66-3187FB2A42B0}"/>
+              </a:ext>
+            </a:extLst>
+          </p:cNvPr>
+          <p:cNvSpPr txBox="1"/>
+          <p:nvPr/>
+        </p:nvSpPr>
+        <p:spPr>
+          <a:xfrm>
+            <a:off x="179023" y="1555629"/>
+            <a:ext cx="3850052" cy="1856919"/>
+          </a:xfrm>
+          <a:prstGeom prst="rect">
+            <a:avLst/>
+          </a:prstGeom>
+          <a:noFill/>
+        </p:spPr>
+        <p:txBody>
+          <a:bodyPr wrap="square">
+            <a:spAutoFit/>
+          </a:bodyPr>
+          <a:lstStyle/>
+          <a:p>
+            <a:pPr marL="171450" indent="-171450">
+              <a:spcAft>
+                <a:spcPts val="400"/>
+              </a:spcAft>
+              <a:buFont typeface="Arial" panose="020B0604020202020204" pitchFamily="34" charset="0"/>
+              <a:buChar char="•"/>
+            </a:pPr>
+            <a:r>
+              <a:rPr lang="de-DE" sz="1200" dirty="0">
+                <a:solidFill>
+                  <a:srgbClr val="1A1A1A"/>
+                </a:solidFill>
+              </a:rPr>
+              <a:t>Je nach gewählter Fliese wird die Reihe #21 farblich hervorgehoben in der gelegt werden kann.</a:t>
+            </a:r>
+          </a:p>
+          <a:p>
+            <a:pPr marL="171450" indent="-171450">
+              <a:spcAft>
+                <a:spcPts val="400"/>
+              </a:spcAft>
+              <a:buFont typeface="Arial" panose="020B0604020202020204" pitchFamily="34" charset="0"/>
+              <a:buChar char="•"/>
+            </a:pPr>
+            <a:r>
+              <a:rPr lang="de-DE" sz="1200" dirty="0">
+                <a:solidFill>
+                  <a:srgbClr val="1A1A1A"/>
+                </a:solidFill>
+              </a:rPr>
+              <a:t>Gewählte Fliese kann auch auf den Boden / Strafleiste #22 gelegt werden. Dies kostet je abgelegter Fliese mehr (die erste -1, die zweite -2, </a:t>
+            </a:r>
+            <a:r>
+              <a:rPr lang="de-DE" sz="1200" dirty="0" err="1">
+                <a:solidFill>
+                  <a:srgbClr val="1A1A1A"/>
+                </a:solidFill>
+              </a:rPr>
+              <a:t>usw</a:t>
+            </a:r>
+            <a:r>
+              <a:rPr lang="de-DE" sz="1200" dirty="0">
+                <a:solidFill>
+                  <a:srgbClr val="1A1A1A"/>
+                </a:solidFill>
+              </a:rPr>
+              <a:t>) und ist additiv. Zwei Fliesen hier bedeuten -3 Punkte. Drei Fliesen dann bereits -6 Punkte.</a:t>
+            </a:r>
+          </a:p>
+          <a:p>
+            <a:pPr marL="171450" indent="-171450">
+              <a:spcAft>
+                <a:spcPts val="400"/>
+              </a:spcAft>
+              <a:buFont typeface="Arial" panose="020B0604020202020204" pitchFamily="34" charset="0"/>
+              <a:buChar char="•"/>
+            </a:pPr>
+            <a:r>
+              <a:rPr lang="de-DE" sz="1200" dirty="0">
+                <a:solidFill>
+                  <a:srgbClr val="1A1A1A"/>
+                </a:solidFill>
+              </a:rPr>
+              <a:t>Ablage für Bonuschips #25. Dies können später eingelöst werden, um Musterreihen zu vervollständigen.</a:t>
+            </a:r>
+          </a:p>
+        </p:txBody>
+      </p:sp>
+      <p:sp>
+        <p:nvSpPr>
+          <p:cNvPr id="14" name="Bereich 5">
+            <a:extLst>
+              <a:ext uri="{FF2B5EF4-FFF2-40B4-BE49-F238E27FC236}">
+                <a16:creationId xmlns:a16="http://schemas.microsoft.com/office/drawing/2014/main" id="{879B7662-8AA0-EB17-9863-5151E99E2BAA}"/>
+              </a:ext>
+            </a:extLst>
+          </p:cNvPr>
+          <p:cNvSpPr/>
+          <p:nvPr/>
+        </p:nvSpPr>
+        <p:spPr>
+          <a:xfrm>
+            <a:off x="3762375" y="5054300"/>
+            <a:ext cx="1703587" cy="547830"/>
+          </a:xfrm>
+          <a:prstGeom prst="roundRect">
+            <a:avLst>
+              <a:gd name="adj" fmla="val 9477"/>
+            </a:avLst>
+          </a:prstGeom>
+          <a:noFill/>
+          <a:ln w="28575">
+            <a:solidFill>
+              <a:srgbClr val="E81C2E"/>
+            </a:solidFill>
+          </a:ln>
+          <a:effectLst/>
+        </p:spPr>
+        <p:style>
+          <a:lnRef idx="1">
+            <a:schemeClr val="accent1"/>
+          </a:lnRef>
+          <a:fillRef idx="3">
+            <a:schemeClr val="accent1"/>
+          </a:fillRef>
+          <a:effectRef idx="2">
+            <a:schemeClr val="accent1"/>
+          </a:effectRef>
+          <a:fontRef idx="minor">
+            <a:schemeClr val="lt1"/>
+          </a:fontRef>
+        </p:style>
+        <p:txBody>
+          <a:bodyPr rtlCol="0" anchor="ctr"/>
+          <a:lstStyle/>
+          <a:p>
+            <a:pPr algn="ctr"/>
+            <a:endParaRPr/>
+          </a:p>
+        </p:txBody>
+      </p:sp>
+      <p:sp>
+        <p:nvSpPr>
+          <p:cNvPr id="18" name="Marker 7">
+            <a:extLst>
+              <a:ext uri="{FF2B5EF4-FFF2-40B4-BE49-F238E27FC236}">
+                <a16:creationId xmlns:a16="http://schemas.microsoft.com/office/drawing/2014/main" id="{4DDFF91F-A342-8DB0-B316-10A0E51909E0}"/>
+              </a:ext>
+            </a:extLst>
+          </p:cNvPr>
+          <p:cNvSpPr/>
+          <p:nvPr/>
+        </p:nvSpPr>
+        <p:spPr>
+          <a:xfrm>
+            <a:off x="5032384" y="5124216"/>
+            <a:ext cx="276345" cy="276345"/>
+          </a:xfrm>
+          <a:prstGeom prst="ellipse">
+            <a:avLst/>
+          </a:prstGeom>
+          <a:solidFill>
+            <a:srgbClr val="E81C2E"/>
+          </a:solidFill>
+          <a:ln w="22225">
+            <a:solidFill>
+              <a:srgbClr val="FFFFFF"/>
+            </a:solidFill>
+          </a:ln>
+          <a:effectLst/>
+        </p:spPr>
+        <p:style>
+          <a:lnRef idx="1">
+            <a:schemeClr val="accent1"/>
+          </a:lnRef>
+          <a:fillRef idx="3">
+            <a:schemeClr val="accent1"/>
+          </a:fillRef>
+          <a:effectRef idx="2">
+            <a:schemeClr val="accent1"/>
+          </a:effectRef>
+          <a:fontRef idx="minor">
+            <a:schemeClr val="lt1"/>
+          </a:fontRef>
+        </p:style>
+        <p:txBody>
+          <a:bodyPr wrap="none" lIns="0" tIns="0" rIns="0" bIns="0" rtlCol="0" anchor="ctr"/>
+          <a:lstStyle/>
+          <a:p>
+            <a:pPr algn="ctr"/>
+            <a:r>
+              <a:rPr lang="de-AT" sz="1400" b="1" dirty="0">
+                <a:solidFill>
+                  <a:srgbClr val="FFFFFF"/>
+                </a:solidFill>
+              </a:rPr>
+              <a:t>22</a:t>
+            </a:r>
+            <a:endParaRPr sz="1400" b="1" dirty="0">
+              <a:solidFill>
+                <a:srgbClr val="FFFFFF"/>
+              </a:solidFill>
+            </a:endParaRPr>
+          </a:p>
+        </p:txBody>
+      </p:sp>
+      <p:sp>
+        <p:nvSpPr>
+          <p:cNvPr id="21" name="Bereich 5">
+            <a:extLst>
+              <a:ext uri="{FF2B5EF4-FFF2-40B4-BE49-F238E27FC236}">
+                <a16:creationId xmlns:a16="http://schemas.microsoft.com/office/drawing/2014/main" id="{F27DB887-F34C-D873-2B3D-24E26F5D19A8}"/>
+              </a:ext>
+            </a:extLst>
+          </p:cNvPr>
+          <p:cNvSpPr/>
+          <p:nvPr/>
+        </p:nvSpPr>
+        <p:spPr>
+          <a:xfrm>
+            <a:off x="3774969" y="5649538"/>
+            <a:ext cx="1542568" cy="629087"/>
+          </a:xfrm>
+          <a:prstGeom prst="roundRect">
+            <a:avLst>
+              <a:gd name="adj" fmla="val 13517"/>
+            </a:avLst>
+          </a:prstGeom>
+          <a:noFill/>
+          <a:ln w="28575">
+            <a:solidFill>
+              <a:srgbClr val="E81C2E"/>
+            </a:solidFill>
+          </a:ln>
+          <a:effectLst/>
+        </p:spPr>
+        <p:style>
+          <a:lnRef idx="1">
+            <a:schemeClr val="accent1"/>
+          </a:lnRef>
+          <a:fillRef idx="3">
+            <a:schemeClr val="accent1"/>
+          </a:fillRef>
+          <a:effectRef idx="2">
+            <a:schemeClr val="accent1"/>
+          </a:effectRef>
+          <a:fontRef idx="minor">
+            <a:schemeClr val="lt1"/>
+          </a:fontRef>
+        </p:style>
+        <p:txBody>
+          <a:bodyPr rtlCol="0" anchor="ctr"/>
+          <a:lstStyle/>
+          <a:p>
+            <a:pPr algn="ctr"/>
+            <a:endParaRPr/>
+          </a:p>
+        </p:txBody>
+      </p:sp>
+      <p:sp>
+        <p:nvSpPr>
+          <p:cNvPr id="23" name="Marker 7">
+            <a:extLst>
+              <a:ext uri="{FF2B5EF4-FFF2-40B4-BE49-F238E27FC236}">
+                <a16:creationId xmlns:a16="http://schemas.microsoft.com/office/drawing/2014/main" id="{9A37879B-09AE-D43D-A4CC-7E39D2F99344}"/>
+              </a:ext>
+            </a:extLst>
+          </p:cNvPr>
+          <p:cNvSpPr/>
+          <p:nvPr/>
+        </p:nvSpPr>
+        <p:spPr>
+          <a:xfrm>
+            <a:off x="5076621" y="6125213"/>
+            <a:ext cx="276345" cy="276345"/>
+          </a:xfrm>
+          <a:prstGeom prst="ellipse">
+            <a:avLst/>
+          </a:prstGeom>
+          <a:solidFill>
+            <a:srgbClr val="E81C2E"/>
+          </a:solidFill>
+          <a:ln w="22225">
+            <a:solidFill>
+              <a:srgbClr val="FFFFFF"/>
+            </a:solidFill>
+          </a:ln>
+          <a:effectLst/>
+        </p:spPr>
+        <p:style>
+          <a:lnRef idx="1">
+            <a:schemeClr val="accent1"/>
+          </a:lnRef>
+          <a:fillRef idx="3">
+            <a:schemeClr val="accent1"/>
+          </a:fillRef>
+          <a:effectRef idx="2">
+            <a:schemeClr val="accent1"/>
+          </a:effectRef>
+          <a:fontRef idx="minor">
+            <a:schemeClr val="lt1"/>
+          </a:fontRef>
+        </p:style>
+        <p:txBody>
+          <a:bodyPr wrap="none" lIns="0" tIns="0" rIns="0" bIns="0" rtlCol="0" anchor="ctr"/>
+          <a:lstStyle/>
+          <a:p>
+            <a:pPr algn="ctr"/>
+            <a:r>
+              <a:rPr lang="de-AT" sz="1400" b="1" dirty="0">
+                <a:solidFill>
+                  <a:srgbClr val="FFFFFF"/>
+                </a:solidFill>
+              </a:rPr>
+              <a:t>25</a:t>
+            </a:r>
+            <a:endParaRPr sz="1400" b="1" dirty="0">
+              <a:solidFill>
+                <a:srgbClr val="FFFFFF"/>
+              </a:solidFill>
+            </a:endParaRPr>
+          </a:p>
+        </p:txBody>
+      </p:sp>
+      <p:sp>
+        <p:nvSpPr>
+          <p:cNvPr id="31" name="Marker 7">
+            <a:extLst>
+              <a:ext uri="{FF2B5EF4-FFF2-40B4-BE49-F238E27FC236}">
+                <a16:creationId xmlns:a16="http://schemas.microsoft.com/office/drawing/2014/main" id="{38921BE3-4A2A-C7C6-EE66-31A3C41EBF06}"/>
+              </a:ext>
+            </a:extLst>
+          </p:cNvPr>
+          <p:cNvSpPr/>
+          <p:nvPr/>
+        </p:nvSpPr>
+        <p:spPr>
+          <a:xfrm>
+            <a:off x="9789355" y="6855807"/>
+            <a:ext cx="276345" cy="276345"/>
+          </a:xfrm>
+          <a:prstGeom prst="ellipse">
+            <a:avLst/>
+          </a:prstGeom>
+          <a:solidFill>
+            <a:srgbClr val="E81C2E"/>
+          </a:solidFill>
+          <a:ln w="22225">
+            <a:solidFill>
+              <a:srgbClr val="FFFFFF"/>
+            </a:solidFill>
+          </a:ln>
+          <a:effectLst/>
+        </p:spPr>
+        <p:style>
+          <a:lnRef idx="1">
+            <a:schemeClr val="accent1"/>
+          </a:lnRef>
+          <a:fillRef idx="3">
+            <a:schemeClr val="accent1"/>
+          </a:fillRef>
+          <a:effectRef idx="2">
+            <a:schemeClr val="accent1"/>
+          </a:effectRef>
+          <a:fontRef idx="minor">
+            <a:schemeClr val="lt1"/>
+          </a:fontRef>
+        </p:style>
+        <p:txBody>
+          <a:bodyPr wrap="none" lIns="0" tIns="0" rIns="0" bIns="0" rtlCol="0" anchor="ctr"/>
+          <a:lstStyle/>
+          <a:p>
+            <a:pPr algn="ctr"/>
+            <a:r>
+              <a:rPr lang="de-AT" sz="1400" b="1" dirty="0">
+                <a:solidFill>
+                  <a:srgbClr val="FFFFFF"/>
+                </a:solidFill>
+              </a:rPr>
+              <a:t>23‘</a:t>
+            </a:r>
+            <a:endParaRPr sz="1400" b="1" dirty="0">
+              <a:solidFill>
+                <a:srgbClr val="FFFFFF"/>
+              </a:solidFill>
+            </a:endParaRPr>
+          </a:p>
+        </p:txBody>
+      </p:sp>
+      <p:sp>
+        <p:nvSpPr>
+          <p:cNvPr id="34" name="Marker 7">
+            <a:extLst>
+              <a:ext uri="{FF2B5EF4-FFF2-40B4-BE49-F238E27FC236}">
+                <a16:creationId xmlns:a16="http://schemas.microsoft.com/office/drawing/2014/main" id="{2566BD52-4623-3A73-0D71-423072A09347}"/>
+              </a:ext>
+            </a:extLst>
+          </p:cNvPr>
+          <p:cNvSpPr/>
+          <p:nvPr/>
+        </p:nvSpPr>
+        <p:spPr>
+          <a:xfrm>
+            <a:off x="9789355" y="7790834"/>
+            <a:ext cx="276345" cy="276345"/>
+          </a:xfrm>
+          <a:prstGeom prst="ellipse">
+            <a:avLst/>
+          </a:prstGeom>
+          <a:solidFill>
+            <a:srgbClr val="E81C2E"/>
+          </a:solidFill>
+          <a:ln w="22225">
+            <a:solidFill>
+              <a:srgbClr val="FFFFFF"/>
+            </a:solidFill>
+          </a:ln>
+          <a:effectLst/>
+        </p:spPr>
+        <p:style>
+          <a:lnRef idx="1">
+            <a:schemeClr val="accent1"/>
+          </a:lnRef>
+          <a:fillRef idx="3">
+            <a:schemeClr val="accent1"/>
+          </a:fillRef>
+          <a:effectRef idx="2">
+            <a:schemeClr val="accent1"/>
+          </a:effectRef>
+          <a:fontRef idx="minor">
+            <a:schemeClr val="lt1"/>
+          </a:fontRef>
+        </p:style>
+        <p:txBody>
+          <a:bodyPr wrap="none" lIns="0" tIns="0" rIns="0" bIns="0" rtlCol="0" anchor="ctr"/>
+          <a:lstStyle/>
+          <a:p>
+            <a:pPr algn="ctr"/>
+            <a:r>
+              <a:rPr lang="de-AT" sz="1400" b="1" dirty="0">
+                <a:solidFill>
+                  <a:srgbClr val="FFFFFF"/>
+                </a:solidFill>
+              </a:rPr>
+              <a:t>23‘</a:t>
             </a:r>
             <a:endParaRPr sz="1400" b="1" dirty="0">
               <a:solidFill>
@@ -24502,7 +27440,7 @@
         <p:spPr>
           <a:xfrm>
             <a:off x="6450246" y="794957"/>
-            <a:ext cx="6578600" cy="4196020"/>
+            <a:ext cx="6578600" cy="4247317"/>
           </a:xfrm>
           <a:prstGeom prst="rect">
             <a:avLst/>
@@ -24515,10 +27453,12 @@
           </a:bodyPr>
           <a:lstStyle/>
           <a:p>
-            <a:pPr>
+            <a:pPr marL="285750" indent="-285750">
               <a:spcAft>
                 <a:spcPts val="400"/>
               </a:spcAft>
+              <a:buFont typeface="Arial" panose="020B0604020202020204" pitchFamily="34" charset="0"/>
+              <a:buChar char="•"/>
             </a:pPr>
             <a:r>
               <a:rPr lang="de-DE" sz="1600" dirty="0">
@@ -24526,7 +27466,7 @@
                   <a:srgbClr val="1A1A1A"/>
                 </a:solidFill>
               </a:rPr>
-              <a:t>7. Kuppelplatten vom Stapel ziehen und auf die Kuppel (6) legen. Insgesamt 2 Kuppelplatten müssen je Runde &amp; Spieler gezogen werden. Über das Symbol lässt sich erkennen ob es sich um eine Spezialplatte oder um eine </a:t>
+              <a:t>Kuppelplatten vom Stapel ziehen #14‘ und auf die Kuppel #19 legen. Insgesamt 2 Kuppelplatten müssen je Runde &amp; Spieler gezogen werden. Über das Symbol lässt sich erkennen ob es sich um eine Spezialplatte oder um eine </a:t>
             </a:r>
             <a:r>
               <a:rPr lang="de-DE" sz="1600" dirty="0" err="1">
@@ -24546,10 +27486,12 @@
             </a:r>
           </a:p>
           <a:p>
-            <a:pPr>
+            <a:pPr marL="285750" indent="-285750">
               <a:spcAft>
                 <a:spcPts val="400"/>
               </a:spcAft>
+              <a:buFont typeface="Arial" panose="020B0604020202020204" pitchFamily="34" charset="0"/>
+              <a:buChar char="•"/>
             </a:pPr>
             <a:r>
               <a:rPr lang="de-DE" sz="1600" dirty="0">
@@ -24557,14 +27499,16 @@
                   <a:srgbClr val="1A1A1A"/>
                 </a:solidFill>
               </a:rPr>
-              <a:t>8. Es können mehrere Platten gezogen werden, Kosten jedoch jeweils -1 Punkt. Die bisherigen Rückseiten sind bekannt. Vorderseiten werden erst sichtbar sobald das Ziehen abgeschlossen ist.</a:t>
+              <a:t>Es können mehrere Platten gezogen werden #26, Kosten jedoch jeweils -1 Punkt. Die bisherigen Rückseiten sind bekannt. Vorderseiten werden erst sichtbar sobald das Ziehen abgeschlossen ist.</a:t>
             </a:r>
           </a:p>
           <a:p>
-            <a:pPr>
+            <a:pPr marL="285750" indent="-285750">
               <a:spcAft>
                 <a:spcPts val="400"/>
               </a:spcAft>
+              <a:buFont typeface="Arial" panose="020B0604020202020204" pitchFamily="34" charset="0"/>
+              <a:buChar char="•"/>
             </a:pPr>
             <a:r>
               <a:rPr lang="de-DE" sz="1600" dirty="0">
@@ -24572,14 +27516,16 @@
                   <a:srgbClr val="1A1A1A"/>
                 </a:solidFill>
               </a:rPr>
-              <a:t>9. Abschluss des Ziehens, Übergang in die Auswahl</a:t>
+              <a:t>Abschluss des Ziehens #27, Übergang in die Auswahl</a:t>
             </a:r>
           </a:p>
           <a:p>
-            <a:pPr>
+            <a:pPr marL="285750" indent="-285750">
               <a:spcAft>
                 <a:spcPts val="400"/>
               </a:spcAft>
+              <a:buFont typeface="Arial" panose="020B0604020202020204" pitchFamily="34" charset="0"/>
+              <a:buChar char="•"/>
             </a:pPr>
             <a:r>
               <a:rPr lang="de-DE" sz="1600" dirty="0">
@@ -24587,14 +27533,16 @@
                   <a:srgbClr val="1A1A1A"/>
                 </a:solidFill>
               </a:rPr>
-              <a:t>10. Zuerst selektieren welche Platte gelegt werden soll</a:t>
+              <a:t>Zuerst selektieren welche Platte gelegt werden soll #15</a:t>
             </a:r>
           </a:p>
           <a:p>
-            <a:pPr>
+            <a:pPr marL="285750" indent="-285750">
               <a:spcAft>
                 <a:spcPts val="400"/>
               </a:spcAft>
+              <a:buFont typeface="Arial" panose="020B0604020202020204" pitchFamily="34" charset="0"/>
+              <a:buChar char="•"/>
             </a:pPr>
             <a:r>
               <a:rPr lang="de-DE" sz="1600" dirty="0">
@@ -24602,14 +27550,16 @@
                   <a:srgbClr val="1A1A1A"/>
                 </a:solidFill>
               </a:rPr>
-              <a:t>11. Dann Reihenfolge der zurückgelegten Platten auswählen (erst relevant bei mehr als 2 gezogenen Kuppelplatten)</a:t>
+              <a:t>Dann Reihenfolge der zurückgelegten Platten auswählen #28 – erst relevant bei mehr als 2 gezogenen Kuppelplatten</a:t>
             </a:r>
           </a:p>
           <a:p>
-            <a:pPr>
+            <a:pPr marL="285750" indent="-285750">
               <a:spcAft>
                 <a:spcPts val="400"/>
               </a:spcAft>
+              <a:buFont typeface="Arial" panose="020B0604020202020204" pitchFamily="34" charset="0"/>
+              <a:buChar char="•"/>
             </a:pPr>
             <a:r>
               <a:rPr lang="de-DE" sz="1600" dirty="0">
@@ -24617,14 +27567,16 @@
                   <a:srgbClr val="1A1A1A"/>
                 </a:solidFill>
               </a:rPr>
-              <a:t>12. Zurücksetzen der gewählten Reihenfolge</a:t>
+              <a:t>Zurücksetzen der gewählten Reihenfolge #29</a:t>
             </a:r>
           </a:p>
           <a:p>
-            <a:pPr>
+            <a:pPr marL="285750" indent="-285750">
               <a:spcAft>
                 <a:spcPts val="400"/>
               </a:spcAft>
+              <a:buFont typeface="Arial" panose="020B0604020202020204" pitchFamily="34" charset="0"/>
+              <a:buChar char="•"/>
             </a:pPr>
             <a:r>
               <a:rPr lang="de-DE" sz="1600" dirty="0">
@@ -24632,14 +27584,16 @@
                   <a:srgbClr val="1A1A1A"/>
                 </a:solidFill>
               </a:rPr>
-              <a:t>13. Rotation der zu legenden Kuppelplatte festlegen</a:t>
+              <a:t>Rotation der zu legenden Kuppelplatte festlegen #16</a:t>
             </a:r>
           </a:p>
           <a:p>
-            <a:pPr>
+            <a:pPr marL="285750" indent="-285750">
               <a:spcAft>
                 <a:spcPts val="400"/>
               </a:spcAft>
+              <a:buFont typeface="Arial" panose="020B0604020202020204" pitchFamily="34" charset="0"/>
+              <a:buChar char="•"/>
             </a:pPr>
             <a:r>
               <a:rPr lang="de-DE" sz="1600" dirty="0">
@@ -24647,14 +27601,16 @@
                   <a:srgbClr val="1A1A1A"/>
                 </a:solidFill>
               </a:rPr>
-              <a:t>14. Vorschau der zu legenden und rotierten Kuppelplatte</a:t>
+              <a:t>Vorschau der zu legenden und rotierten Kuppelplatte #17</a:t>
             </a:r>
           </a:p>
           <a:p>
-            <a:pPr>
+            <a:pPr marL="285750" indent="-285750">
               <a:spcAft>
                 <a:spcPts val="400"/>
               </a:spcAft>
+              <a:buFont typeface="Arial" panose="020B0604020202020204" pitchFamily="34" charset="0"/>
+              <a:buChar char="•"/>
             </a:pPr>
             <a:r>
               <a:rPr lang="de-DE" sz="1600" dirty="0">
@@ -24662,7 +27618,7 @@
                   <a:srgbClr val="1A1A1A"/>
                 </a:solidFill>
               </a:rPr>
-              <a:t>15. Abschluss</a:t>
+              <a:t>Bestätigen, kein Abbruch möglich #30</a:t>
             </a:r>
           </a:p>
         </p:txBody>
@@ -24777,7 +27733,7 @@
                     <a:srgbClr val="FFFFFF"/>
                   </a:solidFill>
                 </a:rPr>
-                <a:t>8</a:t>
+                <a:t>26</a:t>
               </a:r>
               <a:endParaRPr sz="1400" b="1" dirty="0">
                 <a:solidFill>
@@ -24878,7 +27834,7 @@
                     <a:srgbClr val="FFFFFF"/>
                   </a:solidFill>
                 </a:rPr>
-                <a:t>8</a:t>
+                <a:t>26</a:t>
               </a:r>
               <a:endParaRPr sz="1400" b="1" dirty="0">
                 <a:solidFill>
@@ -24943,7 +27899,7 @@
                     <a:srgbClr val="FFFFFF"/>
                   </a:solidFill>
                 </a:rPr>
-                <a:t>9</a:t>
+                <a:t>27</a:t>
               </a:r>
               <a:endParaRPr sz="1400" b="1" dirty="0">
                 <a:solidFill>
@@ -25008,7 +27964,7 @@
                     <a:srgbClr val="FFFFFF"/>
                   </a:solidFill>
                 </a:rPr>
-                <a:t>9</a:t>
+                <a:t>27</a:t>
               </a:r>
               <a:endParaRPr sz="1400" b="1" dirty="0">
                 <a:solidFill>
@@ -25149,7 +28105,7 @@
                       <a:srgbClr val="FFFFFF"/>
                     </a:solidFill>
                   </a:rPr>
-                  <a:t>10</a:t>
+                  <a:t>15</a:t>
                 </a:r>
                 <a:endParaRPr sz="1400" b="1" dirty="0">
                   <a:solidFill>
@@ -25336,7 +28292,7 @@
                     <a:srgbClr val="FFFFFF"/>
                   </a:solidFill>
                 </a:rPr>
-                <a:t>12</a:t>
+                <a:t>28</a:t>
               </a:r>
               <a:endParaRPr sz="1400" b="1" dirty="0">
                 <a:solidFill>
@@ -25401,7 +28357,7 @@
                     <a:srgbClr val="FFFFFF"/>
                   </a:solidFill>
                 </a:rPr>
-                <a:t>13</a:t>
+                <a:t>16</a:t>
               </a:r>
               <a:endParaRPr sz="1400" b="1" dirty="0">
                 <a:solidFill>
@@ -25466,7 +28422,7 @@
                     <a:srgbClr val="FFFFFF"/>
                   </a:solidFill>
                 </a:rPr>
-                <a:t>14</a:t>
+                <a:t>17</a:t>
               </a:r>
               <a:endParaRPr sz="1400" b="1" dirty="0">
                 <a:solidFill>
@@ -25531,7 +28487,7 @@
                     <a:srgbClr val="FFFFFF"/>
                   </a:solidFill>
                 </a:rPr>
-                <a:t>15</a:t>
+                <a:t>30</a:t>
               </a:r>
               <a:endParaRPr sz="1400" b="1" dirty="0">
                 <a:solidFill>
@@ -25596,7 +28552,7 @@
                     <a:srgbClr val="FFFFFF"/>
                   </a:solidFill>
                 </a:rPr>
-                <a:t>11</a:t>
+                <a:t>29</a:t>
               </a:r>
               <a:endParaRPr sz="1400" b="1" dirty="0">
                 <a:solidFill>
@@ -25882,7 +28838,7 @@
         <p:spPr>
           <a:xfrm>
             <a:off x="6269942" y="2121481"/>
-            <a:ext cx="6578600" cy="2616101"/>
+            <a:ext cx="6578600" cy="2862322"/>
           </a:xfrm>
           <a:prstGeom prst="rect">
             <a:avLst/>
@@ -25895,10 +28851,12 @@
           </a:bodyPr>
           <a:lstStyle/>
           <a:p>
-            <a:pPr>
+            <a:pPr marL="285750" indent="-285750">
               <a:spcAft>
                 <a:spcPts val="400"/>
               </a:spcAft>
+              <a:buFont typeface="Arial" panose="020B0604020202020204" pitchFamily="34" charset="0"/>
+              <a:buChar char="•"/>
             </a:pPr>
             <a:r>
               <a:rPr lang="de-DE" sz="1600" dirty="0">
@@ -25906,14 +28864,16 @@
                   <a:srgbClr val="1A1A1A"/>
                 </a:solidFill>
               </a:rPr>
-              <a:t>8. Es können mehrere Platten gezogen werden, Kosten jedoch jeweils -1 Punkt. Die bisherigen Rückseiten sind bekannt. Vorderseiten werden erst sichtbar sobald das Ziehen abgeschlossen ist.</a:t>
+              <a:t>Es können mehrere Platten gezogen werden #26, Kosten jedoch jeweils -1 Punkt. Die bisherigen Rückseiten sind bekannt. Vorderseiten werden erst sichtbar sobald das Ziehen abgeschlossen ist.</a:t>
             </a:r>
           </a:p>
           <a:p>
-            <a:pPr>
+            <a:pPr marL="285750" indent="-285750">
               <a:spcAft>
                 <a:spcPts val="400"/>
               </a:spcAft>
+              <a:buFont typeface="Arial" panose="020B0604020202020204" pitchFamily="34" charset="0"/>
+              <a:buChar char="•"/>
             </a:pPr>
             <a:r>
               <a:rPr lang="de-DE" sz="1600" dirty="0">
@@ -25921,14 +28881,16 @@
                   <a:srgbClr val="1A1A1A"/>
                 </a:solidFill>
               </a:rPr>
-              <a:t>9. Abschluss des Ziehens, Übergang in die Auswahl, weiter mit Fenster F2</a:t>
+              <a:t>Abschluss des Ziehens #27, Übergang in die Auswahl, weiter mit Fenster #F2</a:t>
             </a:r>
           </a:p>
           <a:p>
-            <a:pPr>
+            <a:pPr marL="285750" indent="-285750">
               <a:spcAft>
                 <a:spcPts val="400"/>
               </a:spcAft>
+              <a:buFont typeface="Arial" panose="020B0604020202020204" pitchFamily="34" charset="0"/>
+              <a:buChar char="•"/>
             </a:pPr>
             <a:r>
               <a:rPr lang="de-DE" sz="1600" dirty="0">
@@ -25936,14 +28898,16 @@
                   <a:srgbClr val="1A1A1A"/>
                 </a:solidFill>
               </a:rPr>
-              <a:t>16. Auslage, zu legende Kuppelplatte kann noch geändert werden</a:t>
+              <a:t>Auslage #15, zu legende Kuppelplatte kann noch geändert werden</a:t>
             </a:r>
           </a:p>
           <a:p>
-            <a:pPr>
+            <a:pPr marL="285750" indent="-285750">
               <a:spcAft>
                 <a:spcPts val="400"/>
               </a:spcAft>
+              <a:buFont typeface="Arial" panose="020B0604020202020204" pitchFamily="34" charset="0"/>
+              <a:buChar char="•"/>
             </a:pPr>
             <a:r>
               <a:rPr lang="de-DE" sz="1600" dirty="0">
@@ -25951,14 +28915,16 @@
                   <a:srgbClr val="1A1A1A"/>
                 </a:solidFill>
               </a:rPr>
-              <a:t>17. Rotation der zu legenden Kuppelplatte festlegen</a:t>
+              <a:t>Rotation der zu legenden Kuppelplatte festlegen #16</a:t>
             </a:r>
           </a:p>
           <a:p>
-            <a:pPr>
+            <a:pPr marL="285750" indent="-285750">
               <a:spcAft>
                 <a:spcPts val="400"/>
               </a:spcAft>
+              <a:buFont typeface="Arial" panose="020B0604020202020204" pitchFamily="34" charset="0"/>
+              <a:buChar char="•"/>
             </a:pPr>
             <a:r>
               <a:rPr lang="de-DE" sz="1600" dirty="0">
@@ -25966,14 +28932,16 @@
                   <a:srgbClr val="1A1A1A"/>
                 </a:solidFill>
               </a:rPr>
-              <a:t>18. Vorschau der zu legenden Kuppelplatte</a:t>
+              <a:t>Vorschau #17der zu legenden Kuppelplatte</a:t>
             </a:r>
           </a:p>
           <a:p>
-            <a:pPr>
+            <a:pPr marL="285750" indent="-285750">
               <a:spcAft>
                 <a:spcPts val="400"/>
               </a:spcAft>
+              <a:buFont typeface="Arial" panose="020B0604020202020204" pitchFamily="34" charset="0"/>
+              <a:buChar char="•"/>
             </a:pPr>
             <a:r>
               <a:rPr lang="de-DE" sz="1600" dirty="0">
@@ -25981,7 +28949,7 @@
                   <a:srgbClr val="1A1A1A"/>
                 </a:solidFill>
               </a:rPr>
-              <a:t>19. Abschluss</a:t>
+              <a:t>Bestätigen oder Abbrechen #18</a:t>
             </a:r>
           </a:p>
           <a:p>
@@ -26053,7 +29021,7 @@
                   <a:srgbClr val="FFFFFF"/>
                 </a:solidFill>
               </a:rPr>
-              <a:t>8</a:t>
+              <a:t>26</a:t>
             </a:r>
             <a:endParaRPr sz="1400" b="1" dirty="0">
               <a:solidFill>
@@ -26118,7 +29086,7 @@
                   <a:srgbClr val="FFFFFF"/>
                 </a:solidFill>
               </a:rPr>
-              <a:t>9</a:t>
+              <a:t>27</a:t>
             </a:r>
             <a:endParaRPr sz="1400" b="1" dirty="0">
               <a:solidFill>
@@ -26183,7 +29151,7 @@
                   <a:srgbClr val="FFFFFF"/>
                 </a:solidFill>
               </a:rPr>
-              <a:t>16</a:t>
+              <a:t>15</a:t>
             </a:r>
             <a:endParaRPr sz="1400" b="1" dirty="0">
               <a:solidFill>
@@ -26248,7 +29216,7 @@
                   <a:srgbClr val="FFFFFF"/>
                 </a:solidFill>
               </a:rPr>
-              <a:t>17</a:t>
+              <a:t>16</a:t>
             </a:r>
             <a:endParaRPr sz="1400" b="1" dirty="0">
               <a:solidFill>
@@ -26313,7 +29281,7 @@
                   <a:srgbClr val="FFFFFF"/>
                 </a:solidFill>
               </a:rPr>
-              <a:t>18</a:t>
+              <a:t>17</a:t>
             </a:r>
             <a:endParaRPr sz="1400" b="1" dirty="0">
               <a:solidFill>
@@ -26378,7 +29346,7 @@
                   <a:srgbClr val="FFFFFF"/>
                 </a:solidFill>
               </a:rPr>
-              <a:t>19</a:t>
+              <a:t>18</a:t>
             </a:r>
             <a:endParaRPr sz="1400" b="1" dirty="0">
               <a:solidFill>
@@ -26478,14 +29446,13 @@
         </p:nvPicPr>
         <p:blipFill>
           <a:blip r:embed="rId2"/>
-          <a:stretch>
-            <a:fillRect/>
-          </a:stretch>
+          <a:srcRect/>
+          <a:stretch/>
         </p:blipFill>
         <p:spPr>
           <a:xfrm>
-            <a:off x="2953122" y="2337206"/>
-            <a:ext cx="3801005" cy="4267796"/>
+            <a:off x="1182460" y="2975056"/>
+            <a:ext cx="3801005" cy="4234030"/>
           </a:xfrm>
           <a:prstGeom prst="rect">
             <a:avLst/>
@@ -26511,7 +29478,7 @@
         </p:nvSpPr>
         <p:spPr>
           <a:xfrm>
-            <a:off x="2559656" y="2516664"/>
+            <a:off x="788994" y="3137631"/>
             <a:ext cx="432000" cy="432000"/>
           </a:xfrm>
           <a:prstGeom prst="ellipse">
@@ -26576,7 +29543,7 @@
         </p:nvSpPr>
         <p:spPr>
           <a:xfrm>
-            <a:off x="3967017" y="4332931"/>
+            <a:off x="2196355" y="4953898"/>
             <a:ext cx="276345" cy="276345"/>
           </a:xfrm>
           <a:prstGeom prst="ellipse">
@@ -26617,7 +29584,7 @@
                   <a:srgbClr val="FFFFFF"/>
                 </a:solidFill>
               </a:rPr>
-              <a:t>1</a:t>
+              <a:t>31</a:t>
             </a:r>
             <a:endParaRPr sz="1400" b="1" dirty="0">
               <a:solidFill>
@@ -26641,7 +29608,7 @@
         </p:nvSpPr>
         <p:spPr>
           <a:xfrm>
-            <a:off x="6637122" y="4796571"/>
+            <a:off x="4866460" y="5417538"/>
             <a:ext cx="276345" cy="276345"/>
           </a:xfrm>
           <a:prstGeom prst="ellipse">
@@ -26682,7 +29649,7 @@
                   <a:srgbClr val="FFFFFF"/>
                 </a:solidFill>
               </a:rPr>
-              <a:t>3</a:t>
+              <a:t>33</a:t>
             </a:r>
             <a:endParaRPr sz="1400" b="1" dirty="0">
               <a:solidFill>
@@ -26706,7 +29673,7 @@
         </p:nvSpPr>
         <p:spPr>
           <a:xfrm>
-            <a:off x="4106196" y="5144836"/>
+            <a:off x="2335534" y="5765803"/>
             <a:ext cx="276345" cy="276345"/>
           </a:xfrm>
           <a:prstGeom prst="ellipse">
@@ -26747,7 +29714,7 @@
                   <a:srgbClr val="FFFFFF"/>
                 </a:solidFill>
               </a:rPr>
-              <a:t>2</a:t>
+              <a:t>32</a:t>
             </a:r>
             <a:endParaRPr sz="1400" b="1" dirty="0">
               <a:solidFill>
@@ -26771,7 +29738,7 @@
         </p:nvSpPr>
         <p:spPr>
           <a:xfrm>
-            <a:off x="6043895" y="5905750"/>
+            <a:off x="4273233" y="6526717"/>
             <a:ext cx="276345" cy="276345"/>
           </a:xfrm>
           <a:prstGeom prst="ellipse">
@@ -26812,7 +29779,7 @@
                   <a:srgbClr val="FFFFFF"/>
                 </a:solidFill>
               </a:rPr>
-              <a:t>4</a:t>
+              <a:t>34</a:t>
             </a:r>
             <a:endParaRPr sz="1400" b="1" dirty="0">
               <a:solidFill>
@@ -26836,7 +29803,7 @@
         </p:nvSpPr>
         <p:spPr>
           <a:xfrm>
-            <a:off x="7148827" y="3024880"/>
+            <a:off x="3783119" y="1515962"/>
             <a:ext cx="6578600" cy="1231106"/>
           </a:xfrm>
           <a:prstGeom prst="rect">
@@ -26850,10 +29817,12 @@
           </a:bodyPr>
           <a:lstStyle/>
           <a:p>
-            <a:pPr>
+            <a:pPr marL="285750" indent="-285750">
               <a:spcAft>
                 <a:spcPts val="400"/>
               </a:spcAft>
+              <a:buFont typeface="Arial" panose="020B0604020202020204" pitchFamily="34" charset="0"/>
+              <a:buChar char="•"/>
             </a:pPr>
             <a:r>
               <a:rPr lang="de-DE" sz="1600" dirty="0">
@@ -26861,14 +29830,16 @@
                   <a:srgbClr val="1A1A1A"/>
                 </a:solidFill>
               </a:rPr>
-              <a:t>1. Noch offene Fliesen für die Reihenfolge</a:t>
+              <a:t>Noch offene Fliesen für die Reihenfolge #31</a:t>
             </a:r>
           </a:p>
           <a:p>
-            <a:pPr>
+            <a:pPr marL="285750" indent="-285750">
               <a:spcAft>
                 <a:spcPts val="400"/>
               </a:spcAft>
+              <a:buFont typeface="Arial" panose="020B0604020202020204" pitchFamily="34" charset="0"/>
+              <a:buChar char="•"/>
             </a:pPr>
             <a:r>
               <a:rPr lang="de-DE" sz="1600" dirty="0">
@@ -26876,14 +29847,16 @@
                   <a:srgbClr val="1A1A1A"/>
                 </a:solidFill>
               </a:rPr>
-              <a:t>2. Wie wird der Stapel aussehen mit der momentan aktiven Reihenfolge</a:t>
+              <a:t>Vorschau der Reihenfolge #32</a:t>
             </a:r>
           </a:p>
           <a:p>
-            <a:pPr>
+            <a:pPr marL="285750" indent="-285750">
               <a:spcAft>
                 <a:spcPts val="400"/>
               </a:spcAft>
+              <a:buFont typeface="Arial" panose="020B0604020202020204" pitchFamily="34" charset="0"/>
+              <a:buChar char="•"/>
             </a:pPr>
             <a:r>
               <a:rPr lang="de-DE" sz="1600" dirty="0">
@@ -26891,14 +29864,16 @@
                   <a:srgbClr val="1A1A1A"/>
                 </a:solidFill>
               </a:rPr>
-              <a:t>3. Reihenfolge zurücksetzen</a:t>
+              <a:t>Reihenfolge zurücksetzen #33</a:t>
             </a:r>
           </a:p>
           <a:p>
-            <a:pPr>
+            <a:pPr marL="285750" indent="-285750">
               <a:spcAft>
                 <a:spcPts val="400"/>
               </a:spcAft>
+              <a:buFont typeface="Arial" panose="020B0604020202020204" pitchFamily="34" charset="0"/>
+              <a:buChar char="•"/>
             </a:pPr>
             <a:r>
               <a:rPr lang="de-DE" sz="1600" dirty="0">
@@ -26906,8 +29881,157 @@
                   <a:srgbClr val="1A1A1A"/>
                 </a:solidFill>
               </a:rPr>
-              <a:t>4. Bestätigen</a:t>
-            </a:r>
+              <a:t>Stapel bestätigen oder Aktion abbrechen #34</a:t>
+            </a:r>
+          </a:p>
+        </p:txBody>
+      </p:sp>
+      <p:pic>
+        <p:nvPicPr>
+          <p:cNvPr id="4" name="Grafik 3">
+            <a:extLst>
+              <a:ext uri="{FF2B5EF4-FFF2-40B4-BE49-F238E27FC236}">
+                <a16:creationId xmlns:a16="http://schemas.microsoft.com/office/drawing/2014/main" id="{822861A1-4D5C-58D7-306A-80DC4986C6E4}"/>
+              </a:ext>
+            </a:extLst>
+          </p:cNvPr>
+          <p:cNvPicPr>
+            <a:picLocks noChangeAspect="1"/>
+          </p:cNvPicPr>
+          <p:nvPr/>
+        </p:nvPicPr>
+        <p:blipFill>
+          <a:blip r:embed="rId3"/>
+          <a:stretch>
+            <a:fillRect/>
+          </a:stretch>
+        </p:blipFill>
+        <p:spPr>
+          <a:xfrm>
+            <a:off x="6757990" y="2975056"/>
+            <a:ext cx="3753374" cy="4410691"/>
+          </a:xfrm>
+          <a:prstGeom prst="rect">
+            <a:avLst/>
+          </a:prstGeom>
+          <a:ln w="28575">
+            <a:solidFill>
+              <a:schemeClr val="accent1"/>
+            </a:solidFill>
+          </a:ln>
+        </p:spPr>
+      </p:pic>
+      <p:sp>
+        <p:nvSpPr>
+          <p:cNvPr id="8" name="Marker 7">
+            <a:extLst>
+              <a:ext uri="{FF2B5EF4-FFF2-40B4-BE49-F238E27FC236}">
+                <a16:creationId xmlns:a16="http://schemas.microsoft.com/office/drawing/2014/main" id="{0EAF1E04-E24C-19AD-E0BD-5569644941E2}"/>
+              </a:ext>
+            </a:extLst>
+          </p:cNvPr>
+          <p:cNvSpPr/>
+          <p:nvPr/>
+        </p:nvSpPr>
+        <p:spPr>
+          <a:xfrm>
+            <a:off x="6465582" y="3250692"/>
+            <a:ext cx="432000" cy="432000"/>
+          </a:xfrm>
+          <a:prstGeom prst="ellipse">
+            <a:avLst/>
+          </a:prstGeom>
+          <a:solidFill>
+            <a:schemeClr val="accent1"/>
+          </a:solidFill>
+          <a:ln w="22225">
+            <a:solidFill>
+              <a:srgbClr val="FFFFFF"/>
+            </a:solidFill>
+          </a:ln>
+          <a:effectLst/>
+        </p:spPr>
+        <p:style>
+          <a:lnRef idx="1">
+            <a:schemeClr val="accent1"/>
+          </a:lnRef>
+          <a:fillRef idx="3">
+            <a:schemeClr val="accent1"/>
+          </a:fillRef>
+          <a:effectRef idx="2">
+            <a:schemeClr val="accent1"/>
+          </a:effectRef>
+          <a:fontRef idx="minor">
+            <a:schemeClr val="lt1"/>
+          </a:fontRef>
+        </p:style>
+        <p:txBody>
+          <a:bodyPr wrap="none" lIns="0" tIns="0" rIns="0" bIns="0" rtlCol="0" anchor="ctr"/>
+          <a:lstStyle/>
+          <a:p>
+            <a:pPr algn="ctr"/>
+            <a:r>
+              <a:rPr lang="de-AT" sz="1400" b="1" dirty="0">
+                <a:solidFill>
+                  <a:srgbClr val="FFFFFF"/>
+                </a:solidFill>
+              </a:rPr>
+              <a:t>F4</a:t>
+            </a:r>
+            <a:endParaRPr sz="1400" b="1" dirty="0">
+              <a:solidFill>
+                <a:srgbClr val="FFFFFF"/>
+              </a:solidFill>
+            </a:endParaRPr>
+          </a:p>
+        </p:txBody>
+      </p:sp>
+      <p:sp>
+        <p:nvSpPr>
+          <p:cNvPr id="10" name="Pfeil: nach rechts 9">
+            <a:extLst>
+              <a:ext uri="{FF2B5EF4-FFF2-40B4-BE49-F238E27FC236}">
+                <a16:creationId xmlns:a16="http://schemas.microsoft.com/office/drawing/2014/main" id="{D56432B6-B5A2-CE67-CB08-F5C0C37746A5}"/>
+              </a:ext>
+            </a:extLst>
+          </p:cNvPr>
+          <p:cNvSpPr/>
+          <p:nvPr/>
+        </p:nvSpPr>
+        <p:spPr>
+          <a:xfrm>
+            <a:off x="5467350" y="5101655"/>
+            <a:ext cx="933450" cy="257175"/>
+          </a:xfrm>
+          <a:prstGeom prst="rightArrow">
+            <a:avLst/>
+          </a:prstGeom>
+          <a:ln>
+            <a:noFill/>
+          </a:ln>
+        </p:spPr>
+        <p:style>
+          <a:lnRef idx="2">
+            <a:schemeClr val="accent1">
+              <a:shade val="15000"/>
+            </a:schemeClr>
+          </a:lnRef>
+          <a:fillRef idx="1">
+            <a:schemeClr val="accent1"/>
+          </a:fillRef>
+          <a:effectRef idx="0">
+            <a:schemeClr val="accent1"/>
+          </a:effectRef>
+          <a:fontRef idx="minor">
+            <a:schemeClr val="lt1"/>
+          </a:fontRef>
+        </p:style>
+        <p:txBody>
+          <a:bodyPr rtlCol="0" anchor="ctr"/>
+          <a:lstStyle/>
+          <a:p>
+            <a:pPr algn="ctr"/>
+            <a:endParaRPr lang="de-AT"/>
           </a:p>
         </p:txBody>
       </p:sp>
